--- a/Fase 2/Evidencias proyecto/Presentación Proyecto/ppt presentación final.pptx
+++ b/Fase 2/Evidencias proyecto/Presentación Proyecto/ppt presentación final.pptx
@@ -1,36 +1,40 @@
 
 <file path=ppt/presentation.xml><?xml version="1.0" encoding="utf-8"?>
-<p:presentation xmlns:a="http://schemas.openxmlformats.org/drawingml/2006/main" xmlns:r="http://schemas.openxmlformats.org/officeDocument/2006/relationships" xmlns:p="http://schemas.openxmlformats.org/presentationml/2006/main" saveSubsetFonts="1" embedTrueTypeFonts="true">
+<p:presentation xmlns:a="http://schemas.openxmlformats.org/drawingml/2006/main" xmlns:r="http://schemas.openxmlformats.org/officeDocument/2006/relationships" xmlns:p="http://schemas.openxmlformats.org/presentationml/2006/main" embedTrueTypeFonts="1" saveSubsetFonts="1">
   <p:sldMasterIdLst>
     <p:sldMasterId id="2147483648" r:id="rId1"/>
   </p:sldMasterIdLst>
   <p:sldIdLst>
-    <p:sldId id="256" r:id="rId6"/>
-    <p:sldId id="257" r:id="rId7"/>
-    <p:sldId id="258" r:id="rId8"/>
-    <p:sldId id="259" r:id="rId9"/>
-    <p:sldId id="260" r:id="rId10"/>
-    <p:sldId id="261" r:id="rId11"/>
-    <p:sldId id="262" r:id="rId12"/>
-    <p:sldId id="263" r:id="rId13"/>
-    <p:sldId id="264" r:id="rId14"/>
-    <p:sldId id="265" r:id="rId15"/>
-    <p:sldId id="266" r:id="rId16"/>
+    <p:sldId id="256" r:id="rId2"/>
+    <p:sldId id="257" r:id="rId3"/>
+    <p:sldId id="258" r:id="rId4"/>
+    <p:sldId id="259" r:id="rId5"/>
+    <p:sldId id="260" r:id="rId6"/>
+    <p:sldId id="261" r:id="rId7"/>
+    <p:sldId id="262" r:id="rId8"/>
+    <p:sldId id="263" r:id="rId9"/>
+    <p:sldId id="264" r:id="rId10"/>
+    <p:sldId id="265" r:id="rId11"/>
+    <p:sldId id="266" r:id="rId12"/>
   </p:sldIdLst>
   <p:sldSz cx="18288000" cy="10287000"/>
   <p:notesSz cx="6858000" cy="9144000"/>
   <p:embeddedFontLst>
     <p:embeddedFont>
-      <p:font typeface="Poppins" charset="1" panose="00000500000000000000"/>
-      <p:regular r:id="rId17"/>
+      <p:font typeface="HK Grotesk Medium" panose="020B0604020202020204" charset="0"/>
+      <p:regular r:id="rId13"/>
     </p:embeddedFont>
     <p:embeddedFont>
-      <p:font typeface="Poppins Bold" charset="1" panose="00000800000000000000"/>
-      <p:regular r:id="rId18"/>
+      <p:font typeface="Poppins" panose="020B0604020202020204" charset="0"/>
+      <p:regular r:id="rId14"/>
+      <p:bold r:id="rId15"/>
+      <p:italic r:id="rId16"/>
+      <p:boldItalic r:id="rId17"/>
     </p:embeddedFont>
     <p:embeddedFont>
-      <p:font typeface="HK Grotesk Medium" charset="1" panose="00000600000000000000"/>
-      <p:regular r:id="rId19"/>
+      <p:font typeface="Poppins Bold" panose="020B0604020202020204" charset="0"/>
+      <p:regular r:id="rId18"/>
+      <p:bold r:id="rId19"/>
     </p:embeddedFont>
   </p:embeddedFontLst>
   <p:defaultTextStyle>
@@ -128,7 +132,101 @@
       </a:defRPr>
     </a:lvl9pPr>
   </p:defaultTextStyle>
+  <p:extLst>
+    <p:ext uri="{EFAFB233-063F-42B5-8137-9DF3F51BA10A}">
+      <p15:sldGuideLst xmlns:p15="http://schemas.microsoft.com/office/powerpoint/2012/main">
+        <p15:guide id="1" orient="horz" pos="2160">
+          <p15:clr>
+            <a:srgbClr val="A4A3A4"/>
+          </p15:clr>
+        </p15:guide>
+        <p15:guide id="2" pos="2880">
+          <p15:clr>
+            <a:srgbClr val="A4A3A4"/>
+          </p15:clr>
+        </p15:guide>
+      </p15:sldGuideLst>
+    </p:ext>
+  </p:extLst>
 </p:presentation>
+</file>
+
+<file path=ppt/revisionInfo.xml><?xml version="1.0" encoding="utf-8"?>
+<p1510:revInfo xmlns:a="http://schemas.openxmlformats.org/drawingml/2006/main" xmlns:r="http://schemas.openxmlformats.org/officeDocument/2006/relationships" xmlns:p1510="http://schemas.microsoft.com/office/powerpoint/2015/10/main">
+  <p1510:revLst>
+    <p1510:client id="{7E1CBA62-E206-E0F9-1E2D-A4EEF0BEB569}" v="21" dt="2025-11-21T23:01:00.414"/>
+    <p1510:client id="{BD4EE91C-300A-E456-17DD-30662B15F0CF}" v="30" dt="2025-11-21T23:01:33.031"/>
+  </p1510:revLst>
+</p1510:revInfo>
+</file>
+
+<file path=ppt/changesInfos/changesInfo1.xml><?xml version="1.0" encoding="utf-8"?>
+<pc:chgInfo xmlns:a="http://schemas.openxmlformats.org/drawingml/2006/main" xmlns:r="http://schemas.openxmlformats.org/officeDocument/2006/relationships" xmlns:ac="http://schemas.microsoft.com/office/drawing/2013/main/command" xmlns:pc="http://schemas.microsoft.com/office/powerpoint/2013/main/command">
+  <pc:docChgLst>
+    <pc:chgData name="AXEL DIEGO CARDENAS CRUZ" userId="S::ax.cardenas@duocuc.cl::0ec9aa3f-eb7b-444f-9b47-99cbb4596f83" providerId="AD" clId="Web-{7E1CBA62-E206-E0F9-1E2D-A4EEF0BEB569}"/>
+    <pc:docChg chg="modSld">
+      <pc:chgData name="AXEL DIEGO CARDENAS CRUZ" userId="S::ax.cardenas@duocuc.cl::0ec9aa3f-eb7b-444f-9b47-99cbb4596f83" providerId="AD" clId="Web-{7E1CBA62-E206-E0F9-1E2D-A4EEF0BEB569}" dt="2025-11-21T23:01:00.414" v="16" actId="1076"/>
+      <pc:docMkLst>
+        <pc:docMk/>
+      </pc:docMkLst>
+      <pc:sldChg chg="addSp delSp modSp">
+        <pc:chgData name="AXEL DIEGO CARDENAS CRUZ" userId="S::ax.cardenas@duocuc.cl::0ec9aa3f-eb7b-444f-9b47-99cbb4596f83" providerId="AD" clId="Web-{7E1CBA62-E206-E0F9-1E2D-A4EEF0BEB569}" dt="2025-11-21T23:01:00.414" v="16" actId="1076"/>
+        <pc:sldMkLst>
+          <pc:docMk/>
+          <pc:sldMk cId="0" sldId="261"/>
+        </pc:sldMkLst>
+        <pc:spChg chg="del">
+          <ac:chgData name="AXEL DIEGO CARDENAS CRUZ" userId="S::ax.cardenas@duocuc.cl::0ec9aa3f-eb7b-444f-9b47-99cbb4596f83" providerId="AD" clId="Web-{7E1CBA62-E206-E0F9-1E2D-A4EEF0BEB569}" dt="2025-11-21T23:00:27.286" v="5"/>
+          <ac:spMkLst>
+            <pc:docMk/>
+            <pc:sldMk cId="0" sldId="261"/>
+            <ac:spMk id="9" creationId="{00000000-0000-0000-0000-000000000000}"/>
+          </ac:spMkLst>
+        </pc:spChg>
+        <pc:spChg chg="mod">
+          <ac:chgData name="AXEL DIEGO CARDENAS CRUZ" userId="S::ax.cardenas@duocuc.cl::0ec9aa3f-eb7b-444f-9b47-99cbb4596f83" providerId="AD" clId="Web-{7E1CBA62-E206-E0F9-1E2D-A4EEF0BEB569}" dt="2025-11-21T23:01:00.414" v="16" actId="1076"/>
+          <ac:spMkLst>
+            <pc:docMk/>
+            <pc:sldMk cId="0" sldId="261"/>
+            <ac:spMk id="12" creationId="{00000000-0000-0000-0000-000000000000}"/>
+          </ac:spMkLst>
+        </pc:spChg>
+        <pc:picChg chg="add mod">
+          <ac:chgData name="AXEL DIEGO CARDENAS CRUZ" userId="S::ax.cardenas@duocuc.cl::0ec9aa3f-eb7b-444f-9b47-99cbb4596f83" providerId="AD" clId="Web-{7E1CBA62-E206-E0F9-1E2D-A4EEF0BEB569}" dt="2025-11-21T23:00:36.678" v="7" actId="14100"/>
+          <ac:picMkLst>
+            <pc:docMk/>
+            <pc:sldMk cId="0" sldId="261"/>
+            <ac:picMk id="13" creationId="{8AAB6E5B-72F6-00DB-E25A-9AA48FDD8EB9}"/>
+          </ac:picMkLst>
+        </pc:picChg>
+      </pc:sldChg>
+    </pc:docChg>
+  </pc:docChgLst>
+  <pc:docChgLst>
+    <pc:chgData name="AXEL DIEGO CARDENAS CRUZ" userId="S::ax.cardenas@duocuc.cl::0ec9aa3f-eb7b-444f-9b47-99cbb4596f83" providerId="AD" clId="Web-{BD4EE91C-300A-E456-17DD-30662B15F0CF}"/>
+    <pc:docChg chg="modSld">
+      <pc:chgData name="AXEL DIEGO CARDENAS CRUZ" userId="S::ax.cardenas@duocuc.cl::0ec9aa3f-eb7b-444f-9b47-99cbb4596f83" providerId="AD" clId="Web-{BD4EE91C-300A-E456-17DD-30662B15F0CF}" dt="2025-11-21T23:01:33.031" v="14" actId="20577"/>
+      <pc:docMkLst>
+        <pc:docMk/>
+      </pc:docMkLst>
+      <pc:sldChg chg="modSp">
+        <pc:chgData name="AXEL DIEGO CARDENAS CRUZ" userId="S::ax.cardenas@duocuc.cl::0ec9aa3f-eb7b-444f-9b47-99cbb4596f83" providerId="AD" clId="Web-{BD4EE91C-300A-E456-17DD-30662B15F0CF}" dt="2025-11-21T23:01:33.031" v="14" actId="20577"/>
+        <pc:sldMkLst>
+          <pc:docMk/>
+          <pc:sldMk cId="0" sldId="256"/>
+        </pc:sldMkLst>
+        <pc:spChg chg="mod">
+          <ac:chgData name="AXEL DIEGO CARDENAS CRUZ" userId="S::ax.cardenas@duocuc.cl::0ec9aa3f-eb7b-444f-9b47-99cbb4596f83" providerId="AD" clId="Web-{BD4EE91C-300A-E456-17DD-30662B15F0CF}" dt="2025-11-21T23:01:33.031" v="14" actId="20577"/>
+          <ac:spMkLst>
+            <pc:docMk/>
+            <pc:sldMk cId="0" sldId="256"/>
+            <ac:spMk id="20" creationId="{00000000-0000-0000-0000-000000000000}"/>
+          </ac:spMkLst>
+        </pc:spChg>
+      </pc:sldChg>
+    </pc:docChg>
+  </pc:docChgLst>
+</pc:chgInfo>
 </file>
 
 <file path=ppt/slideLayouts/slideLayout1.xml><?xml version="1.0" encoding="utf-8"?>
@@ -169,10 +267,9 @@
           <a:lstStyle/>
           <a:p>
             <a:r>
-              <a:rPr lang="en-US" smtClean="0"/>
+              <a:rPr lang="en-US"/>
               <a:t>Click to edit Master title style</a:t>
             </a:r>
-            <a:endParaRPr lang="en-US"/>
           </a:p>
         </p:txBody>
       </p:sp>
@@ -288,10 +385,9 @@
           </a:lstStyle>
           <a:p>
             <a:r>
-              <a:rPr lang="en-US" smtClean="0"/>
+              <a:rPr lang="en-US"/>
               <a:t>Click to edit Master subtitle style</a:t>
             </a:r>
-            <a:endParaRPr lang="en-US"/>
           </a:p>
         </p:txBody>
       </p:sp>
@@ -313,7 +409,7 @@
             <a:fld id="{1D8BD707-D9CF-40AE-B4C6-C98DA3205C09}" type="datetimeFigureOut">
               <a:rPr lang="en-US" smtClean="0"/>
               <a:pPr/>
-              <a:t>8/1/2011</a:t>
+              <a:t>11/21/2025</a:t>
             </a:fld>
             <a:endParaRPr lang="en-US"/>
           </a:p>
@@ -403,10 +499,9 @@
           <a:lstStyle/>
           <a:p>
             <a:r>
-              <a:rPr lang="en-US" smtClean="0"/>
+              <a:rPr lang="en-US"/>
               <a:t>Click to edit Master title style</a:t>
             </a:r>
-            <a:endParaRPr lang="en-US"/>
           </a:p>
         </p:txBody>
       </p:sp>
@@ -427,38 +522,37 @@
           <a:p>
             <a:pPr lvl="0"/>
             <a:r>
-              <a:rPr lang="en-US" smtClean="0"/>
+              <a:rPr lang="en-US"/>
               <a:t>Click to edit Master text styles</a:t>
             </a:r>
           </a:p>
           <a:p>
             <a:pPr lvl="1"/>
             <a:r>
-              <a:rPr lang="en-US" smtClean="0"/>
+              <a:rPr lang="en-US"/>
               <a:t>Second level</a:t>
             </a:r>
           </a:p>
           <a:p>
             <a:pPr lvl="2"/>
             <a:r>
-              <a:rPr lang="en-US" smtClean="0"/>
+              <a:rPr lang="en-US"/>
               <a:t>Third level</a:t>
             </a:r>
           </a:p>
           <a:p>
             <a:pPr lvl="3"/>
             <a:r>
-              <a:rPr lang="en-US" smtClean="0"/>
+              <a:rPr lang="en-US"/>
               <a:t>Fourth level</a:t>
             </a:r>
           </a:p>
           <a:p>
             <a:pPr lvl="4"/>
             <a:r>
-              <a:rPr lang="en-US" smtClean="0"/>
+              <a:rPr lang="en-US"/>
               <a:t>Fifth level</a:t>
             </a:r>
-            <a:endParaRPr lang="en-US"/>
           </a:p>
         </p:txBody>
       </p:sp>
@@ -480,7 +574,7 @@
             <a:fld id="{1D8BD707-D9CF-40AE-B4C6-C98DA3205C09}" type="datetimeFigureOut">
               <a:rPr lang="en-US" smtClean="0"/>
               <a:pPr/>
-              <a:t>8/1/2011</a:t>
+              <a:t>11/21/2025</a:t>
             </a:fld>
             <a:endParaRPr lang="en-US"/>
           </a:p>
@@ -575,10 +669,9 @@
           <a:lstStyle/>
           <a:p>
             <a:r>
-              <a:rPr lang="en-US" smtClean="0"/>
+              <a:rPr lang="en-US"/>
               <a:t>Click to edit Master title style</a:t>
             </a:r>
-            <a:endParaRPr lang="en-US"/>
           </a:p>
         </p:txBody>
       </p:sp>
@@ -604,38 +697,37 @@
           <a:p>
             <a:pPr lvl="0"/>
             <a:r>
-              <a:rPr lang="en-US" smtClean="0"/>
+              <a:rPr lang="en-US"/>
               <a:t>Click to edit Master text styles</a:t>
             </a:r>
           </a:p>
           <a:p>
             <a:pPr lvl="1"/>
             <a:r>
-              <a:rPr lang="en-US" smtClean="0"/>
+              <a:rPr lang="en-US"/>
               <a:t>Second level</a:t>
             </a:r>
           </a:p>
           <a:p>
             <a:pPr lvl="2"/>
             <a:r>
-              <a:rPr lang="en-US" smtClean="0"/>
+              <a:rPr lang="en-US"/>
               <a:t>Third level</a:t>
             </a:r>
           </a:p>
           <a:p>
             <a:pPr lvl="3"/>
             <a:r>
-              <a:rPr lang="en-US" smtClean="0"/>
+              <a:rPr lang="en-US"/>
               <a:t>Fourth level</a:t>
             </a:r>
           </a:p>
           <a:p>
             <a:pPr lvl="4"/>
             <a:r>
-              <a:rPr lang="en-US" smtClean="0"/>
+              <a:rPr lang="en-US"/>
               <a:t>Fifth level</a:t>
             </a:r>
-            <a:endParaRPr lang="en-US"/>
           </a:p>
         </p:txBody>
       </p:sp>
@@ -657,7 +749,7 @@
             <a:fld id="{1D8BD707-D9CF-40AE-B4C6-C98DA3205C09}" type="datetimeFigureOut">
               <a:rPr lang="en-US" smtClean="0"/>
               <a:pPr/>
-              <a:t>8/1/2011</a:t>
+              <a:t>11/21/2025</a:t>
             </a:fld>
             <a:endParaRPr lang="en-US"/>
           </a:p>
@@ -747,10 +839,9 @@
           <a:lstStyle/>
           <a:p>
             <a:r>
-              <a:rPr lang="en-US" smtClean="0"/>
+              <a:rPr lang="en-US"/>
               <a:t>Click to edit Master title style</a:t>
             </a:r>
-            <a:endParaRPr lang="en-US"/>
           </a:p>
         </p:txBody>
       </p:sp>
@@ -771,38 +862,37 @@
           <a:p>
             <a:pPr lvl="0"/>
             <a:r>
-              <a:rPr lang="en-US" smtClean="0"/>
+              <a:rPr lang="en-US"/>
               <a:t>Click to edit Master text styles</a:t>
             </a:r>
           </a:p>
           <a:p>
             <a:pPr lvl="1"/>
             <a:r>
-              <a:rPr lang="en-US" smtClean="0"/>
+              <a:rPr lang="en-US"/>
               <a:t>Second level</a:t>
             </a:r>
           </a:p>
           <a:p>
             <a:pPr lvl="2"/>
             <a:r>
-              <a:rPr lang="en-US" smtClean="0"/>
+              <a:rPr lang="en-US"/>
               <a:t>Third level</a:t>
             </a:r>
           </a:p>
           <a:p>
             <a:pPr lvl="3"/>
             <a:r>
-              <a:rPr lang="en-US" smtClean="0"/>
+              <a:rPr lang="en-US"/>
               <a:t>Fourth level</a:t>
             </a:r>
           </a:p>
           <a:p>
             <a:pPr lvl="4"/>
             <a:r>
-              <a:rPr lang="en-US" smtClean="0"/>
+              <a:rPr lang="en-US"/>
               <a:t>Fifth level</a:t>
             </a:r>
-            <a:endParaRPr lang="en-US"/>
           </a:p>
         </p:txBody>
       </p:sp>
@@ -824,7 +914,7 @@
             <a:fld id="{1D8BD707-D9CF-40AE-B4C6-C98DA3205C09}" type="datetimeFigureOut">
               <a:rPr lang="en-US" smtClean="0"/>
               <a:pPr/>
-              <a:t>8/1/2011</a:t>
+              <a:t>11/21/2025</a:t>
             </a:fld>
             <a:endParaRPr lang="en-US"/>
           </a:p>
@@ -923,10 +1013,9 @@
           </a:lstStyle>
           <a:p>
             <a:r>
-              <a:rPr lang="en-US" smtClean="0"/>
+              <a:rPr lang="en-US"/>
               <a:t>Click to edit Master title style</a:t>
             </a:r>
-            <a:endParaRPr lang="en-US"/>
           </a:p>
         </p:txBody>
       </p:sp>
@@ -1043,7 +1132,7 @@
           <a:p>
             <a:pPr lvl="0"/>
             <a:r>
-              <a:rPr lang="en-US" smtClean="0"/>
+              <a:rPr lang="en-US"/>
               <a:t>Click to edit Master text styles</a:t>
             </a:r>
           </a:p>
@@ -1067,7 +1156,7 @@
             <a:fld id="{1D8BD707-D9CF-40AE-B4C6-C98DA3205C09}" type="datetimeFigureOut">
               <a:rPr lang="en-US" smtClean="0"/>
               <a:pPr/>
-              <a:t>8/1/2011</a:t>
+              <a:t>11/21/2025</a:t>
             </a:fld>
             <a:endParaRPr lang="en-US"/>
           </a:p>
@@ -1157,10 +1246,9 @@
           <a:lstStyle/>
           <a:p>
             <a:r>
-              <a:rPr lang="en-US" smtClean="0"/>
+              <a:rPr lang="en-US"/>
               <a:t>Click to edit Master title style</a:t>
             </a:r>
-            <a:endParaRPr lang="en-US"/>
           </a:p>
         </p:txBody>
       </p:sp>
@@ -1214,38 +1302,37 @@
           <a:p>
             <a:pPr lvl="0"/>
             <a:r>
-              <a:rPr lang="en-US" smtClean="0"/>
+              <a:rPr lang="en-US"/>
               <a:t>Click to edit Master text styles</a:t>
             </a:r>
           </a:p>
           <a:p>
             <a:pPr lvl="1"/>
             <a:r>
-              <a:rPr lang="en-US" smtClean="0"/>
+              <a:rPr lang="en-US"/>
               <a:t>Second level</a:t>
             </a:r>
           </a:p>
           <a:p>
             <a:pPr lvl="2"/>
             <a:r>
-              <a:rPr lang="en-US" smtClean="0"/>
+              <a:rPr lang="en-US"/>
               <a:t>Third level</a:t>
             </a:r>
           </a:p>
           <a:p>
             <a:pPr lvl="3"/>
             <a:r>
-              <a:rPr lang="en-US" smtClean="0"/>
+              <a:rPr lang="en-US"/>
               <a:t>Fourth level</a:t>
             </a:r>
           </a:p>
           <a:p>
             <a:pPr lvl="4"/>
             <a:r>
-              <a:rPr lang="en-US" smtClean="0"/>
+              <a:rPr lang="en-US"/>
               <a:t>Fifth level</a:t>
             </a:r>
-            <a:endParaRPr lang="en-US"/>
           </a:p>
         </p:txBody>
       </p:sp>
@@ -1299,38 +1386,37 @@
           <a:p>
             <a:pPr lvl="0"/>
             <a:r>
-              <a:rPr lang="en-US" smtClean="0"/>
+              <a:rPr lang="en-US"/>
               <a:t>Click to edit Master text styles</a:t>
             </a:r>
           </a:p>
           <a:p>
             <a:pPr lvl="1"/>
             <a:r>
-              <a:rPr lang="en-US" smtClean="0"/>
+              <a:rPr lang="en-US"/>
               <a:t>Second level</a:t>
             </a:r>
           </a:p>
           <a:p>
             <a:pPr lvl="2"/>
             <a:r>
-              <a:rPr lang="en-US" smtClean="0"/>
+              <a:rPr lang="en-US"/>
               <a:t>Third level</a:t>
             </a:r>
           </a:p>
           <a:p>
             <a:pPr lvl="3"/>
             <a:r>
-              <a:rPr lang="en-US" smtClean="0"/>
+              <a:rPr lang="en-US"/>
               <a:t>Fourth level</a:t>
             </a:r>
           </a:p>
           <a:p>
             <a:pPr lvl="4"/>
             <a:r>
-              <a:rPr lang="en-US" smtClean="0"/>
+              <a:rPr lang="en-US"/>
               <a:t>Fifth level</a:t>
             </a:r>
-            <a:endParaRPr lang="en-US"/>
           </a:p>
         </p:txBody>
       </p:sp>
@@ -1352,7 +1438,7 @@
             <a:fld id="{1D8BD707-D9CF-40AE-B4C6-C98DA3205C09}" type="datetimeFigureOut">
               <a:rPr lang="en-US" smtClean="0"/>
               <a:pPr/>
-              <a:t>8/1/2011</a:t>
+              <a:t>11/21/2025</a:t>
             </a:fld>
             <a:endParaRPr lang="en-US"/>
           </a:p>
@@ -1446,10 +1532,9 @@
           </a:lstStyle>
           <a:p>
             <a:r>
-              <a:rPr lang="en-US" smtClean="0"/>
+              <a:rPr lang="en-US"/>
               <a:t>Click to edit Master title style</a:t>
             </a:r>
-            <a:endParaRPr lang="en-US"/>
           </a:p>
         </p:txBody>
       </p:sp>
@@ -1512,7 +1597,7 @@
           <a:p>
             <a:pPr lvl="0"/>
             <a:r>
-              <a:rPr lang="en-US" smtClean="0"/>
+              <a:rPr lang="en-US"/>
               <a:t>Click to edit Master text styles</a:t>
             </a:r>
           </a:p>
@@ -1568,38 +1653,37 @@
           <a:p>
             <a:pPr lvl="0"/>
             <a:r>
-              <a:rPr lang="en-US" smtClean="0"/>
+              <a:rPr lang="en-US"/>
               <a:t>Click to edit Master text styles</a:t>
             </a:r>
           </a:p>
           <a:p>
             <a:pPr lvl="1"/>
             <a:r>
-              <a:rPr lang="en-US" smtClean="0"/>
+              <a:rPr lang="en-US"/>
               <a:t>Second level</a:t>
             </a:r>
           </a:p>
           <a:p>
             <a:pPr lvl="2"/>
             <a:r>
-              <a:rPr lang="en-US" smtClean="0"/>
+              <a:rPr lang="en-US"/>
               <a:t>Third level</a:t>
             </a:r>
           </a:p>
           <a:p>
             <a:pPr lvl="3"/>
             <a:r>
-              <a:rPr lang="en-US" smtClean="0"/>
+              <a:rPr lang="en-US"/>
               <a:t>Fourth level</a:t>
             </a:r>
           </a:p>
           <a:p>
             <a:pPr lvl="4"/>
             <a:r>
-              <a:rPr lang="en-US" smtClean="0"/>
+              <a:rPr lang="en-US"/>
               <a:t>Fifth level</a:t>
             </a:r>
-            <a:endParaRPr lang="en-US"/>
           </a:p>
         </p:txBody>
       </p:sp>
@@ -1662,7 +1746,7 @@
           <a:p>
             <a:pPr lvl="0"/>
             <a:r>
-              <a:rPr lang="en-US" smtClean="0"/>
+              <a:rPr lang="en-US"/>
               <a:t>Click to edit Master text styles</a:t>
             </a:r>
           </a:p>
@@ -1718,38 +1802,37 @@
           <a:p>
             <a:pPr lvl="0"/>
             <a:r>
-              <a:rPr lang="en-US" smtClean="0"/>
+              <a:rPr lang="en-US"/>
               <a:t>Click to edit Master text styles</a:t>
             </a:r>
           </a:p>
           <a:p>
             <a:pPr lvl="1"/>
             <a:r>
-              <a:rPr lang="en-US" smtClean="0"/>
+              <a:rPr lang="en-US"/>
               <a:t>Second level</a:t>
             </a:r>
           </a:p>
           <a:p>
             <a:pPr lvl="2"/>
             <a:r>
-              <a:rPr lang="en-US" smtClean="0"/>
+              <a:rPr lang="en-US"/>
               <a:t>Third level</a:t>
             </a:r>
           </a:p>
           <a:p>
             <a:pPr lvl="3"/>
             <a:r>
-              <a:rPr lang="en-US" smtClean="0"/>
+              <a:rPr lang="en-US"/>
               <a:t>Fourth level</a:t>
             </a:r>
           </a:p>
           <a:p>
             <a:pPr lvl="4"/>
             <a:r>
-              <a:rPr lang="en-US" smtClean="0"/>
+              <a:rPr lang="en-US"/>
               <a:t>Fifth level</a:t>
             </a:r>
-            <a:endParaRPr lang="en-US"/>
           </a:p>
         </p:txBody>
       </p:sp>
@@ -1771,7 +1854,7 @@
             <a:fld id="{1D8BD707-D9CF-40AE-B4C6-C98DA3205C09}" type="datetimeFigureOut">
               <a:rPr lang="en-US" smtClean="0"/>
               <a:pPr/>
-              <a:t>8/1/2011</a:t>
+              <a:t>11/21/2025</a:t>
             </a:fld>
             <a:endParaRPr lang="en-US"/>
           </a:p>
@@ -1861,10 +1944,9 @@
           <a:lstStyle/>
           <a:p>
             <a:r>
-              <a:rPr lang="en-US" smtClean="0"/>
+              <a:rPr lang="en-US"/>
               <a:t>Click to edit Master title style</a:t>
             </a:r>
-            <a:endParaRPr lang="en-US"/>
           </a:p>
         </p:txBody>
       </p:sp>
@@ -1886,7 +1968,7 @@
             <a:fld id="{1D8BD707-D9CF-40AE-B4C6-C98DA3205C09}" type="datetimeFigureOut">
               <a:rPr lang="en-US" smtClean="0"/>
               <a:pPr/>
-              <a:t>8/1/2011</a:t>
+              <a:t>11/21/2025</a:t>
             </a:fld>
             <a:endParaRPr lang="en-US"/>
           </a:p>
@@ -1978,7 +2060,7 @@
             <a:fld id="{1D8BD707-D9CF-40AE-B4C6-C98DA3205C09}" type="datetimeFigureOut">
               <a:rPr lang="en-US" smtClean="0"/>
               <a:pPr/>
-              <a:t>8/1/2011</a:t>
+              <a:t>11/21/2025</a:t>
             </a:fld>
             <a:endParaRPr lang="en-US"/>
           </a:p>
@@ -2077,10 +2159,9 @@
           </a:lstStyle>
           <a:p>
             <a:r>
-              <a:rPr lang="en-US" smtClean="0"/>
+              <a:rPr lang="en-US"/>
               <a:t>Click to edit Master title style</a:t>
             </a:r>
-            <a:endParaRPr lang="en-US"/>
           </a:p>
         </p:txBody>
       </p:sp>
@@ -2134,38 +2215,37 @@
           <a:p>
             <a:pPr lvl="0"/>
             <a:r>
-              <a:rPr lang="en-US" smtClean="0"/>
+              <a:rPr lang="en-US"/>
               <a:t>Click to edit Master text styles</a:t>
             </a:r>
           </a:p>
           <a:p>
             <a:pPr lvl="1"/>
             <a:r>
-              <a:rPr lang="en-US" smtClean="0"/>
+              <a:rPr lang="en-US"/>
               <a:t>Second level</a:t>
             </a:r>
           </a:p>
           <a:p>
             <a:pPr lvl="2"/>
             <a:r>
-              <a:rPr lang="en-US" smtClean="0"/>
+              <a:rPr lang="en-US"/>
               <a:t>Third level</a:t>
             </a:r>
           </a:p>
           <a:p>
             <a:pPr lvl="3"/>
             <a:r>
-              <a:rPr lang="en-US" smtClean="0"/>
+              <a:rPr lang="en-US"/>
               <a:t>Fourth level</a:t>
             </a:r>
           </a:p>
           <a:p>
             <a:pPr lvl="4"/>
             <a:r>
-              <a:rPr lang="en-US" smtClean="0"/>
+              <a:rPr lang="en-US"/>
               <a:t>Fifth level</a:t>
             </a:r>
-            <a:endParaRPr lang="en-US"/>
           </a:p>
         </p:txBody>
       </p:sp>
@@ -2228,7 +2308,7 @@
           <a:p>
             <a:pPr lvl="0"/>
             <a:r>
-              <a:rPr lang="en-US" smtClean="0"/>
+              <a:rPr lang="en-US"/>
               <a:t>Click to edit Master text styles</a:t>
             </a:r>
           </a:p>
@@ -2252,7 +2332,7 @@
             <a:fld id="{1D8BD707-D9CF-40AE-B4C6-C98DA3205C09}" type="datetimeFigureOut">
               <a:rPr lang="en-US" smtClean="0"/>
               <a:pPr/>
-              <a:t>8/1/2011</a:t>
+              <a:t>11/21/2025</a:t>
             </a:fld>
             <a:endParaRPr lang="en-US"/>
           </a:p>
@@ -2351,10 +2431,9 @@
           </a:lstStyle>
           <a:p>
             <a:r>
-              <a:rPr lang="en-US" smtClean="0"/>
+              <a:rPr lang="en-US"/>
               <a:t>Click to edit Master title style</a:t>
             </a:r>
-            <a:endParaRPr lang="en-US"/>
           </a:p>
         </p:txBody>
       </p:sp>
@@ -2478,7 +2557,7 @@
           <a:p>
             <a:pPr lvl="0"/>
             <a:r>
-              <a:rPr lang="en-US" smtClean="0"/>
+              <a:rPr lang="en-US"/>
               <a:t>Click to edit Master text styles</a:t>
             </a:r>
           </a:p>
@@ -2502,7 +2581,7 @@
             <a:fld id="{1D8BD707-D9CF-40AE-B4C6-C98DA3205C09}" type="datetimeFigureOut">
               <a:rPr lang="en-US" smtClean="0"/>
               <a:pPr/>
-              <a:t>8/1/2011</a:t>
+              <a:t>11/21/2025</a:t>
             </a:fld>
             <a:endParaRPr lang="en-US"/>
           </a:p>
@@ -2607,10 +2686,9 @@
           <a:lstStyle/>
           <a:p>
             <a:r>
-              <a:rPr lang="en-US" smtClean="0"/>
+              <a:rPr lang="en-US"/>
               <a:t>Click to edit Master title style</a:t>
             </a:r>
-            <a:endParaRPr lang="en-US"/>
           </a:p>
         </p:txBody>
       </p:sp>
@@ -2641,38 +2719,37 @@
           <a:p>
             <a:pPr lvl="0"/>
             <a:r>
-              <a:rPr lang="en-US" smtClean="0"/>
+              <a:rPr lang="en-US"/>
               <a:t>Click to edit Master text styles</a:t>
             </a:r>
           </a:p>
           <a:p>
             <a:pPr lvl="1"/>
             <a:r>
-              <a:rPr lang="en-US" smtClean="0"/>
+              <a:rPr lang="en-US"/>
               <a:t>Second level</a:t>
             </a:r>
           </a:p>
           <a:p>
             <a:pPr lvl="2"/>
             <a:r>
-              <a:rPr lang="en-US" smtClean="0"/>
+              <a:rPr lang="en-US"/>
               <a:t>Third level</a:t>
             </a:r>
           </a:p>
           <a:p>
             <a:pPr lvl="3"/>
             <a:r>
-              <a:rPr lang="en-US" smtClean="0"/>
+              <a:rPr lang="en-US"/>
               <a:t>Fourth level</a:t>
             </a:r>
           </a:p>
           <a:p>
             <a:pPr lvl="4"/>
             <a:r>
-              <a:rPr lang="en-US" smtClean="0"/>
+              <a:rPr lang="en-US"/>
               <a:t>Fifth level</a:t>
             </a:r>
-            <a:endParaRPr lang="en-US"/>
           </a:p>
         </p:txBody>
       </p:sp>
@@ -2712,7 +2789,7 @@
             <a:fld id="{1D8BD707-D9CF-40AE-B4C6-C98DA3205C09}" type="datetimeFigureOut">
               <a:rPr lang="en-US" smtClean="0"/>
               <a:pPr/>
-              <a:t>8/1/2011</a:t>
+              <a:t>11/21/2025</a:t>
             </a:fld>
             <a:endParaRPr lang="en-US"/>
           </a:p>
@@ -3067,7 +3144,7 @@
 </file>
 
 <file path=ppt/slides/slide1.xml><?xml version="1.0" encoding="utf-8"?>
-<p:sld xmlns:p="http://schemas.openxmlformats.org/presentationml/2006/main" xmlns:a="http://schemas.openxmlformats.org/drawingml/2006/main" xmlns:r="http://schemas.openxmlformats.org/officeDocument/2006/relationships">
+<p:sld xmlns:a="http://schemas.openxmlformats.org/drawingml/2006/main" xmlns:r="http://schemas.openxmlformats.org/officeDocument/2006/relationships" xmlns:p="http://schemas.openxmlformats.org/presentationml/2006/main">
   <p:cSld>
     <p:spTree>
       <p:nvGrpSpPr>
@@ -3085,12 +3162,12 @@
       </p:grpSpPr>
       <p:sp>
         <p:nvSpPr>
-          <p:cNvPr name="Freeform 2" id="2"/>
+          <p:cNvPr id="2" name="Freeform 2"/>
           <p:cNvSpPr/>
           <p:nvPr/>
         </p:nvSpPr>
         <p:spPr>
-          <a:xfrm flipH="false" flipV="false" rot="0">
+          <a:xfrm>
             <a:off x="0" y="0"/>
             <a:ext cx="18288000" cy="10287000"/>
           </a:xfrm>
@@ -3099,9 +3176,9 @@
             <a:gdLst/>
             <a:ahLst/>
             <a:cxnLst/>
-            <a:rect r="r" b="b" t="t" l="l"/>
+            <a:rect l="l" t="t" r="r" b="b"/>
             <a:pathLst>
-              <a:path h="10287000" w="18288000">
+              <a:path w="18288000" h="10287000">
                 <a:moveTo>
                   <a:pt x="0" y="0"/>
                 </a:moveTo>
@@ -3124,14 +3201,14 @@
           <a:blipFill>
             <a:blip r:embed="rId2"/>
             <a:stretch>
-              <a:fillRect l="-11643" t="0" r="-11643" b="0"/>
+              <a:fillRect l="-11643" r="-11643"/>
             </a:stretch>
           </a:blipFill>
         </p:spPr>
       </p:sp>
       <p:grpSp>
         <p:nvGrpSpPr>
-          <p:cNvPr name="Group 3" id="3"/>
+          <p:cNvPr id="3" name="Group 3"/>
           <p:cNvGrpSpPr/>
           <p:nvPr/>
         </p:nvGrpSpPr>
@@ -3145,12 +3222,12 @@
         </p:grpSpPr>
         <p:sp>
           <p:nvSpPr>
-            <p:cNvPr name="Freeform 4" id="4"/>
+            <p:cNvPr id="4" name="Freeform 4"/>
             <p:cNvSpPr/>
             <p:nvPr/>
           </p:nvSpPr>
           <p:spPr>
-            <a:xfrm flipH="false" flipV="false" rot="0">
+            <a:xfrm>
               <a:off x="0" y="0"/>
               <a:ext cx="513191" cy="651052"/>
             </a:xfrm>
@@ -3159,9 +3236,9 @@
               <a:gdLst/>
               <a:ahLst/>
               <a:cxnLst/>
-              <a:rect r="r" b="b" t="t" l="l"/>
+              <a:rect l="l" t="t" r="r" b="b"/>
               <a:pathLst>
-                <a:path h="651052" w="513191">
+                <a:path w="513191" h="651052">
                   <a:moveTo>
                     <a:pt x="246340" y="0"/>
                   </a:moveTo>
@@ -3228,8 +3305,8 @@
         </p:sp>
         <p:sp>
           <p:nvSpPr>
-            <p:cNvPr name="TextBox 5" id="5"/>
-            <p:cNvSpPr txBox="true"/>
+            <p:cNvPr id="5" name="TextBox 5"/>
+            <p:cNvSpPr txBox="1"/>
             <p:nvPr/>
           </p:nvSpPr>
           <p:spPr>
@@ -3242,7 +3319,7 @@
             </a:prstGeom>
           </p:spPr>
           <p:txBody>
-            <a:bodyPr anchor="ctr" rtlCol="false" tIns="50800" lIns="50800" bIns="50800" rIns="50800"/>
+            <a:bodyPr lIns="50800" tIns="50800" rIns="50800" bIns="50800" rtlCol="0" anchor="ctr"/>
             <a:lstStyle/>
             <a:p>
               <a:pPr algn="ctr">
@@ -3250,13 +3327,14 @@
                   <a:spcPts val="2520"/>
                 </a:lnSpc>
               </a:pPr>
+              <a:endParaRPr/>
             </a:p>
           </p:txBody>
         </p:sp>
       </p:grpSp>
       <p:grpSp>
         <p:nvGrpSpPr>
-          <p:cNvPr name="Group 6" id="6"/>
+          <p:cNvPr id="6" name="Group 6"/>
           <p:cNvGrpSpPr/>
           <p:nvPr/>
         </p:nvGrpSpPr>
@@ -3270,12 +3348,12 @@
         </p:grpSpPr>
         <p:sp>
           <p:nvSpPr>
-            <p:cNvPr name="Freeform 7" id="7"/>
+            <p:cNvPr id="7" name="Freeform 7"/>
             <p:cNvSpPr/>
             <p:nvPr/>
           </p:nvSpPr>
           <p:spPr>
-            <a:xfrm flipH="false" flipV="false" rot="0">
+            <a:xfrm>
               <a:off x="0" y="0"/>
               <a:ext cx="812800" cy="812800"/>
             </a:xfrm>
@@ -3284,9 +3362,9 @@
               <a:gdLst/>
               <a:ahLst/>
               <a:cxnLst/>
-              <a:rect r="r" b="b" t="t" l="l"/>
+              <a:rect l="l" t="t" r="r" b="b"/>
               <a:pathLst>
-                <a:path h="812800" w="812800">
+                <a:path w="812800" h="812800">
                   <a:moveTo>
                     <a:pt x="406400" y="0"/>
                   </a:moveTo>
@@ -3352,8 +3430,8 @@
         </p:sp>
         <p:sp>
           <p:nvSpPr>
-            <p:cNvPr name="TextBox 8" id="8"/>
-            <p:cNvSpPr txBox="true"/>
+            <p:cNvPr id="8" name="TextBox 8"/>
+            <p:cNvSpPr txBox="1"/>
             <p:nvPr/>
           </p:nvSpPr>
           <p:spPr>
@@ -3366,7 +3444,7 @@
             </a:prstGeom>
           </p:spPr>
           <p:txBody>
-            <a:bodyPr anchor="ctr" rtlCol="false" tIns="50800" lIns="50800" bIns="50800" rIns="50800"/>
+            <a:bodyPr lIns="50800" tIns="50800" rIns="50800" bIns="50800" rtlCol="0" anchor="ctr"/>
             <a:lstStyle/>
             <a:p>
               <a:pPr algn="ctr">
@@ -3374,20 +3452,21 @@
                   <a:spcPts val="2520"/>
                 </a:lnSpc>
               </a:pPr>
+              <a:endParaRPr/>
             </a:p>
           </p:txBody>
         </p:sp>
       </p:grpSp>
       <p:grpSp>
         <p:nvGrpSpPr>
-          <p:cNvPr name="Group 9" id="9"/>
+          <p:cNvPr id="9" name="Group 9"/>
           <p:cNvGrpSpPr>
-            <a:grpSpLocks noChangeAspect="true"/>
+            <a:grpSpLocks noChangeAspect="1"/>
           </p:cNvGrpSpPr>
           <p:nvPr/>
         </p:nvGrpSpPr>
         <p:grpSpPr>
-          <a:xfrm rot="0">
+          <a:xfrm>
             <a:off x="12730370" y="2272825"/>
             <a:ext cx="6411518" cy="12686290"/>
             <a:chOff x="0" y="0"/>
@@ -3396,12 +3475,12 @@
         </p:grpSpPr>
         <p:sp>
           <p:nvSpPr>
-            <p:cNvPr name="Freeform 10" id="10"/>
+            <p:cNvPr id="10" name="Freeform 10"/>
             <p:cNvSpPr/>
             <p:nvPr/>
           </p:nvSpPr>
           <p:spPr>
-            <a:xfrm flipH="false" flipV="false" rot="0">
+            <a:xfrm>
               <a:off x="53340" y="25400"/>
               <a:ext cx="2513330" cy="5132070"/>
             </a:xfrm>
@@ -3410,9 +3489,9 @@
               <a:gdLst/>
               <a:ahLst/>
               <a:cxnLst/>
-              <a:rect r="r" b="b" t="t" l="l"/>
+              <a:rect l="l" t="t" r="r" b="b"/>
               <a:pathLst>
-                <a:path h="5132070" w="2513330">
+                <a:path w="2513330" h="5132070">
                   <a:moveTo>
                     <a:pt x="2159000" y="0"/>
                   </a:moveTo>
@@ -3571,23 +3650,23 @@
         </p:sp>
         <p:sp>
           <p:nvSpPr>
-            <p:cNvPr name="Freeform 11" id="11"/>
+            <p:cNvPr id="11" name="Freeform 11"/>
             <p:cNvSpPr/>
             <p:nvPr/>
           </p:nvSpPr>
           <p:spPr>
-            <a:xfrm flipH="false" flipV="false" rot="0">
+            <a:xfrm>
               <a:off x="185420" y="156210"/>
-              <a:ext cx="2251710" cy="4876800"/>
+              <a:ext cx="2250453" cy="4876800"/>
             </a:xfrm>
             <a:custGeom>
               <a:avLst/>
               <a:gdLst/>
               <a:ahLst/>
               <a:cxnLst/>
-              <a:rect r="r" b="b" t="t" l="l"/>
+              <a:rect l="l" t="t" r="r" b="b"/>
               <a:pathLst>
-                <a:path h="4876800" w="2251710">
+                <a:path w="2250453" h="4876800">
                   <a:moveTo>
                     <a:pt x="2040890" y="0"/>
                   </a:moveTo>
@@ -3652,19 +3731,19 @@
             <a:blipFill>
               <a:blip r:embed="rId3"/>
               <a:stretch>
-                <a:fillRect l="-58351" t="0" r="-58351" b="0"/>
+                <a:fillRect l="-66395" t="-3712" r="-66395" b="-3712"/>
               </a:stretch>
             </a:blipFill>
           </p:spPr>
         </p:sp>
         <p:sp>
           <p:nvSpPr>
-            <p:cNvPr name="Freeform 12" id="12"/>
+            <p:cNvPr id="12" name="Freeform 12"/>
             <p:cNvSpPr/>
             <p:nvPr/>
           </p:nvSpPr>
           <p:spPr>
-            <a:xfrm flipH="false" flipV="false" rot="0">
+            <a:xfrm>
               <a:off x="1121410" y="198120"/>
               <a:ext cx="347980" cy="43180"/>
             </a:xfrm>
@@ -3673,9 +3752,9 @@
               <a:gdLst/>
               <a:ahLst/>
               <a:cxnLst/>
-              <a:rect r="r" b="b" t="t" l="l"/>
+              <a:rect l="l" t="t" r="r" b="b"/>
               <a:pathLst>
-                <a:path h="43180" w="347980">
+                <a:path w="347980" h="43180">
                   <a:moveTo>
                     <a:pt x="326390" y="0"/>
                   </a:moveTo>
@@ -3716,55 +3795,55 @@
         </p:sp>
         <p:sp>
           <p:nvSpPr>
-            <p:cNvPr name="Freeform 13" id="13"/>
+            <p:cNvPr id="13" name="Freeform 13"/>
             <p:cNvSpPr/>
             <p:nvPr/>
           </p:nvSpPr>
           <p:spPr>
-            <a:xfrm flipH="false" flipV="false" rot="0">
-              <a:off x="1578312" y="187909"/>
-              <a:ext cx="66636" cy="63602"/>
+            <a:xfrm>
+              <a:off x="1579738" y="187960"/>
+              <a:ext cx="63785" cy="63501"/>
             </a:xfrm>
             <a:custGeom>
               <a:avLst/>
               <a:gdLst/>
               <a:ahLst/>
               <a:cxnLst/>
-              <a:rect r="r" b="b" t="t" l="l"/>
+              <a:rect l="l" t="t" r="r" b="b"/>
               <a:pathLst>
-                <a:path h="63602" w="66636">
+                <a:path w="63785" h="63501">
                   <a:moveTo>
-                    <a:pt x="33318" y="51"/>
+                    <a:pt x="31892" y="0"/>
                   </a:moveTo>
                   <a:cubicBezTo>
-                    <a:pt x="21941" y="0"/>
-                    <a:pt x="11406" y="6040"/>
-                    <a:pt x="5703" y="15885"/>
-                  </a:cubicBezTo>
-                  <a:cubicBezTo>
-                    <a:pt x="0" y="25729"/>
-                    <a:pt x="0" y="37873"/>
-                    <a:pt x="5703" y="47717"/>
-                  </a:cubicBezTo>
-                  <a:cubicBezTo>
-                    <a:pt x="11406" y="57562"/>
-                    <a:pt x="21941" y="63602"/>
-                    <a:pt x="33318" y="63551"/>
-                  </a:cubicBezTo>
-                  <a:cubicBezTo>
-                    <a:pt x="44695" y="63602"/>
-                    <a:pt x="55230" y="57562"/>
-                    <a:pt x="60933" y="47717"/>
-                  </a:cubicBezTo>
-                  <a:cubicBezTo>
-                    <a:pt x="66636" y="37873"/>
-                    <a:pt x="66636" y="25729"/>
-                    <a:pt x="60933" y="15885"/>
-                  </a:cubicBezTo>
-                  <a:cubicBezTo>
-                    <a:pt x="55230" y="6040"/>
-                    <a:pt x="44695" y="0"/>
-                    <a:pt x="33318" y="51"/>
+                    <a:pt x="20515" y="-51"/>
+                    <a:pt x="9980" y="5989"/>
+                    <a:pt x="4277" y="15834"/>
+                  </a:cubicBezTo>
+                  <a:cubicBezTo>
+                    <a:pt x="-1426" y="25678"/>
+                    <a:pt x="-1426" y="37822"/>
+                    <a:pt x="4277" y="47666"/>
+                  </a:cubicBezTo>
+                  <a:cubicBezTo>
+                    <a:pt x="9980" y="57511"/>
+                    <a:pt x="20515" y="63551"/>
+                    <a:pt x="31892" y="63500"/>
+                  </a:cubicBezTo>
+                  <a:cubicBezTo>
+                    <a:pt x="43269" y="63551"/>
+                    <a:pt x="53804" y="57511"/>
+                    <a:pt x="59507" y="47666"/>
+                  </a:cubicBezTo>
+                  <a:cubicBezTo>
+                    <a:pt x="65210" y="37822"/>
+                    <a:pt x="65210" y="25678"/>
+                    <a:pt x="59507" y="15834"/>
+                  </a:cubicBezTo>
+                  <a:cubicBezTo>
+                    <a:pt x="53804" y="5989"/>
+                    <a:pt x="43269" y="-51"/>
+                    <a:pt x="31892" y="0"/>
                   </a:cubicBezTo>
                   <a:close/>
                 </a:path>
@@ -3777,12 +3856,12 @@
         </p:sp>
         <p:sp>
           <p:nvSpPr>
-            <p:cNvPr name="Freeform 14" id="14"/>
+            <p:cNvPr id="14" name="Freeform 14"/>
             <p:cNvSpPr/>
             <p:nvPr/>
           </p:nvSpPr>
           <p:spPr>
-            <a:xfrm flipH="false" flipV="false" rot="0">
+            <a:xfrm>
               <a:off x="0" y="685800"/>
               <a:ext cx="27940" cy="213360"/>
             </a:xfrm>
@@ -3791,9 +3870,9 @@
               <a:gdLst/>
               <a:ahLst/>
               <a:cxnLst/>
-              <a:rect r="r" b="b" t="t" l="l"/>
+              <a:rect l="l" t="t" r="r" b="b"/>
               <a:pathLst>
-                <a:path h="213360" w="27940">
+                <a:path w="27940" h="213360">
                   <a:moveTo>
                     <a:pt x="0" y="26670"/>
                   </a:moveTo>
@@ -3824,12 +3903,12 @@
         </p:sp>
         <p:sp>
           <p:nvSpPr>
-            <p:cNvPr name="Freeform 15" id="15"/>
+            <p:cNvPr id="15" name="Freeform 15"/>
             <p:cNvSpPr/>
             <p:nvPr/>
           </p:nvSpPr>
           <p:spPr>
-            <a:xfrm flipH="false" flipV="false" rot="0">
+            <a:xfrm>
               <a:off x="0" y="1057910"/>
               <a:ext cx="27940" cy="384810"/>
             </a:xfrm>
@@ -3838,9 +3917,9 @@
               <a:gdLst/>
               <a:ahLst/>
               <a:cxnLst/>
-              <a:rect r="r" b="b" t="t" l="l"/>
+              <a:rect l="l" t="t" r="r" b="b"/>
               <a:pathLst>
-                <a:path h="384810" w="27940">
+                <a:path w="27940" h="384810">
                   <a:moveTo>
                     <a:pt x="0" y="26670"/>
                   </a:moveTo>
@@ -3871,12 +3950,12 @@
         </p:sp>
         <p:sp>
           <p:nvSpPr>
-            <p:cNvPr name="Freeform 16" id="16"/>
+            <p:cNvPr id="16" name="Freeform 16"/>
             <p:cNvSpPr/>
             <p:nvPr/>
           </p:nvSpPr>
           <p:spPr>
-            <a:xfrm flipH="false" flipV="false" rot="0">
+            <a:xfrm>
               <a:off x="0" y="1526540"/>
               <a:ext cx="27940" cy="386080"/>
             </a:xfrm>
@@ -3885,9 +3964,9 @@
               <a:gdLst/>
               <a:ahLst/>
               <a:cxnLst/>
-              <a:rect r="r" b="b" t="t" l="l"/>
+              <a:rect l="l" t="t" r="r" b="b"/>
               <a:pathLst>
-                <a:path h="386080" w="27940">
+                <a:path w="27940" h="386080">
                   <a:moveTo>
                     <a:pt x="0" y="27940"/>
                   </a:moveTo>
@@ -3918,12 +3997,12 @@
         </p:sp>
         <p:sp>
           <p:nvSpPr>
-            <p:cNvPr name="Freeform 17" id="17"/>
+            <p:cNvPr id="17" name="Freeform 17"/>
             <p:cNvSpPr/>
             <p:nvPr/>
           </p:nvSpPr>
           <p:spPr>
-            <a:xfrm flipH="false" flipV="false" rot="0">
+            <a:xfrm>
               <a:off x="2592070" y="1184910"/>
               <a:ext cx="27940" cy="618490"/>
             </a:xfrm>
@@ -3932,9 +4011,9 @@
               <a:gdLst/>
               <a:ahLst/>
               <a:cxnLst/>
-              <a:rect r="r" b="b" t="t" l="l"/>
+              <a:rect l="l" t="t" r="r" b="b"/>
               <a:pathLst>
-                <a:path h="618490" w="27940">
+                <a:path w="27940" h="618490">
                   <a:moveTo>
                     <a:pt x="0" y="0"/>
                   </a:moveTo>
@@ -3965,12 +4044,12 @@
         </p:sp>
         <p:sp>
           <p:nvSpPr>
-            <p:cNvPr name="Freeform 18" id="18"/>
+            <p:cNvPr id="18" name="Freeform 18"/>
             <p:cNvSpPr/>
             <p:nvPr/>
           </p:nvSpPr>
           <p:spPr>
-            <a:xfrm flipH="false" flipV="false" rot="0">
+            <a:xfrm>
               <a:off x="27940" y="0"/>
               <a:ext cx="2564130" cy="5182870"/>
             </a:xfrm>
@@ -3979,9 +4058,9 @@
               <a:gdLst/>
               <a:ahLst/>
               <a:cxnLst/>
-              <a:rect r="r" b="b" t="t" l="l"/>
+              <a:rect l="l" t="t" r="r" b="b"/>
               <a:pathLst>
-                <a:path h="5182870" w="2564130">
+                <a:path w="2564130" h="5182870">
                   <a:moveTo>
                     <a:pt x="2564130" y="1184910"/>
                   </a:moveTo>
@@ -4141,12 +4220,12 @@
       </p:grpSp>
       <p:sp>
         <p:nvSpPr>
-          <p:cNvPr name="TextBox 19" id="19"/>
-          <p:cNvSpPr txBox="true"/>
+          <p:cNvPr id="19" name="TextBox 19"/>
+          <p:cNvSpPr txBox="1"/>
           <p:nvPr/>
         </p:nvSpPr>
         <p:spPr>
-          <a:xfrm rot="0">
+          <a:xfrm>
             <a:off x="1558540" y="3009068"/>
             <a:ext cx="7276292" cy="375147"/>
           </a:xfrm>
@@ -4155,7 +4234,7 @@
           </a:prstGeom>
         </p:spPr>
         <p:txBody>
-          <a:bodyPr anchor="t" rtlCol="false" tIns="0" lIns="0" bIns="0" rIns="0">
+          <a:bodyPr lIns="0" tIns="0" rIns="0" bIns="0" rtlCol="0" anchor="t">
             <a:spAutoFit/>
           </a:bodyPr>
           <a:lstStyle/>
@@ -4182,12 +4261,12 @@
       </p:sp>
       <p:sp>
         <p:nvSpPr>
-          <p:cNvPr name="TextBox 20" id="20"/>
-          <p:cNvSpPr txBox="true"/>
+          <p:cNvPr id="20" name="TextBox 20"/>
+          <p:cNvSpPr txBox="1"/>
           <p:nvPr/>
         </p:nvSpPr>
         <p:spPr>
-          <a:xfrm rot="0">
+          <a:xfrm>
             <a:off x="1558540" y="4290014"/>
             <a:ext cx="6811366" cy="1778000"/>
           </a:xfrm>
@@ -4196,7 +4275,7 @@
           </a:prstGeom>
         </p:spPr>
         <p:txBody>
-          <a:bodyPr anchor="t" rtlCol="false" tIns="0" lIns="0" bIns="0" rIns="0">
+          <a:bodyPr lIns="0" tIns="0" rIns="0" bIns="0" rtlCol="0" anchor="t">
             <a:spAutoFit/>
           </a:bodyPr>
           <a:lstStyle/>
@@ -4216,7 +4295,7 @@
                 <a:cs typeface="Poppins"/>
                 <a:sym typeface="Poppins"/>
               </a:rPr>
-              <a:t>Equipo Axel, Diego 1, Diego 2</a:t>
+              <a:t>Equipo Axel, Diego Castillo, Diego Vargas</a:t>
             </a:r>
           </a:p>
           <a:p>
@@ -4235,8 +4314,28 @@
                 <a:cs typeface="Poppins"/>
                 <a:sym typeface="Poppins"/>
               </a:rPr>
-              <a:t>Carrera Ingeniería Informática</a:t>
+              <a:t>Carrera Ingeniería </a:t>
             </a:r>
+            <a:r>
+              <a:rPr lang="en-US" sz="2000" err="1">
+                <a:solidFill>
+                  <a:srgbClr val="373737"/>
+                </a:solidFill>
+                <a:latin typeface="Poppins"/>
+                <a:ea typeface="Poppins"/>
+                <a:cs typeface="Poppins"/>
+                <a:sym typeface="Poppins"/>
+              </a:rPr>
+              <a:t>Informática</a:t>
+            </a:r>
+            <a:endParaRPr lang="en-US" sz="2000" err="1">
+              <a:solidFill>
+                <a:srgbClr val="373737"/>
+              </a:solidFill>
+              <a:latin typeface="Poppins"/>
+              <a:ea typeface="Poppins"/>
+              <a:cs typeface="Poppins"/>
+            </a:endParaRPr>
           </a:p>
           <a:p>
             <a:pPr algn="l">
@@ -4244,6 +4343,18 @@
                 <a:spcPts val="2800"/>
               </a:lnSpc>
             </a:pPr>
+            <a:r>
+              <a:rPr lang="en-US" sz="2000" err="1">
+                <a:solidFill>
+                  <a:srgbClr val="373737"/>
+                </a:solidFill>
+                <a:latin typeface="Poppins"/>
+                <a:ea typeface="Poppins"/>
+                <a:cs typeface="Poppins"/>
+                <a:sym typeface="Poppins"/>
+              </a:rPr>
+              <a:t>Asignatura</a:t>
+            </a:r>
             <a:r>
               <a:rPr lang="en-US" sz="2000">
                 <a:solidFill>
@@ -4254,8 +4365,16 @@
                 <a:cs typeface="Poppins"/>
                 <a:sym typeface="Poppins"/>
               </a:rPr>
-              <a:t>Asignatura Capstone</a:t>
+              <a:t> Capstone</a:t>
             </a:r>
+            <a:endParaRPr lang="en-US" sz="2000">
+              <a:solidFill>
+                <a:srgbClr val="373737"/>
+              </a:solidFill>
+              <a:latin typeface="Poppins"/>
+              <a:ea typeface="Poppins"/>
+              <a:cs typeface="Poppins"/>
+            </a:endParaRPr>
           </a:p>
           <a:p>
             <a:pPr algn="l">
@@ -4263,6 +4382,18 @@
                 <a:spcPts val="2800"/>
               </a:lnSpc>
             </a:pPr>
+            <a:r>
+              <a:rPr lang="en-US" sz="2000" err="1">
+                <a:solidFill>
+                  <a:srgbClr val="373737"/>
+                </a:solidFill>
+                <a:latin typeface="Poppins"/>
+                <a:ea typeface="Poppins"/>
+                <a:cs typeface="Poppins"/>
+                <a:sym typeface="Poppins"/>
+              </a:rPr>
+              <a:t>Sede</a:t>
+            </a:r>
             <a:r>
               <a:rPr lang="en-US" sz="2000">
                 <a:solidFill>
@@ -4273,8 +4404,16 @@
                 <a:cs typeface="Poppins"/>
                 <a:sym typeface="Poppins"/>
               </a:rPr>
-              <a:t>Sede PAO</a:t>
+              <a:t> PAO</a:t>
             </a:r>
+            <a:endParaRPr lang="en-US" sz="2000">
+              <a:solidFill>
+                <a:srgbClr val="373737"/>
+              </a:solidFill>
+              <a:latin typeface="Poppins"/>
+              <a:ea typeface="Poppins"/>
+              <a:cs typeface="Poppins"/>
+            </a:endParaRPr>
           </a:p>
           <a:p>
             <a:pPr algn="l">
@@ -4282,6 +4421,18 @@
                 <a:spcPts val="2800"/>
               </a:lnSpc>
             </a:pPr>
+            <a:r>
+              <a:rPr lang="en-US" sz="2000" err="1">
+                <a:solidFill>
+                  <a:srgbClr val="373737"/>
+                </a:solidFill>
+                <a:latin typeface="Poppins"/>
+                <a:ea typeface="Poppins"/>
+                <a:cs typeface="Poppins"/>
+                <a:sym typeface="Poppins"/>
+              </a:rPr>
+              <a:t>Profesor</a:t>
+            </a:r>
             <a:r>
               <a:rPr lang="en-US" sz="2000">
                 <a:solidFill>
@@ -4292,19 +4443,27 @@
                 <a:cs typeface="Poppins"/>
                 <a:sym typeface="Poppins"/>
               </a:rPr>
-              <a:t>Profesor Arturo Vargas</a:t>
+              <a:t> Arturo Vargas</a:t>
             </a:r>
+            <a:endParaRPr lang="en-US" sz="2000">
+              <a:solidFill>
+                <a:srgbClr val="373737"/>
+              </a:solidFill>
+              <a:latin typeface="Poppins"/>
+              <a:ea typeface="Poppins"/>
+              <a:cs typeface="Poppins"/>
+            </a:endParaRPr>
           </a:p>
         </p:txBody>
       </p:sp>
       <p:sp>
         <p:nvSpPr>
-          <p:cNvPr name="TextBox 21" id="21"/>
-          <p:cNvSpPr txBox="true"/>
+          <p:cNvPr id="21" name="TextBox 21"/>
+          <p:cNvSpPr txBox="1"/>
           <p:nvPr/>
         </p:nvSpPr>
         <p:spPr>
-          <a:xfrm rot="0">
+          <a:xfrm>
             <a:off x="1558540" y="1838489"/>
             <a:ext cx="5969238" cy="1227729"/>
           </a:xfrm>
@@ -4313,7 +4472,7 @@
           </a:prstGeom>
         </p:spPr>
         <p:txBody>
-          <a:bodyPr anchor="t" rtlCol="false" tIns="0" lIns="0" bIns="0" rIns="0">
+          <a:bodyPr lIns="0" tIns="0" rIns="0" bIns="0" rtlCol="0" anchor="t">
             <a:spAutoFit/>
           </a:bodyPr>
           <a:lstStyle/>
@@ -4324,7 +4483,7 @@
               </a:lnSpc>
             </a:pPr>
             <a:r>
-              <a:rPr lang="en-US" sz="9079" b="true">
+              <a:rPr lang="en-US" sz="9079" b="1">
                 <a:solidFill>
                   <a:srgbClr val="373737"/>
                 </a:solidFill>
@@ -4340,12 +4499,12 @@
       </p:sp>
       <p:sp>
         <p:nvSpPr>
-          <p:cNvPr name="TextBox 22" id="22"/>
-          <p:cNvSpPr txBox="true"/>
+          <p:cNvPr id="22" name="TextBox 22"/>
+          <p:cNvSpPr txBox="1"/>
           <p:nvPr/>
         </p:nvSpPr>
         <p:spPr>
-          <a:xfrm rot="0">
+          <a:xfrm>
             <a:off x="6671246" y="1838489"/>
             <a:ext cx="3397318" cy="1227729"/>
           </a:xfrm>
@@ -4354,7 +4513,7 @@
           </a:prstGeom>
         </p:spPr>
         <p:txBody>
-          <a:bodyPr anchor="t" rtlCol="false" tIns="0" lIns="0" bIns="0" rIns="0">
+          <a:bodyPr lIns="0" tIns="0" rIns="0" bIns="0" rtlCol="0" anchor="t">
             <a:spAutoFit/>
           </a:bodyPr>
           <a:lstStyle/>
@@ -4365,7 +4524,7 @@
               </a:lnSpc>
             </a:pPr>
             <a:r>
-              <a:rPr lang="en-US" b="true" sz="9079">
+              <a:rPr lang="en-US" sz="9079" b="1">
                 <a:solidFill>
                   <a:srgbClr val="373737"/>
                 </a:solidFill>
@@ -4388,7 +4547,7 @@
 </file>
 
 <file path=ppt/slides/slide10.xml><?xml version="1.0" encoding="utf-8"?>
-<p:sld xmlns:p="http://schemas.openxmlformats.org/presentationml/2006/main" xmlns:a="http://schemas.openxmlformats.org/drawingml/2006/main" xmlns:r="http://schemas.openxmlformats.org/officeDocument/2006/relationships">
+<p:sld xmlns:a="http://schemas.openxmlformats.org/drawingml/2006/main" xmlns:r="http://schemas.openxmlformats.org/officeDocument/2006/relationships" xmlns:p="http://schemas.openxmlformats.org/presentationml/2006/main">
   <p:cSld>
     <p:spTree>
       <p:nvGrpSpPr>
@@ -4406,12 +4565,12 @@
       </p:grpSpPr>
       <p:sp>
         <p:nvSpPr>
-          <p:cNvPr name="Freeform 2" id="2"/>
+          <p:cNvPr id="2" name="Freeform 2"/>
           <p:cNvSpPr/>
           <p:nvPr/>
         </p:nvSpPr>
         <p:spPr>
-          <a:xfrm flipH="false" flipV="false" rot="0">
+          <a:xfrm>
             <a:off x="0" y="0"/>
             <a:ext cx="18288000" cy="10287000"/>
           </a:xfrm>
@@ -4420,9 +4579,9 @@
             <a:gdLst/>
             <a:ahLst/>
             <a:cxnLst/>
-            <a:rect r="r" b="b" t="t" l="l"/>
+            <a:rect l="l" t="t" r="r" b="b"/>
             <a:pathLst>
-              <a:path h="10287000" w="18288000">
+              <a:path w="18288000" h="10287000">
                 <a:moveTo>
                   <a:pt x="0" y="0"/>
                 </a:moveTo>
@@ -4445,19 +4604,19 @@
           <a:blipFill>
             <a:blip r:embed="rId2"/>
             <a:stretch>
-              <a:fillRect l="-11643" t="0" r="-11643" b="0"/>
+              <a:fillRect l="-11643" r="-11643"/>
             </a:stretch>
           </a:blipFill>
         </p:spPr>
       </p:sp>
       <p:sp>
         <p:nvSpPr>
-          <p:cNvPr name="TextBox 3" id="3"/>
-          <p:cNvSpPr txBox="true"/>
+          <p:cNvPr id="3" name="TextBox 3"/>
+          <p:cNvSpPr txBox="1"/>
           <p:nvPr/>
         </p:nvSpPr>
         <p:spPr>
-          <a:xfrm rot="0">
+          <a:xfrm>
             <a:off x="5803734" y="2035603"/>
             <a:ext cx="6680533" cy="1216113"/>
           </a:xfrm>
@@ -4466,7 +4625,7 @@
           </a:prstGeom>
         </p:spPr>
         <p:txBody>
-          <a:bodyPr anchor="t" rtlCol="false" tIns="0" lIns="0" bIns="0" rIns="0">
+          <a:bodyPr lIns="0" tIns="0" rIns="0" bIns="0" rtlCol="0" anchor="t">
             <a:spAutoFit/>
           </a:bodyPr>
           <a:lstStyle/>
@@ -4477,7 +4636,7 @@
               </a:lnSpc>
             </a:pPr>
             <a:r>
-              <a:rPr lang="en-US" sz="9020" b="true">
+              <a:rPr lang="en-US" sz="9020" b="1">
                 <a:solidFill>
                   <a:srgbClr val="707070"/>
                 </a:solidFill>
@@ -4493,7 +4652,7 @@
       </p:sp>
       <p:grpSp>
         <p:nvGrpSpPr>
-          <p:cNvPr name="Group 4" id="4"/>
+          <p:cNvPr id="4" name="Group 4"/>
           <p:cNvGrpSpPr/>
           <p:nvPr/>
         </p:nvGrpSpPr>
@@ -4507,12 +4666,12 @@
         </p:grpSpPr>
         <p:sp>
           <p:nvSpPr>
-            <p:cNvPr name="Freeform 5" id="5"/>
+            <p:cNvPr id="5" name="Freeform 5"/>
             <p:cNvSpPr/>
             <p:nvPr/>
           </p:nvSpPr>
           <p:spPr>
-            <a:xfrm flipH="false" flipV="false" rot="0">
+            <a:xfrm>
               <a:off x="0" y="0"/>
               <a:ext cx="513191" cy="651052"/>
             </a:xfrm>
@@ -4521,9 +4680,9 @@
               <a:gdLst/>
               <a:ahLst/>
               <a:cxnLst/>
-              <a:rect r="r" b="b" t="t" l="l"/>
+              <a:rect l="l" t="t" r="r" b="b"/>
               <a:pathLst>
-                <a:path h="651052" w="513191">
+                <a:path w="513191" h="651052">
                   <a:moveTo>
                     <a:pt x="246340" y="0"/>
                   </a:moveTo>
@@ -4583,7 +4742,7 @@
                 </a:path>
               </a:pathLst>
             </a:custGeom>
-            <a:gradFill rotWithShape="true">
+            <a:gradFill rotWithShape="1">
               <a:gsLst>
                 <a:gs pos="0">
                   <a:srgbClr val="30C2B7">
@@ -4612,8 +4771,8 @@
         </p:sp>
         <p:sp>
           <p:nvSpPr>
-            <p:cNvPr name="TextBox 6" id="6"/>
-            <p:cNvSpPr txBox="true"/>
+            <p:cNvPr id="6" name="TextBox 6"/>
+            <p:cNvSpPr txBox="1"/>
             <p:nvPr/>
           </p:nvSpPr>
           <p:spPr>
@@ -4626,7 +4785,7 @@
             </a:prstGeom>
           </p:spPr>
           <p:txBody>
-            <a:bodyPr anchor="ctr" rtlCol="false" tIns="50800" lIns="50800" bIns="50800" rIns="50800"/>
+            <a:bodyPr lIns="50800" tIns="50800" rIns="50800" bIns="50800" rtlCol="0" anchor="ctr"/>
             <a:lstStyle/>
             <a:p>
               <a:pPr algn="ctr">
@@ -4634,18 +4793,19 @@
                   <a:spcPts val="2520"/>
                 </a:lnSpc>
               </a:pPr>
+              <a:endParaRPr/>
             </a:p>
           </p:txBody>
         </p:sp>
       </p:grpSp>
       <p:sp>
         <p:nvSpPr>
-          <p:cNvPr name="TextBox 7" id="7"/>
-          <p:cNvSpPr txBox="true"/>
+          <p:cNvPr id="7" name="TextBox 7"/>
+          <p:cNvSpPr txBox="1"/>
           <p:nvPr/>
         </p:nvSpPr>
         <p:spPr>
-          <a:xfrm rot="0">
+          <a:xfrm>
             <a:off x="3424504" y="4175697"/>
             <a:ext cx="11438992" cy="1897507"/>
           </a:xfrm>
@@ -4654,12 +4814,12 @@
           </a:prstGeom>
         </p:spPr>
         <p:txBody>
-          <a:bodyPr anchor="t" rtlCol="false" tIns="0" lIns="0" bIns="0" rIns="0">
+          <a:bodyPr lIns="0" tIns="0" rIns="0" bIns="0" rtlCol="0" anchor="t">
             <a:spAutoFit/>
           </a:bodyPr>
           <a:lstStyle/>
           <a:p>
-            <a:pPr algn="just" marL="0" indent="0" lvl="0">
+            <a:pPr marL="0" lvl="0" indent="0" algn="just">
               <a:lnSpc>
                 <a:spcPts val="2489"/>
               </a:lnSpc>
@@ -4688,7 +4848,7 @@
 </file>
 
 <file path=ppt/slides/slide11.xml><?xml version="1.0" encoding="utf-8"?>
-<p:sld xmlns:p="http://schemas.openxmlformats.org/presentationml/2006/main" xmlns:a="http://schemas.openxmlformats.org/drawingml/2006/main" xmlns:r="http://schemas.openxmlformats.org/officeDocument/2006/relationships">
+<p:sld xmlns:a="http://schemas.openxmlformats.org/drawingml/2006/main" xmlns:r="http://schemas.openxmlformats.org/officeDocument/2006/relationships" xmlns:p="http://schemas.openxmlformats.org/presentationml/2006/main">
   <p:cSld>
     <p:spTree>
       <p:nvGrpSpPr>
@@ -4706,12 +4866,12 @@
       </p:grpSpPr>
       <p:sp>
         <p:nvSpPr>
-          <p:cNvPr name="Freeform 2" id="2"/>
+          <p:cNvPr id="2" name="Freeform 2"/>
           <p:cNvSpPr/>
           <p:nvPr/>
         </p:nvSpPr>
         <p:spPr>
-          <a:xfrm flipH="false" flipV="false" rot="0">
+          <a:xfrm>
             <a:off x="0" y="0"/>
             <a:ext cx="18288000" cy="10287000"/>
           </a:xfrm>
@@ -4720,9 +4880,9 @@
             <a:gdLst/>
             <a:ahLst/>
             <a:cxnLst/>
-            <a:rect r="r" b="b" t="t" l="l"/>
+            <a:rect l="l" t="t" r="r" b="b"/>
             <a:pathLst>
-              <a:path h="10287000" w="18288000">
+              <a:path w="18288000" h="10287000">
                 <a:moveTo>
                   <a:pt x="0" y="0"/>
                 </a:moveTo>
@@ -4745,19 +4905,19 @@
           <a:blipFill>
             <a:blip r:embed="rId2"/>
             <a:stretch>
-              <a:fillRect l="-11643" t="0" r="-11643" b="0"/>
+              <a:fillRect l="-11643" r="-11643"/>
             </a:stretch>
           </a:blipFill>
         </p:spPr>
       </p:sp>
       <p:grpSp>
         <p:nvGrpSpPr>
-          <p:cNvPr name="Group 3" id="3"/>
+          <p:cNvPr id="3" name="Group 3"/>
           <p:cNvGrpSpPr/>
           <p:nvPr/>
         </p:nvGrpSpPr>
         <p:grpSpPr>
-          <a:xfrm rot="0">
+          <a:xfrm>
             <a:off x="3995387" y="2705956"/>
             <a:ext cx="10297225" cy="3042938"/>
             <a:chOff x="0" y="0"/>
@@ -4766,12 +4926,12 @@
         </p:grpSpPr>
         <p:sp>
           <p:nvSpPr>
-            <p:cNvPr name="TextBox 4" id="4"/>
-            <p:cNvSpPr txBox="true"/>
+            <p:cNvPr id="4" name="TextBox 4"/>
+            <p:cNvSpPr txBox="1"/>
             <p:nvPr/>
           </p:nvSpPr>
           <p:spPr>
-            <a:xfrm rot="0">
+            <a:xfrm>
               <a:off x="0" y="346780"/>
               <a:ext cx="8426193" cy="3710471"/>
             </a:xfrm>
@@ -4780,7 +4940,7 @@
             </a:prstGeom>
           </p:spPr>
           <p:txBody>
-            <a:bodyPr anchor="t" rtlCol="false" tIns="0" lIns="0" bIns="0" rIns="0">
+            <a:bodyPr lIns="0" tIns="0" rIns="0" bIns="0" rtlCol="0" anchor="t">
               <a:spAutoFit/>
             </a:bodyPr>
             <a:lstStyle/>
@@ -4791,7 +4951,7 @@
                 </a:lnSpc>
               </a:pPr>
               <a:r>
-                <a:rPr lang="en-US" sz="20093" b="true">
+                <a:rPr lang="en-US" sz="20093" b="1">
                   <a:solidFill>
                     <a:srgbClr val="707070"/>
                   </a:solidFill>
@@ -4807,12 +4967,12 @@
         </p:sp>
         <p:sp>
           <p:nvSpPr>
-            <p:cNvPr name="TextBox 5" id="5"/>
-            <p:cNvSpPr txBox="true"/>
+            <p:cNvPr id="5" name="TextBox 5"/>
+            <p:cNvSpPr txBox="1"/>
             <p:nvPr/>
           </p:nvSpPr>
           <p:spPr>
-            <a:xfrm rot="0">
+            <a:xfrm>
               <a:off x="8426193" y="342900"/>
               <a:ext cx="5303440" cy="3710471"/>
             </a:xfrm>
@@ -4821,7 +4981,7 @@
             </a:prstGeom>
           </p:spPr>
           <p:txBody>
-            <a:bodyPr anchor="t" rtlCol="false" tIns="0" lIns="0" bIns="0" rIns="0">
+            <a:bodyPr lIns="0" tIns="0" rIns="0" bIns="0" rtlCol="0" anchor="t">
               <a:spAutoFit/>
             </a:bodyPr>
             <a:lstStyle/>
@@ -4832,7 +4992,7 @@
                 </a:lnSpc>
               </a:pPr>
               <a:r>
-                <a:rPr lang="en-US" sz="20093" b="true">
+                <a:rPr lang="en-US" sz="20093" b="1">
                   <a:solidFill>
                     <a:srgbClr val="259D84"/>
                   </a:solidFill>
@@ -4849,7 +5009,7 @@
       </p:grpSp>
       <p:grpSp>
         <p:nvGrpSpPr>
-          <p:cNvPr name="Group 6" id="6"/>
+          <p:cNvPr id="6" name="Group 6"/>
           <p:cNvGrpSpPr/>
           <p:nvPr/>
         </p:nvGrpSpPr>
@@ -4863,12 +5023,12 @@
         </p:grpSpPr>
         <p:sp>
           <p:nvSpPr>
-            <p:cNvPr name="Freeform 7" id="7"/>
+            <p:cNvPr id="7" name="Freeform 7"/>
             <p:cNvSpPr/>
             <p:nvPr/>
           </p:nvSpPr>
           <p:spPr>
-            <a:xfrm flipH="false" flipV="false" rot="0">
+            <a:xfrm>
               <a:off x="0" y="0"/>
               <a:ext cx="812800" cy="812800"/>
             </a:xfrm>
@@ -4877,9 +5037,9 @@
               <a:gdLst/>
               <a:ahLst/>
               <a:cxnLst/>
-              <a:rect r="r" b="b" t="t" l="l"/>
+              <a:rect l="l" t="t" r="r" b="b"/>
               <a:pathLst>
-                <a:path h="812800" w="812800">
+                <a:path w="812800" h="812800">
                   <a:moveTo>
                     <a:pt x="406400" y="0"/>
                   </a:moveTo>
@@ -4945,8 +5105,8 @@
         </p:sp>
         <p:sp>
           <p:nvSpPr>
-            <p:cNvPr name="TextBox 8" id="8"/>
-            <p:cNvSpPr txBox="true"/>
+            <p:cNvPr id="8" name="TextBox 8"/>
+            <p:cNvSpPr txBox="1"/>
             <p:nvPr/>
           </p:nvSpPr>
           <p:spPr>
@@ -4959,7 +5119,7 @@
             </a:prstGeom>
           </p:spPr>
           <p:txBody>
-            <a:bodyPr anchor="ctr" rtlCol="false" tIns="50800" lIns="50800" bIns="50800" rIns="50800"/>
+            <a:bodyPr lIns="50800" tIns="50800" rIns="50800" bIns="50800" rtlCol="0" anchor="ctr"/>
             <a:lstStyle/>
             <a:p>
               <a:pPr algn="ctr">
@@ -4967,13 +5127,14 @@
                   <a:spcPts val="2520"/>
                 </a:lnSpc>
               </a:pPr>
+              <a:endParaRPr/>
             </a:p>
           </p:txBody>
         </p:sp>
       </p:grpSp>
       <p:grpSp>
         <p:nvGrpSpPr>
-          <p:cNvPr name="Group 9" id="9"/>
+          <p:cNvPr id="9" name="Group 9"/>
           <p:cNvGrpSpPr/>
           <p:nvPr/>
         </p:nvGrpSpPr>
@@ -4987,12 +5148,12 @@
         </p:grpSpPr>
         <p:sp>
           <p:nvSpPr>
-            <p:cNvPr name="Freeform 10" id="10"/>
+            <p:cNvPr id="10" name="Freeform 10"/>
             <p:cNvSpPr/>
             <p:nvPr/>
           </p:nvSpPr>
           <p:spPr>
-            <a:xfrm flipH="false" flipV="false" rot="0">
+            <a:xfrm>
               <a:off x="0" y="0"/>
               <a:ext cx="513191" cy="651052"/>
             </a:xfrm>
@@ -5001,9 +5162,9 @@
               <a:gdLst/>
               <a:ahLst/>
               <a:cxnLst/>
-              <a:rect r="r" b="b" t="t" l="l"/>
+              <a:rect l="l" t="t" r="r" b="b"/>
               <a:pathLst>
-                <a:path h="651052" w="513191">
+                <a:path w="513191" h="651052">
                   <a:moveTo>
                     <a:pt x="246340" y="0"/>
                   </a:moveTo>
@@ -5063,7 +5224,7 @@
                 </a:path>
               </a:pathLst>
             </a:custGeom>
-            <a:gradFill rotWithShape="true">
+            <a:gradFill rotWithShape="1">
               <a:gsLst>
                 <a:gs pos="0">
                   <a:srgbClr val="30C2B7">
@@ -5092,8 +5253,8 @@
         </p:sp>
         <p:sp>
           <p:nvSpPr>
-            <p:cNvPr name="TextBox 11" id="11"/>
-            <p:cNvSpPr txBox="true"/>
+            <p:cNvPr id="11" name="TextBox 11"/>
+            <p:cNvSpPr txBox="1"/>
             <p:nvPr/>
           </p:nvSpPr>
           <p:spPr>
@@ -5106,7 +5267,7 @@
             </a:prstGeom>
           </p:spPr>
           <p:txBody>
-            <a:bodyPr anchor="ctr" rtlCol="false" tIns="50800" lIns="50800" bIns="50800" rIns="50800"/>
+            <a:bodyPr lIns="50800" tIns="50800" rIns="50800" bIns="50800" rtlCol="0" anchor="ctr"/>
             <a:lstStyle/>
             <a:p>
               <a:pPr algn="ctr">
@@ -5114,18 +5275,19 @@
                   <a:spcPts val="2520"/>
                 </a:lnSpc>
               </a:pPr>
+              <a:endParaRPr/>
             </a:p>
           </p:txBody>
         </p:sp>
       </p:grpSp>
       <p:sp>
         <p:nvSpPr>
-          <p:cNvPr name="TextBox 12" id="12"/>
-          <p:cNvSpPr txBox="true"/>
+          <p:cNvPr id="12" name="TextBox 12"/>
+          <p:cNvSpPr txBox="1"/>
           <p:nvPr/>
         </p:nvSpPr>
         <p:spPr>
-          <a:xfrm rot="0">
+          <a:xfrm>
             <a:off x="9049189" y="4883915"/>
             <a:ext cx="8074983" cy="2697128"/>
           </a:xfrm>
@@ -5134,7 +5296,7 @@
           </a:prstGeom>
         </p:spPr>
         <p:txBody>
-          <a:bodyPr anchor="t" rtlCol="false" tIns="0" lIns="0" bIns="0" rIns="0">
+          <a:bodyPr lIns="0" tIns="0" rIns="0" bIns="0" rtlCol="0" anchor="t">
             <a:spAutoFit/>
           </a:bodyPr>
           <a:lstStyle/>
@@ -5145,7 +5307,7 @@
               </a:lnSpc>
             </a:pPr>
             <a:r>
-              <a:rPr lang="en-US" sz="20093" b="true">
+              <a:rPr lang="en-US" sz="20093" b="1">
                 <a:solidFill>
                   <a:srgbClr val="707070"/>
                 </a:solidFill>
@@ -5161,12 +5323,12 @@
       </p:sp>
       <p:sp>
         <p:nvSpPr>
-          <p:cNvPr name="TextBox 13" id="13"/>
-          <p:cNvSpPr txBox="true"/>
+          <p:cNvPr id="13" name="TextBox 13"/>
+          <p:cNvSpPr txBox="1"/>
           <p:nvPr/>
         </p:nvSpPr>
         <p:spPr>
-          <a:xfrm rot="0">
+          <a:xfrm>
             <a:off x="4061611" y="4883915"/>
             <a:ext cx="4466114" cy="2697128"/>
           </a:xfrm>
@@ -5175,7 +5337,7 @@
           </a:prstGeom>
         </p:spPr>
         <p:txBody>
-          <a:bodyPr anchor="t" rtlCol="false" tIns="0" lIns="0" bIns="0" rIns="0">
+          <a:bodyPr lIns="0" tIns="0" rIns="0" bIns="0" rtlCol="0" anchor="t">
             <a:spAutoFit/>
           </a:bodyPr>
           <a:lstStyle/>
@@ -5186,7 +5348,7 @@
               </a:lnSpc>
             </a:pPr>
             <a:r>
-              <a:rPr lang="en-US" sz="20093" b="true">
+              <a:rPr lang="en-US" sz="20093" b="1">
                 <a:solidFill>
                   <a:srgbClr val="259D84"/>
                 </a:solidFill>
@@ -5209,7 +5371,7 @@
 </file>
 
 <file path=ppt/slides/slide2.xml><?xml version="1.0" encoding="utf-8"?>
-<p:sld xmlns:p="http://schemas.openxmlformats.org/presentationml/2006/main" xmlns:a="http://schemas.openxmlformats.org/drawingml/2006/main" xmlns:r="http://schemas.openxmlformats.org/officeDocument/2006/relationships">
+<p:sld xmlns:a="http://schemas.openxmlformats.org/drawingml/2006/main" xmlns:r="http://schemas.openxmlformats.org/officeDocument/2006/relationships" xmlns:p="http://schemas.openxmlformats.org/presentationml/2006/main">
   <p:cSld>
     <p:spTree>
       <p:nvGrpSpPr>
@@ -5227,12 +5389,12 @@
       </p:grpSpPr>
       <p:sp>
         <p:nvSpPr>
-          <p:cNvPr name="Freeform 2" id="2"/>
+          <p:cNvPr id="2" name="Freeform 2"/>
           <p:cNvSpPr/>
           <p:nvPr/>
         </p:nvSpPr>
         <p:spPr>
-          <a:xfrm flipH="false" flipV="false" rot="0">
+          <a:xfrm>
             <a:off x="0" y="0"/>
             <a:ext cx="18288000" cy="10287000"/>
           </a:xfrm>
@@ -5241,9 +5403,9 @@
             <a:gdLst/>
             <a:ahLst/>
             <a:cxnLst/>
-            <a:rect r="r" b="b" t="t" l="l"/>
+            <a:rect l="l" t="t" r="r" b="b"/>
             <a:pathLst>
-              <a:path h="10287000" w="18288000">
+              <a:path w="18288000" h="10287000">
                 <a:moveTo>
                   <a:pt x="0" y="0"/>
                 </a:moveTo>
@@ -5266,14 +5428,14 @@
           <a:blipFill>
             <a:blip r:embed="rId2"/>
             <a:stretch>
-              <a:fillRect l="-11643" t="0" r="-11643" b="0"/>
+              <a:fillRect l="-11643" r="-11643"/>
             </a:stretch>
           </a:blipFill>
         </p:spPr>
       </p:sp>
       <p:grpSp>
         <p:nvGrpSpPr>
-          <p:cNvPr name="Group 3" id="3"/>
+          <p:cNvPr id="3" name="Group 3"/>
           <p:cNvGrpSpPr/>
           <p:nvPr/>
         </p:nvGrpSpPr>
@@ -5287,12 +5449,12 @@
         </p:grpSpPr>
         <p:sp>
           <p:nvSpPr>
-            <p:cNvPr name="Freeform 4" id="4"/>
+            <p:cNvPr id="4" name="Freeform 4"/>
             <p:cNvSpPr/>
             <p:nvPr/>
           </p:nvSpPr>
           <p:spPr>
-            <a:xfrm flipH="false" flipV="false" rot="0">
+            <a:xfrm>
               <a:off x="0" y="0"/>
               <a:ext cx="812800" cy="812800"/>
             </a:xfrm>
@@ -5301,9 +5463,9 @@
               <a:gdLst/>
               <a:ahLst/>
               <a:cxnLst/>
-              <a:rect r="r" b="b" t="t" l="l"/>
+              <a:rect l="l" t="t" r="r" b="b"/>
               <a:pathLst>
-                <a:path h="812800" w="812800">
+                <a:path w="812800" h="812800">
                   <a:moveTo>
                     <a:pt x="406400" y="0"/>
                   </a:moveTo>
@@ -5369,8 +5531,8 @@
         </p:sp>
         <p:sp>
           <p:nvSpPr>
-            <p:cNvPr name="TextBox 5" id="5"/>
-            <p:cNvSpPr txBox="true"/>
+            <p:cNvPr id="5" name="TextBox 5"/>
+            <p:cNvSpPr txBox="1"/>
             <p:nvPr/>
           </p:nvSpPr>
           <p:spPr>
@@ -5383,7 +5545,7 @@
             </a:prstGeom>
           </p:spPr>
           <p:txBody>
-            <a:bodyPr anchor="ctr" rtlCol="false" tIns="50800" lIns="50800" bIns="50800" rIns="50800"/>
+            <a:bodyPr lIns="50800" tIns="50800" rIns="50800" bIns="50800" rtlCol="0" anchor="ctr"/>
             <a:lstStyle/>
             <a:p>
               <a:pPr algn="ctr">
@@ -5391,13 +5553,14 @@
                   <a:spcPts val="2520"/>
                 </a:lnSpc>
               </a:pPr>
+              <a:endParaRPr/>
             </a:p>
           </p:txBody>
         </p:sp>
       </p:grpSp>
       <p:grpSp>
         <p:nvGrpSpPr>
-          <p:cNvPr name="Group 6" id="6"/>
+          <p:cNvPr id="6" name="Group 6"/>
           <p:cNvGrpSpPr/>
           <p:nvPr/>
         </p:nvGrpSpPr>
@@ -5411,12 +5574,12 @@
         </p:grpSpPr>
         <p:sp>
           <p:nvSpPr>
-            <p:cNvPr name="Freeform 7" id="7"/>
+            <p:cNvPr id="7" name="Freeform 7"/>
             <p:cNvSpPr/>
             <p:nvPr/>
           </p:nvSpPr>
           <p:spPr>
-            <a:xfrm flipH="false" flipV="false" rot="0">
+            <a:xfrm>
               <a:off x="0" y="0"/>
               <a:ext cx="513191" cy="651052"/>
             </a:xfrm>
@@ -5425,9 +5588,9 @@
               <a:gdLst/>
               <a:ahLst/>
               <a:cxnLst/>
-              <a:rect r="r" b="b" t="t" l="l"/>
+              <a:rect l="l" t="t" r="r" b="b"/>
               <a:pathLst>
-                <a:path h="651052" w="513191">
+                <a:path w="513191" h="651052">
                   <a:moveTo>
                     <a:pt x="246340" y="0"/>
                   </a:moveTo>
@@ -5487,7 +5650,7 @@
                 </a:path>
               </a:pathLst>
             </a:custGeom>
-            <a:gradFill rotWithShape="true">
+            <a:gradFill rotWithShape="1">
               <a:gsLst>
                 <a:gs pos="0">
                   <a:srgbClr val="30C2B7">
@@ -5516,8 +5679,8 @@
         </p:sp>
         <p:sp>
           <p:nvSpPr>
-            <p:cNvPr name="TextBox 8" id="8"/>
-            <p:cNvSpPr txBox="true"/>
+            <p:cNvPr id="8" name="TextBox 8"/>
+            <p:cNvSpPr txBox="1"/>
             <p:nvPr/>
           </p:nvSpPr>
           <p:spPr>
@@ -5530,7 +5693,7 @@
             </a:prstGeom>
           </p:spPr>
           <p:txBody>
-            <a:bodyPr anchor="ctr" rtlCol="false" tIns="50800" lIns="50800" bIns="50800" rIns="50800"/>
+            <a:bodyPr lIns="50800" tIns="50800" rIns="50800" bIns="50800" rtlCol="0" anchor="ctr"/>
             <a:lstStyle/>
             <a:p>
               <a:pPr algn="ctr">
@@ -5538,18 +5701,19 @@
                   <a:spcPts val="2520"/>
                 </a:lnSpc>
               </a:pPr>
+              <a:endParaRPr/>
             </a:p>
           </p:txBody>
         </p:sp>
       </p:grpSp>
       <p:grpSp>
         <p:nvGrpSpPr>
-          <p:cNvPr name="Group 9" id="9"/>
+          <p:cNvPr id="9" name="Group 9"/>
           <p:cNvGrpSpPr/>
           <p:nvPr/>
         </p:nvGrpSpPr>
         <p:grpSpPr>
-          <a:xfrm rot="0">
+          <a:xfrm>
             <a:off x="1898296" y="1999182"/>
             <a:ext cx="6437639" cy="6288635"/>
             <a:chOff x="0" y="0"/>
@@ -5558,438 +5722,438 @@
         </p:grpSpPr>
         <p:sp>
           <p:nvSpPr>
-            <p:cNvPr name="Freeform 10" id="10"/>
+            <p:cNvPr id="10" name="Freeform 10"/>
             <p:cNvSpPr/>
             <p:nvPr/>
           </p:nvSpPr>
           <p:spPr>
-            <a:xfrm flipH="false" flipV="false" rot="0">
-              <a:off x="0" y="-7620"/>
-              <a:ext cx="4833620" cy="4726940"/>
+            <a:xfrm>
+              <a:off x="1103" y="1273"/>
+              <a:ext cx="4830645" cy="4716345"/>
             </a:xfrm>
             <a:custGeom>
               <a:avLst/>
               <a:gdLst/>
               <a:ahLst/>
               <a:cxnLst/>
-              <a:rect r="r" b="b" t="t" l="l"/>
+              <a:rect l="l" t="t" r="r" b="b"/>
               <a:pathLst>
-                <a:path h="4726940" w="4833620">
+                <a:path w="4830645" h="4716345">
                   <a:moveTo>
-                    <a:pt x="3416300" y="4662170"/>
+                    <a:pt x="3415197" y="4653277"/>
                   </a:moveTo>
                   <a:cubicBezTo>
-                    <a:pt x="3388360" y="4669790"/>
-                    <a:pt x="3366770" y="4679950"/>
-                    <a:pt x="3345180" y="4682490"/>
-                  </a:cubicBezTo>
-                  <a:cubicBezTo>
-                    <a:pt x="3223260" y="4692650"/>
-                    <a:pt x="3102610" y="4702810"/>
-                    <a:pt x="2980690" y="4711700"/>
-                  </a:cubicBezTo>
-                  <a:cubicBezTo>
-                    <a:pt x="2918460" y="4715510"/>
-                    <a:pt x="2856230" y="4719320"/>
-                    <a:pt x="2794000" y="4720590"/>
-                  </a:cubicBezTo>
-                  <a:cubicBezTo>
-                    <a:pt x="2726690" y="4723130"/>
-                    <a:pt x="2659380" y="4726940"/>
-                    <a:pt x="2593340" y="4724400"/>
-                  </a:cubicBezTo>
-                  <a:cubicBezTo>
-                    <a:pt x="2529840" y="4723130"/>
-                    <a:pt x="2466340" y="4719320"/>
-                    <a:pt x="2405380" y="4707890"/>
-                  </a:cubicBezTo>
-                  <a:cubicBezTo>
-                    <a:pt x="2326640" y="4693920"/>
-                    <a:pt x="2246630" y="4693920"/>
-                    <a:pt x="2169160" y="4681220"/>
-                  </a:cubicBezTo>
-                  <a:cubicBezTo>
-                    <a:pt x="1967230" y="4648200"/>
-                    <a:pt x="1761490" y="4657090"/>
-                    <a:pt x="1558290" y="4643120"/>
-                  </a:cubicBezTo>
-                  <a:cubicBezTo>
-                    <a:pt x="1443990" y="4635500"/>
-                    <a:pt x="1329690" y="4617720"/>
-                    <a:pt x="1215390" y="4602480"/>
-                  </a:cubicBezTo>
-                  <a:cubicBezTo>
-                    <a:pt x="1085850" y="4585970"/>
-                    <a:pt x="956310" y="4566920"/>
-                    <a:pt x="825500" y="4549140"/>
-                  </a:cubicBezTo>
-                  <a:cubicBezTo>
-                    <a:pt x="730250" y="4536440"/>
-                    <a:pt x="633730" y="4523740"/>
-                    <a:pt x="538480" y="4511040"/>
-                  </a:cubicBezTo>
-                  <a:cubicBezTo>
-                    <a:pt x="535940" y="4511040"/>
-                    <a:pt x="533400" y="4509770"/>
-                    <a:pt x="530860" y="4509770"/>
-                  </a:cubicBezTo>
-                  <a:cubicBezTo>
-                    <a:pt x="450850" y="4475480"/>
-                    <a:pt x="365760" y="4448810"/>
-                    <a:pt x="292100" y="4404360"/>
-                  </a:cubicBezTo>
-                  <a:cubicBezTo>
-                    <a:pt x="167640" y="4328160"/>
-                    <a:pt x="114300" y="4206240"/>
-                    <a:pt x="109220" y="4062730"/>
-                  </a:cubicBezTo>
-                  <a:cubicBezTo>
-                    <a:pt x="107950" y="4013200"/>
-                    <a:pt x="101600" y="3964940"/>
-                    <a:pt x="101600" y="3915410"/>
-                  </a:cubicBezTo>
-                  <a:cubicBezTo>
-                    <a:pt x="102870" y="3846830"/>
-                    <a:pt x="107950" y="3779520"/>
-                    <a:pt x="111760" y="3712210"/>
-                  </a:cubicBezTo>
-                  <a:cubicBezTo>
-                    <a:pt x="121920" y="3511550"/>
-                    <a:pt x="127000" y="3310890"/>
-                    <a:pt x="111760" y="3110230"/>
-                  </a:cubicBezTo>
-                  <a:cubicBezTo>
-                    <a:pt x="97790" y="2929890"/>
-                    <a:pt x="85090" y="2750820"/>
-                    <a:pt x="71120" y="2570480"/>
-                  </a:cubicBezTo>
-                  <a:cubicBezTo>
-                    <a:pt x="62230" y="2454910"/>
-                    <a:pt x="50800" y="2340610"/>
-                    <a:pt x="43180" y="2225040"/>
-                  </a:cubicBezTo>
-                  <a:cubicBezTo>
-                    <a:pt x="38100" y="2148840"/>
-                    <a:pt x="39370" y="2071370"/>
-                    <a:pt x="34290" y="1995170"/>
-                  </a:cubicBezTo>
-                  <a:cubicBezTo>
-                    <a:pt x="31750" y="1951990"/>
-                    <a:pt x="17780" y="1910080"/>
-                    <a:pt x="16510" y="1866900"/>
-                  </a:cubicBezTo>
-                  <a:cubicBezTo>
-                    <a:pt x="11430" y="1762760"/>
-                    <a:pt x="10160" y="1657350"/>
-                    <a:pt x="7620" y="1551940"/>
-                  </a:cubicBezTo>
-                  <a:cubicBezTo>
-                    <a:pt x="6350" y="1511300"/>
-                    <a:pt x="0" y="1470660"/>
-                    <a:pt x="1270" y="1430020"/>
-                  </a:cubicBezTo>
-                  <a:cubicBezTo>
-                    <a:pt x="2540" y="1366520"/>
-                    <a:pt x="10160" y="1303020"/>
-                    <a:pt x="11430" y="1239520"/>
-                  </a:cubicBezTo>
-                  <a:cubicBezTo>
-                    <a:pt x="12700" y="1165860"/>
-                    <a:pt x="5080" y="1092200"/>
-                    <a:pt x="7620" y="1019810"/>
-                  </a:cubicBezTo>
-                  <a:cubicBezTo>
-                    <a:pt x="7620" y="949960"/>
-                    <a:pt x="16510" y="881380"/>
-                    <a:pt x="25400" y="811530"/>
-                  </a:cubicBezTo>
-                  <a:cubicBezTo>
-                    <a:pt x="27940" y="787400"/>
-                    <a:pt x="45720" y="765810"/>
-                    <a:pt x="50800" y="741680"/>
-                  </a:cubicBezTo>
-                  <a:cubicBezTo>
-                    <a:pt x="72390" y="622300"/>
-                    <a:pt x="95250" y="502920"/>
-                    <a:pt x="151130" y="392430"/>
-                  </a:cubicBezTo>
-                  <a:cubicBezTo>
-                    <a:pt x="163830" y="368300"/>
-                    <a:pt x="184150" y="346710"/>
-                    <a:pt x="203200" y="327660"/>
-                  </a:cubicBezTo>
-                  <a:cubicBezTo>
-                    <a:pt x="209550" y="321310"/>
-                    <a:pt x="224790" y="325120"/>
-                    <a:pt x="228600" y="325120"/>
-                  </a:cubicBezTo>
-                  <a:cubicBezTo>
-                    <a:pt x="237490" y="308610"/>
-                    <a:pt x="242570" y="292100"/>
-                    <a:pt x="252730" y="284480"/>
-                  </a:cubicBezTo>
-                  <a:cubicBezTo>
-                    <a:pt x="307340" y="242570"/>
-                    <a:pt x="364490" y="212090"/>
-                    <a:pt x="435610" y="204470"/>
-                  </a:cubicBezTo>
-                  <a:cubicBezTo>
-                    <a:pt x="488950" y="198120"/>
-                    <a:pt x="541020" y="175260"/>
-                    <a:pt x="594360" y="162560"/>
-                  </a:cubicBezTo>
-                  <a:cubicBezTo>
-                    <a:pt x="659130" y="147320"/>
-                    <a:pt x="723900" y="129540"/>
-                    <a:pt x="791210" y="120650"/>
-                  </a:cubicBezTo>
-                  <a:cubicBezTo>
-                    <a:pt x="852170" y="113030"/>
-                    <a:pt x="910590" y="96520"/>
-                    <a:pt x="972820" y="91440"/>
-                  </a:cubicBezTo>
-                  <a:cubicBezTo>
-                    <a:pt x="1036320" y="86360"/>
-                    <a:pt x="1099820" y="71120"/>
-                    <a:pt x="1164590" y="66040"/>
-                  </a:cubicBezTo>
-                  <a:cubicBezTo>
-                    <a:pt x="1339850" y="53340"/>
-                    <a:pt x="1516380" y="44450"/>
-                    <a:pt x="1691640" y="34290"/>
-                  </a:cubicBezTo>
-                  <a:cubicBezTo>
-                    <a:pt x="1734820" y="31750"/>
-                    <a:pt x="1778000" y="34290"/>
-                    <a:pt x="1821180" y="35560"/>
-                  </a:cubicBezTo>
-                  <a:cubicBezTo>
-                    <a:pt x="1842770" y="36830"/>
-                    <a:pt x="1864360" y="41910"/>
-                    <a:pt x="1887220" y="44450"/>
-                  </a:cubicBezTo>
-                  <a:cubicBezTo>
-                    <a:pt x="1897380" y="45720"/>
-                    <a:pt x="1907540" y="41910"/>
-                    <a:pt x="1917700" y="41910"/>
-                  </a:cubicBezTo>
-                  <a:cubicBezTo>
-                    <a:pt x="1948180" y="41910"/>
-                    <a:pt x="1979930" y="41910"/>
-                    <a:pt x="2010410" y="40640"/>
-                  </a:cubicBezTo>
-                  <a:cubicBezTo>
-                    <a:pt x="2068830" y="38100"/>
-                    <a:pt x="2128520" y="31750"/>
-                    <a:pt x="2186940" y="31750"/>
-                  </a:cubicBezTo>
-                  <a:cubicBezTo>
-                    <a:pt x="2244090" y="31750"/>
-                    <a:pt x="2301240" y="35560"/>
-                    <a:pt x="2358390" y="38100"/>
-                  </a:cubicBezTo>
-                  <a:lnTo>
-                    <a:pt x="2404110" y="38100"/>
-                  </a:lnTo>
-                  <a:cubicBezTo>
-                    <a:pt x="2473960" y="35560"/>
-                    <a:pt x="2542540" y="35560"/>
-                    <a:pt x="2612390" y="31750"/>
-                  </a:cubicBezTo>
-                  <a:cubicBezTo>
-                    <a:pt x="2679700" y="27940"/>
-                    <a:pt x="2745740" y="19050"/>
-                    <a:pt x="2813050" y="15240"/>
-                  </a:cubicBezTo>
-                  <a:cubicBezTo>
-                    <a:pt x="2844800" y="12700"/>
-                    <a:pt x="2877820" y="12700"/>
-                    <a:pt x="2909570" y="19050"/>
-                  </a:cubicBezTo>
-                  <a:cubicBezTo>
-                    <a:pt x="2957830" y="27940"/>
-                    <a:pt x="3003550" y="33020"/>
-                    <a:pt x="3051810" y="19050"/>
-                  </a:cubicBezTo>
-                  <a:cubicBezTo>
-                    <a:pt x="3069590" y="13970"/>
-                    <a:pt x="3092450" y="22860"/>
-                    <a:pt x="3112770" y="25400"/>
-                  </a:cubicBezTo>
-                  <a:cubicBezTo>
-                    <a:pt x="3121660" y="26670"/>
-                    <a:pt x="3131820" y="29210"/>
-                    <a:pt x="3136900" y="25400"/>
-                  </a:cubicBezTo>
-                  <a:cubicBezTo>
-                    <a:pt x="3171190" y="0"/>
-                    <a:pt x="3202940" y="6350"/>
-                    <a:pt x="3235960" y="27940"/>
-                  </a:cubicBezTo>
-                  <a:cubicBezTo>
-                    <a:pt x="3239770" y="30480"/>
-                    <a:pt x="3249930" y="24130"/>
-                    <a:pt x="3257550" y="24130"/>
-                  </a:cubicBezTo>
-                  <a:cubicBezTo>
-                    <a:pt x="3288030" y="24130"/>
-                    <a:pt x="3318510" y="24130"/>
-                    <a:pt x="3350260" y="25400"/>
-                  </a:cubicBezTo>
-                  <a:cubicBezTo>
-                    <a:pt x="3373120" y="26670"/>
-                    <a:pt x="3394710" y="34290"/>
-                    <a:pt x="3417570" y="36830"/>
-                  </a:cubicBezTo>
-                  <a:cubicBezTo>
-                    <a:pt x="3467100" y="43180"/>
-                    <a:pt x="3517900" y="53340"/>
-                    <a:pt x="3568700" y="53340"/>
-                  </a:cubicBezTo>
-                  <a:cubicBezTo>
-                    <a:pt x="3663950" y="54610"/>
-                    <a:pt x="3759200" y="58420"/>
-                    <a:pt x="3853180" y="78740"/>
-                  </a:cubicBezTo>
-                  <a:cubicBezTo>
-                    <a:pt x="3940810" y="97790"/>
-                    <a:pt x="4030980" y="97790"/>
-                    <a:pt x="4119880" y="113030"/>
-                  </a:cubicBezTo>
-                  <a:cubicBezTo>
-                    <a:pt x="4173220" y="121920"/>
-                    <a:pt x="4227830" y="138430"/>
-                    <a:pt x="4273550" y="165100"/>
-                  </a:cubicBezTo>
-                  <a:cubicBezTo>
-                    <a:pt x="4323080" y="193040"/>
-                    <a:pt x="4361180" y="238760"/>
-                    <a:pt x="4405630" y="276860"/>
-                  </a:cubicBezTo>
-                  <a:cubicBezTo>
-                    <a:pt x="4422140" y="290830"/>
-                    <a:pt x="4446270" y="300990"/>
-                    <a:pt x="4457700" y="318770"/>
-                  </a:cubicBezTo>
-                  <a:cubicBezTo>
-                    <a:pt x="4490720" y="367030"/>
-                    <a:pt x="4519930" y="417830"/>
-                    <a:pt x="4549140" y="468630"/>
-                  </a:cubicBezTo>
-                  <a:cubicBezTo>
-                    <a:pt x="4570730" y="505460"/>
-                    <a:pt x="4592320" y="543560"/>
-                    <a:pt x="4608830" y="581660"/>
-                  </a:cubicBezTo>
-                  <a:cubicBezTo>
-                    <a:pt x="4626610" y="626110"/>
-                    <a:pt x="4640580" y="671830"/>
-                    <a:pt x="4654550" y="718820"/>
-                  </a:cubicBezTo>
-                  <a:cubicBezTo>
-                    <a:pt x="4676140" y="792480"/>
-                    <a:pt x="4701540" y="866140"/>
-                    <a:pt x="4715510" y="942340"/>
-                  </a:cubicBezTo>
-                  <a:cubicBezTo>
-                    <a:pt x="4735830" y="1049020"/>
-                    <a:pt x="4745990" y="1158240"/>
-                    <a:pt x="4761230" y="1266190"/>
-                  </a:cubicBezTo>
-                  <a:cubicBezTo>
-                    <a:pt x="4766310" y="1301750"/>
-                    <a:pt x="4772660" y="1337310"/>
-                    <a:pt x="4775200" y="1372870"/>
-                  </a:cubicBezTo>
-                  <a:cubicBezTo>
-                    <a:pt x="4782820" y="1474470"/>
-                    <a:pt x="4787900" y="1574800"/>
-                    <a:pt x="4794250" y="1676400"/>
-                  </a:cubicBezTo>
-                  <a:cubicBezTo>
-                    <a:pt x="4803140" y="1802130"/>
-                    <a:pt x="4815840" y="1926590"/>
-                    <a:pt x="4822190" y="2052320"/>
-                  </a:cubicBezTo>
-                  <a:cubicBezTo>
-                    <a:pt x="4828540" y="2172970"/>
-                    <a:pt x="4833620" y="2294890"/>
-                    <a:pt x="4831080" y="2416810"/>
-                  </a:cubicBezTo>
-                  <a:cubicBezTo>
-                    <a:pt x="4827270" y="2620010"/>
-                    <a:pt x="4817110" y="2821940"/>
-                    <a:pt x="4806950" y="3025140"/>
-                  </a:cubicBezTo>
-                  <a:cubicBezTo>
-                    <a:pt x="4800600" y="3150870"/>
-                    <a:pt x="4791710" y="3275330"/>
-                    <a:pt x="4779010" y="3399790"/>
-                  </a:cubicBezTo>
-                  <a:cubicBezTo>
-                    <a:pt x="4766310" y="3524250"/>
-                    <a:pt x="4747260" y="3647440"/>
-                    <a:pt x="4733290" y="3771900"/>
-                  </a:cubicBezTo>
-                  <a:cubicBezTo>
-                    <a:pt x="4723130" y="3858260"/>
-                    <a:pt x="4720590" y="3944620"/>
-                    <a:pt x="4709160" y="4029710"/>
-                  </a:cubicBezTo>
-                  <a:cubicBezTo>
-                    <a:pt x="4699000" y="4107180"/>
-                    <a:pt x="4660900" y="4175760"/>
-                    <a:pt x="4610100" y="4232910"/>
-                  </a:cubicBezTo>
-                  <a:cubicBezTo>
-                    <a:pt x="4568190" y="4281170"/>
-                    <a:pt x="4535170" y="4335780"/>
-                    <a:pt x="4491990" y="4382770"/>
-                  </a:cubicBezTo>
-                  <a:cubicBezTo>
-                    <a:pt x="4453890" y="4424680"/>
-                    <a:pt x="4411980" y="4466590"/>
-                    <a:pt x="4345940" y="4467860"/>
-                  </a:cubicBezTo>
-                  <a:cubicBezTo>
-                    <a:pt x="4330700" y="4467860"/>
-                    <a:pt x="4316730" y="4483100"/>
-                    <a:pt x="4301490" y="4490720"/>
-                  </a:cubicBezTo>
-                  <a:cubicBezTo>
-                    <a:pt x="4236720" y="4518660"/>
-                    <a:pt x="4169410" y="4542790"/>
-                    <a:pt x="4105910" y="4573270"/>
-                  </a:cubicBezTo>
-                  <a:cubicBezTo>
-                    <a:pt x="3989070" y="4629150"/>
-                    <a:pt x="3863340" y="4638040"/>
-                    <a:pt x="3737610" y="4643120"/>
-                  </a:cubicBezTo>
-                  <a:cubicBezTo>
-                    <a:pt x="3689350" y="4645660"/>
-                    <a:pt x="3639820" y="4641850"/>
-                    <a:pt x="3591560" y="4645660"/>
-                  </a:cubicBezTo>
-                  <a:cubicBezTo>
-                    <a:pt x="3567430" y="4646930"/>
-                    <a:pt x="3544570" y="4658360"/>
-                    <a:pt x="3521710" y="4663440"/>
-                  </a:cubicBezTo>
-                  <a:cubicBezTo>
-                    <a:pt x="3511550" y="4665980"/>
-                    <a:pt x="3501390" y="4664710"/>
-                    <a:pt x="3489960" y="4665980"/>
-                  </a:cubicBezTo>
-                  <a:cubicBezTo>
-                    <a:pt x="3474720" y="4667250"/>
-                    <a:pt x="3459480" y="4671060"/>
-                    <a:pt x="3444240" y="4669790"/>
-                  </a:cubicBezTo>
-                  <a:cubicBezTo>
-                    <a:pt x="3429000" y="4667250"/>
-                    <a:pt x="3418840" y="4662170"/>
-                    <a:pt x="3416300" y="4662170"/>
+                    <a:pt x="3387257" y="4660897"/>
+                    <a:pt x="3365667" y="4671057"/>
+                    <a:pt x="3344077" y="4673597"/>
+                  </a:cubicBezTo>
+                  <a:cubicBezTo>
+                    <a:pt x="3222157" y="4683757"/>
+                    <a:pt x="3101507" y="4693917"/>
+                    <a:pt x="2979587" y="4702807"/>
+                  </a:cubicBezTo>
+                  <a:cubicBezTo>
+                    <a:pt x="2917357" y="4706617"/>
+                    <a:pt x="2855127" y="4710427"/>
+                    <a:pt x="2792897" y="4711697"/>
+                  </a:cubicBezTo>
+                  <a:cubicBezTo>
+                    <a:pt x="2725587" y="4714237"/>
+                    <a:pt x="2658277" y="4718047"/>
+                    <a:pt x="2592237" y="4715507"/>
+                  </a:cubicBezTo>
+                  <a:cubicBezTo>
+                    <a:pt x="2528737" y="4714237"/>
+                    <a:pt x="2465237" y="4710427"/>
+                    <a:pt x="2404277" y="4698997"/>
+                  </a:cubicBezTo>
+                  <a:cubicBezTo>
+                    <a:pt x="2325537" y="4685027"/>
+                    <a:pt x="2245527" y="4685027"/>
+                    <a:pt x="2168057" y="4672327"/>
+                  </a:cubicBezTo>
+                  <a:cubicBezTo>
+                    <a:pt x="1966127" y="4639307"/>
+                    <a:pt x="1760387" y="4648197"/>
+                    <a:pt x="1557187" y="4634227"/>
+                  </a:cubicBezTo>
+                  <a:cubicBezTo>
+                    <a:pt x="1442887" y="4626607"/>
+                    <a:pt x="1328587" y="4608827"/>
+                    <a:pt x="1214287" y="4593587"/>
+                  </a:cubicBezTo>
+                  <a:cubicBezTo>
+                    <a:pt x="1084747" y="4577077"/>
+                    <a:pt x="955207" y="4558027"/>
+                    <a:pt x="824397" y="4540247"/>
+                  </a:cubicBezTo>
+                  <a:cubicBezTo>
+                    <a:pt x="729147" y="4527547"/>
+                    <a:pt x="632627" y="4514847"/>
+                    <a:pt x="537377" y="4502147"/>
+                  </a:cubicBezTo>
+                  <a:cubicBezTo>
+                    <a:pt x="534837" y="4502147"/>
+                    <a:pt x="532297" y="4500877"/>
+                    <a:pt x="529757" y="4500877"/>
+                  </a:cubicBezTo>
+                  <a:cubicBezTo>
+                    <a:pt x="449747" y="4466587"/>
+                    <a:pt x="364657" y="4439917"/>
+                    <a:pt x="290997" y="4395467"/>
+                  </a:cubicBezTo>
+                  <a:cubicBezTo>
+                    <a:pt x="166537" y="4319267"/>
+                    <a:pt x="113197" y="4197347"/>
+                    <a:pt x="108117" y="4053837"/>
+                  </a:cubicBezTo>
+                  <a:cubicBezTo>
+                    <a:pt x="106847" y="4004307"/>
+                    <a:pt x="100497" y="3956047"/>
+                    <a:pt x="100497" y="3906517"/>
+                  </a:cubicBezTo>
+                  <a:cubicBezTo>
+                    <a:pt x="101767" y="3837937"/>
+                    <a:pt x="106847" y="3770627"/>
+                    <a:pt x="110657" y="3703317"/>
+                  </a:cubicBezTo>
+                  <a:cubicBezTo>
+                    <a:pt x="120817" y="3502657"/>
+                    <a:pt x="125897" y="3301997"/>
+                    <a:pt x="110657" y="3101337"/>
+                  </a:cubicBezTo>
+                  <a:cubicBezTo>
+                    <a:pt x="96687" y="2920997"/>
+                    <a:pt x="83987" y="2741927"/>
+                    <a:pt x="70017" y="2561587"/>
+                  </a:cubicBezTo>
+                  <a:cubicBezTo>
+                    <a:pt x="61127" y="2446017"/>
+                    <a:pt x="49697" y="2331717"/>
+                    <a:pt x="42077" y="2216147"/>
+                  </a:cubicBezTo>
+                  <a:cubicBezTo>
+                    <a:pt x="36997" y="2139947"/>
+                    <a:pt x="38267" y="2062477"/>
+                    <a:pt x="33187" y="1986277"/>
+                  </a:cubicBezTo>
+                  <a:cubicBezTo>
+                    <a:pt x="30647" y="1943097"/>
+                    <a:pt x="16677" y="1901187"/>
+                    <a:pt x="15407" y="1858007"/>
+                  </a:cubicBezTo>
+                  <a:cubicBezTo>
+                    <a:pt x="10327" y="1753867"/>
+                    <a:pt x="9057" y="1648457"/>
+                    <a:pt x="6517" y="1543047"/>
+                  </a:cubicBezTo>
+                  <a:cubicBezTo>
+                    <a:pt x="5247" y="1502407"/>
+                    <a:pt x="-1103" y="1461767"/>
+                    <a:pt x="167" y="1421127"/>
+                  </a:cubicBezTo>
+                  <a:cubicBezTo>
+                    <a:pt x="1437" y="1357627"/>
+                    <a:pt x="9057" y="1294127"/>
+                    <a:pt x="10327" y="1230627"/>
+                  </a:cubicBezTo>
+                  <a:cubicBezTo>
+                    <a:pt x="11597" y="1156967"/>
+                    <a:pt x="3977" y="1083307"/>
+                    <a:pt x="6517" y="1010917"/>
+                  </a:cubicBezTo>
+                  <a:cubicBezTo>
+                    <a:pt x="6517" y="941067"/>
+                    <a:pt x="15407" y="872487"/>
+                    <a:pt x="24297" y="802637"/>
+                  </a:cubicBezTo>
+                  <a:cubicBezTo>
+                    <a:pt x="26837" y="778507"/>
+                    <a:pt x="44617" y="756917"/>
+                    <a:pt x="49697" y="732787"/>
+                  </a:cubicBezTo>
+                  <a:cubicBezTo>
+                    <a:pt x="71287" y="613407"/>
+                    <a:pt x="94147" y="494027"/>
+                    <a:pt x="150027" y="383537"/>
+                  </a:cubicBezTo>
+                  <a:cubicBezTo>
+                    <a:pt x="162727" y="359407"/>
+                    <a:pt x="183047" y="337817"/>
+                    <a:pt x="202097" y="318767"/>
+                  </a:cubicBezTo>
+                  <a:cubicBezTo>
+                    <a:pt x="208447" y="312417"/>
+                    <a:pt x="223687" y="316227"/>
+                    <a:pt x="227497" y="316227"/>
+                  </a:cubicBezTo>
+                  <a:cubicBezTo>
+                    <a:pt x="236387" y="299717"/>
+                    <a:pt x="241467" y="283207"/>
+                    <a:pt x="251627" y="275587"/>
+                  </a:cubicBezTo>
+                  <a:cubicBezTo>
+                    <a:pt x="306237" y="233677"/>
+                    <a:pt x="363387" y="203197"/>
+                    <a:pt x="434507" y="195577"/>
+                  </a:cubicBezTo>
+                  <a:cubicBezTo>
+                    <a:pt x="487847" y="189227"/>
+                    <a:pt x="539917" y="166367"/>
+                    <a:pt x="593257" y="153667"/>
+                  </a:cubicBezTo>
+                  <a:cubicBezTo>
+                    <a:pt x="658027" y="138427"/>
+                    <a:pt x="722797" y="120647"/>
+                    <a:pt x="790107" y="111757"/>
+                  </a:cubicBezTo>
+                  <a:cubicBezTo>
+                    <a:pt x="851067" y="104137"/>
+                    <a:pt x="909487" y="87627"/>
+                    <a:pt x="971717" y="82547"/>
+                  </a:cubicBezTo>
+                  <a:cubicBezTo>
+                    <a:pt x="1035217" y="77467"/>
+                    <a:pt x="1098717" y="62227"/>
+                    <a:pt x="1163487" y="57147"/>
+                  </a:cubicBezTo>
+                  <a:cubicBezTo>
+                    <a:pt x="1338747" y="44447"/>
+                    <a:pt x="1515277" y="35557"/>
+                    <a:pt x="1690537" y="25397"/>
+                  </a:cubicBezTo>
+                  <a:cubicBezTo>
+                    <a:pt x="1733717" y="22857"/>
+                    <a:pt x="1776897" y="25397"/>
+                    <a:pt x="1820077" y="26667"/>
+                  </a:cubicBezTo>
+                  <a:cubicBezTo>
+                    <a:pt x="1841667" y="27937"/>
+                    <a:pt x="1863257" y="33017"/>
+                    <a:pt x="1886117" y="35557"/>
+                  </a:cubicBezTo>
+                  <a:cubicBezTo>
+                    <a:pt x="1896277" y="36827"/>
+                    <a:pt x="1906437" y="33017"/>
+                    <a:pt x="1916597" y="33017"/>
+                  </a:cubicBezTo>
+                  <a:cubicBezTo>
+                    <a:pt x="1947077" y="33017"/>
+                    <a:pt x="1978827" y="33017"/>
+                    <a:pt x="2009307" y="31747"/>
+                  </a:cubicBezTo>
+                  <a:cubicBezTo>
+                    <a:pt x="2067727" y="29207"/>
+                    <a:pt x="2127417" y="22857"/>
+                    <a:pt x="2185837" y="22857"/>
+                  </a:cubicBezTo>
+                  <a:cubicBezTo>
+                    <a:pt x="2242987" y="22857"/>
+                    <a:pt x="2300137" y="26667"/>
+                    <a:pt x="2357287" y="29207"/>
+                  </a:cubicBezTo>
+                  <a:lnTo>
+                    <a:pt x="2403007" y="29207"/>
+                  </a:lnTo>
+                  <a:cubicBezTo>
+                    <a:pt x="2472857" y="26667"/>
+                    <a:pt x="2541437" y="26667"/>
+                    <a:pt x="2611287" y="22857"/>
+                  </a:cubicBezTo>
+                  <a:cubicBezTo>
+                    <a:pt x="2678597" y="19047"/>
+                    <a:pt x="2744637" y="10157"/>
+                    <a:pt x="2811947" y="6347"/>
+                  </a:cubicBezTo>
+                  <a:cubicBezTo>
+                    <a:pt x="2843697" y="3807"/>
+                    <a:pt x="2876717" y="3807"/>
+                    <a:pt x="2908467" y="10157"/>
+                  </a:cubicBezTo>
+                  <a:cubicBezTo>
+                    <a:pt x="2956727" y="19047"/>
+                    <a:pt x="3002447" y="24127"/>
+                    <a:pt x="3050707" y="10157"/>
+                  </a:cubicBezTo>
+                  <a:cubicBezTo>
+                    <a:pt x="3068487" y="5077"/>
+                    <a:pt x="3091347" y="13967"/>
+                    <a:pt x="3111667" y="16507"/>
+                  </a:cubicBezTo>
+                  <a:cubicBezTo>
+                    <a:pt x="3120557" y="17777"/>
+                    <a:pt x="3130717" y="20317"/>
+                    <a:pt x="3135797" y="16507"/>
+                  </a:cubicBezTo>
+                  <a:cubicBezTo>
+                    <a:pt x="3170087" y="-8893"/>
+                    <a:pt x="3201837" y="-2543"/>
+                    <a:pt x="3234857" y="19047"/>
+                  </a:cubicBezTo>
+                  <a:cubicBezTo>
+                    <a:pt x="3238667" y="21587"/>
+                    <a:pt x="3248827" y="15237"/>
+                    <a:pt x="3256447" y="15237"/>
+                  </a:cubicBezTo>
+                  <a:cubicBezTo>
+                    <a:pt x="3286927" y="15237"/>
+                    <a:pt x="3317407" y="15237"/>
+                    <a:pt x="3349157" y="16507"/>
+                  </a:cubicBezTo>
+                  <a:cubicBezTo>
+                    <a:pt x="3372017" y="17777"/>
+                    <a:pt x="3393607" y="25397"/>
+                    <a:pt x="3416467" y="27937"/>
+                  </a:cubicBezTo>
+                  <a:cubicBezTo>
+                    <a:pt x="3465997" y="34287"/>
+                    <a:pt x="3516797" y="44447"/>
+                    <a:pt x="3567597" y="44447"/>
+                  </a:cubicBezTo>
+                  <a:cubicBezTo>
+                    <a:pt x="3662847" y="45717"/>
+                    <a:pt x="3758097" y="49527"/>
+                    <a:pt x="3852077" y="69847"/>
+                  </a:cubicBezTo>
+                  <a:cubicBezTo>
+                    <a:pt x="3939707" y="88897"/>
+                    <a:pt x="4029877" y="88897"/>
+                    <a:pt x="4118777" y="104137"/>
+                  </a:cubicBezTo>
+                  <a:cubicBezTo>
+                    <a:pt x="4172117" y="113027"/>
+                    <a:pt x="4226727" y="129537"/>
+                    <a:pt x="4272447" y="156207"/>
+                  </a:cubicBezTo>
+                  <a:cubicBezTo>
+                    <a:pt x="4321977" y="184147"/>
+                    <a:pt x="4360077" y="229867"/>
+                    <a:pt x="4404527" y="267967"/>
+                  </a:cubicBezTo>
+                  <a:cubicBezTo>
+                    <a:pt x="4421037" y="281937"/>
+                    <a:pt x="4445167" y="292097"/>
+                    <a:pt x="4456597" y="309877"/>
+                  </a:cubicBezTo>
+                  <a:cubicBezTo>
+                    <a:pt x="4489617" y="358137"/>
+                    <a:pt x="4518827" y="408937"/>
+                    <a:pt x="4548037" y="459737"/>
+                  </a:cubicBezTo>
+                  <a:cubicBezTo>
+                    <a:pt x="4569627" y="496567"/>
+                    <a:pt x="4591217" y="534667"/>
+                    <a:pt x="4607727" y="572767"/>
+                  </a:cubicBezTo>
+                  <a:cubicBezTo>
+                    <a:pt x="4625507" y="617217"/>
+                    <a:pt x="4639477" y="662937"/>
+                    <a:pt x="4653447" y="709927"/>
+                  </a:cubicBezTo>
+                  <a:cubicBezTo>
+                    <a:pt x="4675037" y="783587"/>
+                    <a:pt x="4700437" y="857247"/>
+                    <a:pt x="4714407" y="933447"/>
+                  </a:cubicBezTo>
+                  <a:cubicBezTo>
+                    <a:pt x="4734727" y="1040127"/>
+                    <a:pt x="4744887" y="1149347"/>
+                    <a:pt x="4760127" y="1257297"/>
+                  </a:cubicBezTo>
+                  <a:cubicBezTo>
+                    <a:pt x="4765207" y="1292857"/>
+                    <a:pt x="4771557" y="1328417"/>
+                    <a:pt x="4774097" y="1363977"/>
+                  </a:cubicBezTo>
+                  <a:cubicBezTo>
+                    <a:pt x="4781717" y="1465577"/>
+                    <a:pt x="4786797" y="1565907"/>
+                    <a:pt x="4793147" y="1667507"/>
+                  </a:cubicBezTo>
+                  <a:cubicBezTo>
+                    <a:pt x="4802037" y="1793237"/>
+                    <a:pt x="4814737" y="1917697"/>
+                    <a:pt x="4821087" y="2043427"/>
+                  </a:cubicBezTo>
+                  <a:cubicBezTo>
+                    <a:pt x="4827437" y="2164077"/>
+                    <a:pt x="4832517" y="2285997"/>
+                    <a:pt x="4829977" y="2407917"/>
+                  </a:cubicBezTo>
+                  <a:cubicBezTo>
+                    <a:pt x="4826167" y="2611117"/>
+                    <a:pt x="4816007" y="2813047"/>
+                    <a:pt x="4805847" y="3016247"/>
+                  </a:cubicBezTo>
+                  <a:cubicBezTo>
+                    <a:pt x="4799497" y="3141977"/>
+                    <a:pt x="4790607" y="3266437"/>
+                    <a:pt x="4777907" y="3390897"/>
+                  </a:cubicBezTo>
+                  <a:cubicBezTo>
+                    <a:pt x="4765207" y="3515357"/>
+                    <a:pt x="4746157" y="3638547"/>
+                    <a:pt x="4732187" y="3763007"/>
+                  </a:cubicBezTo>
+                  <a:cubicBezTo>
+                    <a:pt x="4722027" y="3849367"/>
+                    <a:pt x="4719487" y="3935727"/>
+                    <a:pt x="4708057" y="4020817"/>
+                  </a:cubicBezTo>
+                  <a:cubicBezTo>
+                    <a:pt x="4697897" y="4098287"/>
+                    <a:pt x="4659797" y="4166867"/>
+                    <a:pt x="4608997" y="4224017"/>
+                  </a:cubicBezTo>
+                  <a:cubicBezTo>
+                    <a:pt x="4567087" y="4272277"/>
+                    <a:pt x="4534067" y="4326887"/>
+                    <a:pt x="4490887" y="4373877"/>
+                  </a:cubicBezTo>
+                  <a:cubicBezTo>
+                    <a:pt x="4452787" y="4415787"/>
+                    <a:pt x="4410877" y="4457697"/>
+                    <a:pt x="4344837" y="4458967"/>
+                  </a:cubicBezTo>
+                  <a:cubicBezTo>
+                    <a:pt x="4329597" y="4458967"/>
+                    <a:pt x="4315627" y="4474207"/>
+                    <a:pt x="4300387" y="4481827"/>
+                  </a:cubicBezTo>
+                  <a:cubicBezTo>
+                    <a:pt x="4235617" y="4509767"/>
+                    <a:pt x="4168307" y="4533897"/>
+                    <a:pt x="4104807" y="4564377"/>
+                  </a:cubicBezTo>
+                  <a:cubicBezTo>
+                    <a:pt x="3987967" y="4620257"/>
+                    <a:pt x="3862237" y="4629147"/>
+                    <a:pt x="3736507" y="4634227"/>
+                  </a:cubicBezTo>
+                  <a:cubicBezTo>
+                    <a:pt x="3688247" y="4636767"/>
+                    <a:pt x="3638717" y="4632957"/>
+                    <a:pt x="3590457" y="4636767"/>
+                  </a:cubicBezTo>
+                  <a:cubicBezTo>
+                    <a:pt x="3566327" y="4638037"/>
+                    <a:pt x="3543467" y="4649467"/>
+                    <a:pt x="3520607" y="4654547"/>
+                  </a:cubicBezTo>
+                  <a:cubicBezTo>
+                    <a:pt x="3510447" y="4657087"/>
+                    <a:pt x="3500287" y="4655817"/>
+                    <a:pt x="3488857" y="4657087"/>
+                  </a:cubicBezTo>
+                  <a:cubicBezTo>
+                    <a:pt x="3473617" y="4658357"/>
+                    <a:pt x="3458377" y="4662167"/>
+                    <a:pt x="3443137" y="4660897"/>
+                  </a:cubicBezTo>
+                  <a:cubicBezTo>
+                    <a:pt x="3427897" y="4658357"/>
+                    <a:pt x="3417737" y="4653277"/>
+                    <a:pt x="3415197" y="4653277"/>
                   </a:cubicBezTo>
                   <a:close/>
                 </a:path>
@@ -5998,7 +6162,7 @@
             <a:blipFill>
               <a:blip r:embed="rId3"/>
               <a:stretch>
-                <a:fillRect l="0" t="-14014" r="0" b="-14014"/>
+                <a:fillRect t="-14014" b="-14014"/>
               </a:stretch>
             </a:blipFill>
           </p:spPr>
@@ -6006,12 +6170,12 @@
       </p:grpSp>
       <p:sp>
         <p:nvSpPr>
-          <p:cNvPr name="Freeform 11" id="11"/>
+          <p:cNvPr id="11" name="Freeform 11"/>
           <p:cNvSpPr/>
           <p:nvPr/>
         </p:nvSpPr>
         <p:spPr>
-          <a:xfrm flipH="false" flipV="true" rot="0">
+          <a:xfrm flipV="1">
             <a:off x="6585253" y="1273563"/>
             <a:ext cx="2558747" cy="2186565"/>
           </a:xfrm>
@@ -6020,9 +6184,9 @@
             <a:gdLst/>
             <a:ahLst/>
             <a:cxnLst/>
-            <a:rect r="r" b="b" t="t" l="l"/>
+            <a:rect l="l" t="t" r="r" b="b"/>
             <a:pathLst>
-              <a:path h="2186565" w="2558747">
+              <a:path w="2558747" h="2186565">
                 <a:moveTo>
                   <a:pt x="0" y="2186566"/>
                 </a:moveTo>
@@ -6051,19 +6215,19 @@
               </a:extLst>
             </a:blip>
             <a:stretch>
-              <a:fillRect l="0" t="0" r="0" b="0"/>
+              <a:fillRect/>
             </a:stretch>
           </a:blipFill>
         </p:spPr>
       </p:sp>
       <p:sp>
         <p:nvSpPr>
-          <p:cNvPr name="Freeform 12" id="12"/>
+          <p:cNvPr id="12" name="Freeform 12"/>
           <p:cNvSpPr/>
           <p:nvPr/>
         </p:nvSpPr>
         <p:spPr>
-          <a:xfrm flipH="false" flipV="false" rot="0">
+          <a:xfrm>
             <a:off x="1604545" y="7149264"/>
             <a:ext cx="1450302" cy="1598529"/>
           </a:xfrm>
@@ -6072,9 +6236,9 @@
             <a:gdLst/>
             <a:ahLst/>
             <a:cxnLst/>
-            <a:rect r="r" b="b" t="t" l="l"/>
+            <a:rect l="l" t="t" r="r" b="b"/>
             <a:pathLst>
-              <a:path h="1598529" w="1450302">
+              <a:path w="1450302" h="1598529">
                 <a:moveTo>
                   <a:pt x="0" y="0"/>
                 </a:moveTo>
@@ -6103,19 +6267,19 @@
               </a:extLst>
             </a:blip>
             <a:stretch>
-              <a:fillRect l="0" t="0" r="0" b="0"/>
+              <a:fillRect/>
             </a:stretch>
           </a:blipFill>
         </p:spPr>
       </p:sp>
       <p:grpSp>
         <p:nvGrpSpPr>
-          <p:cNvPr name="Group 13" id="13"/>
+          <p:cNvPr id="13" name="Group 13"/>
           <p:cNvGrpSpPr/>
           <p:nvPr/>
         </p:nvGrpSpPr>
         <p:grpSpPr>
-          <a:xfrm rot="0">
+          <a:xfrm>
             <a:off x="10468790" y="2093558"/>
             <a:ext cx="6373646" cy="6099884"/>
             <a:chOff x="0" y="0"/>
@@ -6124,12 +6288,12 @@
         </p:grpSpPr>
         <p:sp>
           <p:nvSpPr>
-            <p:cNvPr name="TextBox 14" id="14"/>
-            <p:cNvSpPr txBox="true"/>
+            <p:cNvPr id="14" name="TextBox 14"/>
+            <p:cNvSpPr txBox="1"/>
             <p:nvPr/>
           </p:nvSpPr>
           <p:spPr>
-            <a:xfrm rot="0">
+            <a:xfrm>
               <a:off x="0" y="-57150"/>
               <a:ext cx="8498195" cy="1466850"/>
             </a:xfrm>
@@ -6138,18 +6302,18 @@
             </a:prstGeom>
           </p:spPr>
           <p:txBody>
-            <a:bodyPr anchor="t" rtlCol="false" tIns="0" lIns="0" bIns="0" rIns="0">
+            <a:bodyPr lIns="0" tIns="0" rIns="0" bIns="0" rtlCol="0" anchor="t">
               <a:spAutoFit/>
             </a:bodyPr>
             <a:lstStyle/>
             <a:p>
-              <a:pPr algn="l" marL="0" indent="0" lvl="0">
+              <a:pPr marL="0" lvl="0" indent="0" algn="l">
                 <a:lnSpc>
                   <a:spcPts val="8399"/>
                 </a:lnSpc>
               </a:pPr>
               <a:r>
-                <a:rPr lang="en-US" b="true" sz="6999">
+                <a:rPr lang="en-US" sz="6999" b="1">
                   <a:solidFill>
                     <a:srgbClr val="707070"/>
                   </a:solidFill>
@@ -6165,12 +6329,12 @@
         </p:sp>
         <p:sp>
           <p:nvSpPr>
-            <p:cNvPr name="TextBox 15" id="15"/>
-            <p:cNvSpPr txBox="true"/>
+            <p:cNvPr id="15" name="TextBox 15"/>
+            <p:cNvSpPr txBox="1"/>
             <p:nvPr/>
           </p:nvSpPr>
           <p:spPr>
-            <a:xfrm rot="0">
+            <a:xfrm>
               <a:off x="0" y="1647726"/>
               <a:ext cx="7588028" cy="651298"/>
             </a:xfrm>
@@ -6179,18 +6343,18 @@
             </a:prstGeom>
           </p:spPr>
           <p:txBody>
-            <a:bodyPr anchor="t" rtlCol="false" tIns="0" lIns="0" bIns="0" rIns="0">
+            <a:bodyPr lIns="0" tIns="0" rIns="0" bIns="0" rtlCol="0" anchor="t">
               <a:spAutoFit/>
             </a:bodyPr>
             <a:lstStyle/>
             <a:p>
-              <a:pPr algn="l" marL="0" indent="0" lvl="0">
+              <a:pPr marL="0" lvl="0" indent="0" algn="l">
                 <a:lnSpc>
                   <a:spcPts val="3919"/>
                 </a:lnSpc>
               </a:pPr>
               <a:r>
-                <a:rPr lang="en-US" b="true" sz="2799">
+                <a:rPr lang="en-US" sz="2799" b="1">
                   <a:solidFill>
                     <a:srgbClr val="259D84"/>
                   </a:solidFill>
@@ -6206,12 +6370,12 @@
         </p:sp>
         <p:sp>
           <p:nvSpPr>
-            <p:cNvPr name="TextBox 16" id="16"/>
-            <p:cNvSpPr txBox="true"/>
+            <p:cNvPr id="16" name="TextBox 16"/>
+            <p:cNvSpPr txBox="1"/>
             <p:nvPr/>
           </p:nvSpPr>
           <p:spPr>
-            <a:xfrm rot="0">
+            <a:xfrm>
               <a:off x="0" y="2551530"/>
               <a:ext cx="7588028" cy="5581649"/>
             </a:xfrm>
@@ -6220,12 +6384,12 @@
             </a:prstGeom>
           </p:spPr>
           <p:txBody>
-            <a:bodyPr anchor="t" rtlCol="false" tIns="0" lIns="0" bIns="0" rIns="0">
+            <a:bodyPr lIns="0" tIns="0" rIns="0" bIns="0" rtlCol="0" anchor="t">
               <a:spAutoFit/>
             </a:bodyPr>
             <a:lstStyle/>
             <a:p>
-              <a:pPr algn="l" marL="0" indent="0" lvl="0">
+              <a:pPr marL="0" lvl="0" indent="0" algn="l">
                 <a:lnSpc>
                   <a:spcPts val="3018"/>
                 </a:lnSpc>
@@ -6244,7 +6408,7 @@
               </a:r>
             </a:p>
             <a:p>
-              <a:pPr algn="l" marL="0" indent="0" lvl="0">
+              <a:pPr marL="0" lvl="0" indent="0" algn="l">
                 <a:lnSpc>
                   <a:spcPts val="3018"/>
                 </a:lnSpc>
@@ -6263,7 +6427,7 @@
               </a:r>
             </a:p>
             <a:p>
-              <a:pPr algn="l" marL="0" indent="0" lvl="0">
+              <a:pPr marL="0" lvl="0" indent="0" algn="l">
                 <a:lnSpc>
                   <a:spcPts val="3018"/>
                 </a:lnSpc>
@@ -6293,7 +6457,7 @@
 </file>
 
 <file path=ppt/slides/slide3.xml><?xml version="1.0" encoding="utf-8"?>
-<p:sld xmlns:p="http://schemas.openxmlformats.org/presentationml/2006/main" xmlns:a="http://schemas.openxmlformats.org/drawingml/2006/main" xmlns:r="http://schemas.openxmlformats.org/officeDocument/2006/relationships">
+<p:sld xmlns:a="http://schemas.openxmlformats.org/drawingml/2006/main" xmlns:r="http://schemas.openxmlformats.org/officeDocument/2006/relationships" xmlns:p="http://schemas.openxmlformats.org/presentationml/2006/main">
   <p:cSld>
     <p:spTree>
       <p:nvGrpSpPr>
@@ -6311,12 +6475,12 @@
       </p:grpSpPr>
       <p:sp>
         <p:nvSpPr>
-          <p:cNvPr name="Freeform 2" id="2"/>
+          <p:cNvPr id="2" name="Freeform 2"/>
           <p:cNvSpPr/>
           <p:nvPr/>
         </p:nvSpPr>
         <p:spPr>
-          <a:xfrm flipH="false" flipV="false" rot="0">
+          <a:xfrm>
             <a:off x="0" y="0"/>
             <a:ext cx="18288000" cy="10287000"/>
           </a:xfrm>
@@ -6325,9 +6489,9 @@
             <a:gdLst/>
             <a:ahLst/>
             <a:cxnLst/>
-            <a:rect r="r" b="b" t="t" l="l"/>
+            <a:rect l="l" t="t" r="r" b="b"/>
             <a:pathLst>
-              <a:path h="10287000" w="18288000">
+              <a:path w="18288000" h="10287000">
                 <a:moveTo>
                   <a:pt x="0" y="0"/>
                 </a:moveTo>
@@ -6350,14 +6514,14 @@
           <a:blipFill>
             <a:blip r:embed="rId2"/>
             <a:stretch>
-              <a:fillRect l="-11643" t="0" r="-11643" b="0"/>
+              <a:fillRect l="-11643" r="-11643"/>
             </a:stretch>
           </a:blipFill>
         </p:spPr>
       </p:sp>
       <p:grpSp>
         <p:nvGrpSpPr>
-          <p:cNvPr name="Group 3" id="3"/>
+          <p:cNvPr id="3" name="Group 3"/>
           <p:cNvGrpSpPr/>
           <p:nvPr/>
         </p:nvGrpSpPr>
@@ -6371,12 +6535,12 @@
         </p:grpSpPr>
         <p:sp>
           <p:nvSpPr>
-            <p:cNvPr name="Freeform 4" id="4"/>
+            <p:cNvPr id="4" name="Freeform 4"/>
             <p:cNvSpPr/>
             <p:nvPr/>
           </p:nvSpPr>
           <p:spPr>
-            <a:xfrm flipH="false" flipV="false" rot="0">
+            <a:xfrm>
               <a:off x="0" y="0"/>
               <a:ext cx="812800" cy="812800"/>
             </a:xfrm>
@@ -6385,9 +6549,9 @@
               <a:gdLst/>
               <a:ahLst/>
               <a:cxnLst/>
-              <a:rect r="r" b="b" t="t" l="l"/>
+              <a:rect l="l" t="t" r="r" b="b"/>
               <a:pathLst>
-                <a:path h="812800" w="812800">
+                <a:path w="812800" h="812800">
                   <a:moveTo>
                     <a:pt x="406400" y="0"/>
                   </a:moveTo>
@@ -6453,8 +6617,8 @@
         </p:sp>
         <p:sp>
           <p:nvSpPr>
-            <p:cNvPr name="TextBox 5" id="5"/>
-            <p:cNvSpPr txBox="true"/>
+            <p:cNvPr id="5" name="TextBox 5"/>
+            <p:cNvSpPr txBox="1"/>
             <p:nvPr/>
           </p:nvSpPr>
           <p:spPr>
@@ -6467,7 +6631,7 @@
             </a:prstGeom>
           </p:spPr>
           <p:txBody>
-            <a:bodyPr anchor="ctr" rtlCol="false" tIns="50800" lIns="50800" bIns="50800" rIns="50800"/>
+            <a:bodyPr lIns="50800" tIns="50800" rIns="50800" bIns="50800" rtlCol="0" anchor="ctr"/>
             <a:lstStyle/>
             <a:p>
               <a:pPr algn="ctr">
@@ -6475,13 +6639,14 @@
                   <a:spcPts val="2520"/>
                 </a:lnSpc>
               </a:pPr>
+              <a:endParaRPr/>
             </a:p>
           </p:txBody>
         </p:sp>
       </p:grpSp>
       <p:grpSp>
         <p:nvGrpSpPr>
-          <p:cNvPr name="Group 6" id="6"/>
+          <p:cNvPr id="6" name="Group 6"/>
           <p:cNvGrpSpPr/>
           <p:nvPr/>
         </p:nvGrpSpPr>
@@ -6495,12 +6660,12 @@
         </p:grpSpPr>
         <p:sp>
           <p:nvSpPr>
-            <p:cNvPr name="Freeform 7" id="7"/>
+            <p:cNvPr id="7" name="Freeform 7"/>
             <p:cNvSpPr/>
             <p:nvPr/>
           </p:nvSpPr>
           <p:spPr>
-            <a:xfrm flipH="false" flipV="false" rot="0">
+            <a:xfrm>
               <a:off x="0" y="0"/>
               <a:ext cx="513191" cy="651052"/>
             </a:xfrm>
@@ -6509,9 +6674,9 @@
               <a:gdLst/>
               <a:ahLst/>
               <a:cxnLst/>
-              <a:rect r="r" b="b" t="t" l="l"/>
+              <a:rect l="l" t="t" r="r" b="b"/>
               <a:pathLst>
-                <a:path h="651052" w="513191">
+                <a:path w="513191" h="651052">
                   <a:moveTo>
                     <a:pt x="246340" y="0"/>
                   </a:moveTo>
@@ -6571,7 +6736,7 @@
                 </a:path>
               </a:pathLst>
             </a:custGeom>
-            <a:gradFill rotWithShape="true">
+            <a:gradFill rotWithShape="1">
               <a:gsLst>
                 <a:gs pos="0">
                   <a:srgbClr val="30C2B7">
@@ -6600,8 +6765,8 @@
         </p:sp>
         <p:sp>
           <p:nvSpPr>
-            <p:cNvPr name="TextBox 8" id="8"/>
-            <p:cNvSpPr txBox="true"/>
+            <p:cNvPr id="8" name="TextBox 8"/>
+            <p:cNvSpPr txBox="1"/>
             <p:nvPr/>
           </p:nvSpPr>
           <p:spPr>
@@ -6614,7 +6779,7 @@
             </a:prstGeom>
           </p:spPr>
           <p:txBody>
-            <a:bodyPr anchor="ctr" rtlCol="false" tIns="50800" lIns="50800" bIns="50800" rIns="50800"/>
+            <a:bodyPr lIns="50800" tIns="50800" rIns="50800" bIns="50800" rtlCol="0" anchor="ctr"/>
             <a:lstStyle/>
             <a:p>
               <a:pPr algn="ctr">
@@ -6622,34 +6787,35 @@
                   <a:spcPts val="2520"/>
                 </a:lnSpc>
               </a:pPr>
+              <a:endParaRPr/>
             </a:p>
           </p:txBody>
         </p:sp>
       </p:grpSp>
       <p:grpSp>
         <p:nvGrpSpPr>
-          <p:cNvPr name="Group 9" id="9"/>
+          <p:cNvPr id="9" name="Group 9"/>
           <p:cNvGrpSpPr>
-            <a:grpSpLocks noChangeAspect="true"/>
+            <a:grpSpLocks noChangeAspect="1"/>
           </p:cNvGrpSpPr>
           <p:nvPr/>
         </p:nvGrpSpPr>
         <p:grpSpPr>
-          <a:xfrm rot="0">
-            <a:off x="12138751" y="1371980"/>
-            <a:ext cx="3880586" cy="7886320"/>
+          <a:xfrm>
+            <a:off x="11357701" y="344976"/>
+            <a:ext cx="4722376" cy="9597048"/>
             <a:chOff x="0" y="0"/>
             <a:chExt cx="5001260" cy="10163810"/>
           </a:xfrm>
         </p:grpSpPr>
         <p:sp>
           <p:nvSpPr>
-            <p:cNvPr name="Freeform 10" id="10"/>
+            <p:cNvPr id="10" name="Freeform 10"/>
             <p:cNvSpPr/>
             <p:nvPr/>
           </p:nvSpPr>
           <p:spPr>
-            <a:xfrm flipH="false" flipV="false" rot="0">
+            <a:xfrm>
               <a:off x="0" y="0"/>
               <a:ext cx="5000993" cy="10163632"/>
             </a:xfrm>
@@ -6658,9 +6824,9 @@
               <a:gdLst/>
               <a:ahLst/>
               <a:cxnLst/>
-              <a:rect r="r" b="b" t="t" l="l"/>
+              <a:rect l="l" t="t" r="r" b="b"/>
               <a:pathLst>
-                <a:path h="10163632" w="5000993">
+                <a:path w="5000993" h="10163632">
                   <a:moveTo>
                     <a:pt x="0" y="0"/>
                   </a:moveTo>
@@ -6680,19 +6846,19 @@
             <a:blipFill>
               <a:blip r:embed="rId3"/>
               <a:stretch>
-                <a:fillRect l="-45" t="0" r="-45" b="0"/>
+                <a:fillRect l="-45" r="-45"/>
               </a:stretch>
             </a:blipFill>
           </p:spPr>
         </p:sp>
         <p:sp>
           <p:nvSpPr>
-            <p:cNvPr name="Freeform 11" id="11"/>
+            <p:cNvPr id="11" name="Freeform 11"/>
             <p:cNvSpPr/>
             <p:nvPr/>
           </p:nvSpPr>
           <p:spPr>
-            <a:xfrm flipH="false" flipV="false" rot="0">
+            <a:xfrm>
               <a:off x="338760" y="288798"/>
               <a:ext cx="4330776" cy="9398000"/>
             </a:xfrm>
@@ -6701,9 +6867,9 @@
               <a:gdLst/>
               <a:ahLst/>
               <a:cxnLst/>
-              <a:rect r="r" b="b" t="t" l="l"/>
+              <a:rect l="l" t="t" r="r" b="b"/>
               <a:pathLst>
-                <a:path h="9398000" w="4330776">
+                <a:path w="4330776" h="9398000">
                   <a:moveTo>
                     <a:pt x="3894366" y="9398000"/>
                   </a:moveTo>
@@ -6778,7 +6944,7 @@
             <a:blipFill>
               <a:blip r:embed="rId4"/>
               <a:stretch>
-                <a:fillRect l="-9750" t="0" r="-10313" b="0"/>
+                <a:fillRect l="-3859" t="-2813" r="-3865" b="-2807"/>
               </a:stretch>
             </a:blipFill>
           </p:spPr>
@@ -6786,12 +6952,12 @@
       </p:grpSp>
       <p:grpSp>
         <p:nvGrpSpPr>
-          <p:cNvPr name="Group 12" id="12"/>
+          <p:cNvPr id="12" name="Group 12"/>
           <p:cNvGrpSpPr/>
           <p:nvPr/>
         </p:nvGrpSpPr>
         <p:grpSpPr>
-          <a:xfrm rot="0">
+          <a:xfrm>
             <a:off x="2336445" y="1809750"/>
             <a:ext cx="9021255" cy="6267450"/>
             <a:chOff x="0" y="0"/>
@@ -6800,12 +6966,12 @@
         </p:grpSpPr>
         <p:sp>
           <p:nvSpPr>
-            <p:cNvPr name="TextBox 13" id="13"/>
-            <p:cNvSpPr txBox="true"/>
+            <p:cNvPr id="13" name="TextBox 13"/>
+            <p:cNvSpPr txBox="1"/>
             <p:nvPr/>
           </p:nvSpPr>
           <p:spPr>
-            <a:xfrm rot="0">
+            <a:xfrm>
               <a:off x="0" y="0"/>
               <a:ext cx="12028340" cy="1455420"/>
             </a:xfrm>
@@ -6814,18 +6980,18 @@
             </a:prstGeom>
           </p:spPr>
           <p:txBody>
-            <a:bodyPr anchor="t" rtlCol="false" tIns="0" lIns="0" bIns="0" rIns="0">
+            <a:bodyPr lIns="0" tIns="0" rIns="0" bIns="0" rtlCol="0" anchor="t">
               <a:spAutoFit/>
             </a:bodyPr>
             <a:lstStyle/>
             <a:p>
-              <a:pPr algn="l" marL="0" indent="0" lvl="0">
+              <a:pPr marL="0" lvl="0" indent="0" algn="l">
                 <a:lnSpc>
                   <a:spcPts val="7919"/>
                 </a:lnSpc>
               </a:pPr>
               <a:r>
-                <a:rPr lang="en-US" b="true" sz="7199">
+                <a:rPr lang="en-US" sz="7199" b="1">
                   <a:solidFill>
                     <a:srgbClr val="707070"/>
                   </a:solidFill>
@@ -6841,12 +7007,12 @@
         </p:sp>
         <p:sp>
           <p:nvSpPr>
-            <p:cNvPr name="TextBox 14" id="14"/>
-            <p:cNvSpPr txBox="true"/>
+            <p:cNvPr id="14" name="TextBox 14"/>
+            <p:cNvSpPr txBox="1"/>
             <p:nvPr/>
           </p:nvSpPr>
           <p:spPr>
-            <a:xfrm rot="0">
+            <a:xfrm>
               <a:off x="0" y="2116622"/>
               <a:ext cx="10600801" cy="6239977"/>
             </a:xfrm>
@@ -6855,12 +7021,12 @@
             </a:prstGeom>
           </p:spPr>
           <p:txBody>
-            <a:bodyPr anchor="t" rtlCol="false" tIns="0" lIns="0" bIns="0" rIns="0">
+            <a:bodyPr lIns="0" tIns="0" rIns="0" bIns="0" rtlCol="0" anchor="t">
               <a:spAutoFit/>
             </a:bodyPr>
             <a:lstStyle/>
             <a:p>
-              <a:pPr algn="just" marL="0" indent="0" lvl="0">
+              <a:pPr marL="0" lvl="0" indent="0" algn="just">
                 <a:lnSpc>
                   <a:spcPts val="3104"/>
                 </a:lnSpc>
@@ -6879,7 +7045,7 @@
               </a:r>
             </a:p>
             <a:p>
-              <a:pPr algn="just" marL="0" indent="0" lvl="0">
+              <a:pPr marL="0" lvl="0" indent="0" algn="just">
                 <a:lnSpc>
                   <a:spcPts val="3104"/>
                 </a:lnSpc>
@@ -6898,7 +7064,7 @@
               </a:r>
             </a:p>
             <a:p>
-              <a:pPr algn="just" marL="0" indent="0" lvl="0">
+              <a:pPr marL="0" lvl="0" indent="0" algn="just">
                 <a:lnSpc>
                   <a:spcPts val="3104"/>
                 </a:lnSpc>
@@ -6928,7 +7094,7 @@
 </file>
 
 <file path=ppt/slides/slide4.xml><?xml version="1.0" encoding="utf-8"?>
-<p:sld xmlns:p="http://schemas.openxmlformats.org/presentationml/2006/main" xmlns:a="http://schemas.openxmlformats.org/drawingml/2006/main" xmlns:r="http://schemas.openxmlformats.org/officeDocument/2006/relationships">
+<p:sld xmlns:a="http://schemas.openxmlformats.org/drawingml/2006/main" xmlns:r="http://schemas.openxmlformats.org/officeDocument/2006/relationships" xmlns:p="http://schemas.openxmlformats.org/presentationml/2006/main">
   <p:cSld>
     <p:spTree>
       <p:nvGrpSpPr>
@@ -6946,12 +7112,12 @@
       </p:grpSpPr>
       <p:sp>
         <p:nvSpPr>
-          <p:cNvPr name="Freeform 2" id="2"/>
+          <p:cNvPr id="2" name="Freeform 2"/>
           <p:cNvSpPr/>
           <p:nvPr/>
         </p:nvSpPr>
         <p:spPr>
-          <a:xfrm flipH="false" flipV="false" rot="0">
+          <a:xfrm>
             <a:off x="0" y="0"/>
             <a:ext cx="18288000" cy="10287000"/>
           </a:xfrm>
@@ -6960,9 +7126,9 @@
             <a:gdLst/>
             <a:ahLst/>
             <a:cxnLst/>
-            <a:rect r="r" b="b" t="t" l="l"/>
+            <a:rect l="l" t="t" r="r" b="b"/>
             <a:pathLst>
-              <a:path h="10287000" w="18288000">
+              <a:path w="18288000" h="10287000">
                 <a:moveTo>
                   <a:pt x="0" y="0"/>
                 </a:moveTo>
@@ -6985,14 +7151,14 @@
           <a:blipFill>
             <a:blip r:embed="rId2"/>
             <a:stretch>
-              <a:fillRect l="-11643" t="0" r="-11643" b="0"/>
+              <a:fillRect l="-11643" r="-11643"/>
             </a:stretch>
           </a:blipFill>
         </p:spPr>
       </p:sp>
       <p:grpSp>
         <p:nvGrpSpPr>
-          <p:cNvPr name="Group 3" id="3"/>
+          <p:cNvPr id="3" name="Group 3"/>
           <p:cNvGrpSpPr/>
           <p:nvPr/>
         </p:nvGrpSpPr>
@@ -7006,12 +7172,12 @@
         </p:grpSpPr>
         <p:sp>
           <p:nvSpPr>
-            <p:cNvPr name="Freeform 4" id="4"/>
+            <p:cNvPr id="4" name="Freeform 4"/>
             <p:cNvSpPr/>
             <p:nvPr/>
           </p:nvSpPr>
           <p:spPr>
-            <a:xfrm flipH="false" flipV="false" rot="0">
+            <a:xfrm>
               <a:off x="0" y="0"/>
               <a:ext cx="513191" cy="651052"/>
             </a:xfrm>
@@ -7020,9 +7186,9 @@
               <a:gdLst/>
               <a:ahLst/>
               <a:cxnLst/>
-              <a:rect r="r" b="b" t="t" l="l"/>
+              <a:rect l="l" t="t" r="r" b="b"/>
               <a:pathLst>
-                <a:path h="651052" w="513191">
+                <a:path w="513191" h="651052">
                   <a:moveTo>
                     <a:pt x="246340" y="0"/>
                   </a:moveTo>
@@ -7082,7 +7248,7 @@
                 </a:path>
               </a:pathLst>
             </a:custGeom>
-            <a:gradFill rotWithShape="true">
+            <a:gradFill rotWithShape="1">
               <a:gsLst>
                 <a:gs pos="0">
                   <a:srgbClr val="30C2B7">
@@ -7111,8 +7277,8 @@
         </p:sp>
         <p:sp>
           <p:nvSpPr>
-            <p:cNvPr name="TextBox 5" id="5"/>
-            <p:cNvSpPr txBox="true"/>
+            <p:cNvPr id="5" name="TextBox 5"/>
+            <p:cNvSpPr txBox="1"/>
             <p:nvPr/>
           </p:nvSpPr>
           <p:spPr>
@@ -7125,7 +7291,7 @@
             </a:prstGeom>
           </p:spPr>
           <p:txBody>
-            <a:bodyPr anchor="ctr" rtlCol="false" tIns="50800" lIns="50800" bIns="50800" rIns="50800"/>
+            <a:bodyPr lIns="50800" tIns="50800" rIns="50800" bIns="50800" rtlCol="0" anchor="ctr"/>
             <a:lstStyle/>
             <a:p>
               <a:pPr algn="ctr">
@@ -7133,18 +7299,19 @@
                   <a:spcPts val="2520"/>
                 </a:lnSpc>
               </a:pPr>
+              <a:endParaRPr/>
             </a:p>
           </p:txBody>
         </p:sp>
       </p:grpSp>
       <p:sp>
         <p:nvSpPr>
-          <p:cNvPr name="Freeform 6" id="6"/>
+          <p:cNvPr id="6" name="Freeform 6"/>
           <p:cNvSpPr/>
           <p:nvPr/>
         </p:nvSpPr>
         <p:spPr>
-          <a:xfrm flipH="false" flipV="false" rot="0">
+          <a:xfrm>
             <a:off x="9707411" y="5251764"/>
             <a:ext cx="383903" cy="383903"/>
           </a:xfrm>
@@ -7153,9 +7320,9 @@
             <a:gdLst/>
             <a:ahLst/>
             <a:cxnLst/>
-            <a:rect r="r" b="b" t="t" l="l"/>
+            <a:rect l="l" t="t" r="r" b="b"/>
             <a:pathLst>
-              <a:path h="383903" w="383903">
+              <a:path w="383903" h="383903">
                 <a:moveTo>
                   <a:pt x="0" y="0"/>
                 </a:moveTo>
@@ -7184,19 +7351,19 @@
               </a:extLst>
             </a:blip>
             <a:stretch>
-              <a:fillRect l="0" t="0" r="0" b="0"/>
+              <a:fillRect/>
             </a:stretch>
           </a:blipFill>
         </p:spPr>
       </p:sp>
       <p:sp>
         <p:nvSpPr>
-          <p:cNvPr name="Freeform 7" id="7"/>
+          <p:cNvPr id="7" name="Freeform 7"/>
           <p:cNvSpPr/>
           <p:nvPr/>
         </p:nvSpPr>
         <p:spPr>
-          <a:xfrm flipH="false" flipV="false" rot="0">
+          <a:xfrm>
             <a:off x="9707411" y="5988092"/>
             <a:ext cx="383903" cy="383903"/>
           </a:xfrm>
@@ -7205,9 +7372,9 @@
             <a:gdLst/>
             <a:ahLst/>
             <a:cxnLst/>
-            <a:rect r="r" b="b" t="t" l="l"/>
+            <a:rect l="l" t="t" r="r" b="b"/>
             <a:pathLst>
-              <a:path h="383903" w="383903">
+              <a:path w="383903" h="383903">
                 <a:moveTo>
                   <a:pt x="0" y="0"/>
                 </a:moveTo>
@@ -7236,19 +7403,19 @@
               </a:extLst>
             </a:blip>
             <a:stretch>
-              <a:fillRect l="0" t="0" r="0" b="0"/>
+              <a:fillRect/>
             </a:stretch>
           </a:blipFill>
         </p:spPr>
       </p:sp>
       <p:sp>
         <p:nvSpPr>
-          <p:cNvPr name="Freeform 8" id="8"/>
+          <p:cNvPr id="8" name="Freeform 8"/>
           <p:cNvSpPr/>
           <p:nvPr/>
         </p:nvSpPr>
         <p:spPr>
-          <a:xfrm flipH="false" flipV="false" rot="0">
+          <a:xfrm>
             <a:off x="9707411" y="6825606"/>
             <a:ext cx="383903" cy="383903"/>
           </a:xfrm>
@@ -7257,9 +7424,9 @@
             <a:gdLst/>
             <a:ahLst/>
             <a:cxnLst/>
-            <a:rect r="r" b="b" t="t" l="l"/>
+            <a:rect l="l" t="t" r="r" b="b"/>
             <a:pathLst>
-              <a:path h="383903" w="383903">
+              <a:path w="383903" h="383903">
                 <a:moveTo>
                   <a:pt x="0" y="0"/>
                 </a:moveTo>
@@ -7288,19 +7455,19 @@
               </a:extLst>
             </a:blip>
             <a:stretch>
-              <a:fillRect l="0" t="0" r="0" b="0"/>
+              <a:fillRect/>
             </a:stretch>
           </a:blipFill>
         </p:spPr>
       </p:sp>
       <p:sp>
         <p:nvSpPr>
-          <p:cNvPr name="Freeform 9" id="9"/>
+          <p:cNvPr id="9" name="Freeform 9"/>
           <p:cNvSpPr/>
           <p:nvPr/>
         </p:nvSpPr>
         <p:spPr>
-          <a:xfrm flipH="false" flipV="false" rot="0">
+          <a:xfrm>
             <a:off x="9707411" y="7662696"/>
             <a:ext cx="383903" cy="383903"/>
           </a:xfrm>
@@ -7309,9 +7476,9 @@
             <a:gdLst/>
             <a:ahLst/>
             <a:cxnLst/>
-            <a:rect r="r" b="b" t="t" l="l"/>
+            <a:rect l="l" t="t" r="r" b="b"/>
             <a:pathLst>
-              <a:path h="383903" w="383903">
+              <a:path w="383903" h="383903">
                 <a:moveTo>
                   <a:pt x="0" y="0"/>
                 </a:moveTo>
@@ -7340,19 +7507,19 @@
               </a:extLst>
             </a:blip>
             <a:stretch>
-              <a:fillRect l="0" t="0" r="0" b="0"/>
+              <a:fillRect/>
             </a:stretch>
           </a:blipFill>
         </p:spPr>
       </p:sp>
       <p:grpSp>
         <p:nvGrpSpPr>
-          <p:cNvPr name="Group 10" id="10"/>
+          <p:cNvPr id="10" name="Group 10"/>
           <p:cNvGrpSpPr/>
           <p:nvPr/>
         </p:nvGrpSpPr>
         <p:grpSpPr>
-          <a:xfrm rot="0">
+          <a:xfrm>
             <a:off x="1028700" y="2542026"/>
             <a:ext cx="6518810" cy="1827557"/>
             <a:chOff x="0" y="0"/>
@@ -7361,12 +7528,12 @@
         </p:grpSpPr>
         <p:sp>
           <p:nvSpPr>
-            <p:cNvPr name="TextBox 11" id="11"/>
-            <p:cNvSpPr txBox="true"/>
+            <p:cNvPr id="11" name="TextBox 11"/>
+            <p:cNvSpPr txBox="1"/>
             <p:nvPr/>
           </p:nvSpPr>
           <p:spPr>
-            <a:xfrm rot="0">
+            <a:xfrm>
               <a:off x="0" y="1667335"/>
               <a:ext cx="8691747" cy="769408"/>
             </a:xfrm>
@@ -7375,18 +7542,18 @@
             </a:prstGeom>
           </p:spPr>
           <p:txBody>
-            <a:bodyPr anchor="t" rtlCol="false" tIns="0" lIns="0" bIns="0" rIns="0">
+            <a:bodyPr lIns="0" tIns="0" rIns="0" bIns="0" rtlCol="0" anchor="t">
               <a:spAutoFit/>
             </a:bodyPr>
             <a:lstStyle/>
             <a:p>
-              <a:pPr algn="l" marL="0" indent="0" lvl="0">
+              <a:pPr marL="0" lvl="0" indent="0" algn="l">
                 <a:lnSpc>
                   <a:spcPts val="4550"/>
                 </a:lnSpc>
               </a:pPr>
               <a:r>
-                <a:rPr lang="en-US" b="true" sz="3500" spc="105">
+                <a:rPr lang="en-US" sz="3500" b="1" spc="105">
                   <a:solidFill>
                     <a:srgbClr val="000000"/>
                   </a:solidFill>
@@ -7402,12 +7569,12 @@
         </p:sp>
         <p:sp>
           <p:nvSpPr>
-            <p:cNvPr name="TextBox 12" id="12"/>
-            <p:cNvSpPr txBox="true"/>
+            <p:cNvPr id="12" name="TextBox 12"/>
+            <p:cNvSpPr txBox="1"/>
             <p:nvPr/>
           </p:nvSpPr>
           <p:spPr>
-            <a:xfrm rot="0">
+            <a:xfrm>
               <a:off x="0" y="-142875"/>
               <a:ext cx="8691747" cy="1689735"/>
             </a:xfrm>
@@ -7416,18 +7583,18 @@
             </a:prstGeom>
           </p:spPr>
           <p:txBody>
-            <a:bodyPr anchor="t" rtlCol="false" tIns="0" lIns="0" bIns="0" rIns="0">
+            <a:bodyPr lIns="0" tIns="0" rIns="0" bIns="0" rtlCol="0" anchor="t">
               <a:spAutoFit/>
             </a:bodyPr>
             <a:lstStyle/>
             <a:p>
-              <a:pPr algn="l" marL="0" indent="0" lvl="0">
+              <a:pPr marL="0" lvl="0" indent="0" algn="l">
                 <a:lnSpc>
                   <a:spcPts val="9945"/>
                 </a:lnSpc>
               </a:pPr>
               <a:r>
-                <a:rPr lang="en-US" b="true" sz="7650">
+                <a:rPr lang="en-US" sz="7650" b="1">
                   <a:solidFill>
                     <a:srgbClr val="707070"/>
                   </a:solidFill>
@@ -7444,12 +7611,12 @@
       </p:grpSp>
       <p:sp>
         <p:nvSpPr>
-          <p:cNvPr name="TextBox 13" id="13"/>
-          <p:cNvSpPr txBox="true"/>
+          <p:cNvPr id="13" name="TextBox 13"/>
+          <p:cNvSpPr txBox="1"/>
           <p:nvPr/>
         </p:nvSpPr>
         <p:spPr>
-          <a:xfrm rot="0">
+          <a:xfrm>
             <a:off x="1558540" y="5213664"/>
             <a:ext cx="6909498" cy="928697"/>
           </a:xfrm>
@@ -7458,12 +7625,12 @@
           </a:prstGeom>
         </p:spPr>
         <p:txBody>
-          <a:bodyPr anchor="t" rtlCol="false" tIns="0" lIns="0" bIns="0" rIns="0">
+          <a:bodyPr lIns="0" tIns="0" rIns="0" bIns="0" rtlCol="0" anchor="t">
             <a:spAutoFit/>
           </a:bodyPr>
           <a:lstStyle/>
           <a:p>
-            <a:pPr algn="just" marL="0" indent="0" lvl="0">
+            <a:pPr marL="0" lvl="0" indent="0" algn="just">
               <a:lnSpc>
                 <a:spcPts val="2436"/>
               </a:lnSpc>
@@ -7472,7 +7639,7 @@
               </a:spcBef>
             </a:pPr>
             <a:r>
-              <a:rPr lang="en-US" b="true" sz="1874" spc="56">
+              <a:rPr lang="en-US" sz="1874" b="1" spc="56">
                 <a:solidFill>
                   <a:srgbClr val="000000"/>
                 </a:solidFill>
@@ -7488,12 +7655,12 @@
       </p:sp>
       <p:sp>
         <p:nvSpPr>
-          <p:cNvPr name="TextBox 14" id="14"/>
-          <p:cNvSpPr txBox="true"/>
+          <p:cNvPr id="14" name="TextBox 14"/>
+          <p:cNvSpPr txBox="1"/>
           <p:nvPr/>
         </p:nvSpPr>
         <p:spPr>
-          <a:xfrm rot="0">
+          <a:xfrm>
             <a:off x="10486570" y="5264878"/>
             <a:ext cx="6042226" cy="319151"/>
           </a:xfrm>
@@ -7502,12 +7669,12 @@
           </a:prstGeom>
         </p:spPr>
         <p:txBody>
-          <a:bodyPr anchor="t" rtlCol="false" tIns="0" lIns="0" bIns="0" rIns="0">
+          <a:bodyPr lIns="0" tIns="0" rIns="0" bIns="0" rtlCol="0" anchor="t">
             <a:spAutoFit/>
           </a:bodyPr>
           <a:lstStyle/>
           <a:p>
-            <a:pPr algn="just" marL="0" indent="0" lvl="0">
+            <a:pPr marL="0" lvl="0" indent="0" algn="just">
               <a:lnSpc>
                 <a:spcPts val="2430"/>
               </a:lnSpc>
@@ -7516,7 +7683,7 @@
               </a:spcBef>
             </a:pPr>
             <a:r>
-              <a:rPr lang="en-US" b="true" sz="1869" spc="56">
+              <a:rPr lang="en-US" sz="1869" b="1" spc="56">
                 <a:solidFill>
                   <a:srgbClr val="000000"/>
                 </a:solidFill>
@@ -7532,12 +7699,12 @@
       </p:sp>
       <p:sp>
         <p:nvSpPr>
-          <p:cNvPr name="TextBox 15" id="15"/>
-          <p:cNvSpPr txBox="true"/>
+          <p:cNvPr id="15" name="TextBox 15"/>
+          <p:cNvSpPr txBox="1"/>
           <p:nvPr/>
         </p:nvSpPr>
         <p:spPr>
-          <a:xfrm rot="0">
+          <a:xfrm>
             <a:off x="10486570" y="6001206"/>
             <a:ext cx="6042226" cy="319151"/>
           </a:xfrm>
@@ -7546,12 +7713,12 @@
           </a:prstGeom>
         </p:spPr>
         <p:txBody>
-          <a:bodyPr anchor="t" rtlCol="false" tIns="0" lIns="0" bIns="0" rIns="0">
+          <a:bodyPr lIns="0" tIns="0" rIns="0" bIns="0" rtlCol="0" anchor="t">
             <a:spAutoFit/>
           </a:bodyPr>
           <a:lstStyle/>
           <a:p>
-            <a:pPr algn="just" marL="0" indent="0" lvl="0">
+            <a:pPr marL="0" lvl="0" indent="0" algn="just">
               <a:lnSpc>
                 <a:spcPts val="2430"/>
               </a:lnSpc>
@@ -7560,7 +7727,7 @@
               </a:spcBef>
             </a:pPr>
             <a:r>
-              <a:rPr lang="en-US" b="true" sz="1869" spc="56">
+              <a:rPr lang="en-US" sz="1869" b="1" spc="56">
                 <a:solidFill>
                   <a:srgbClr val="000000"/>
                 </a:solidFill>
@@ -7576,12 +7743,12 @@
       </p:sp>
       <p:sp>
         <p:nvSpPr>
-          <p:cNvPr name="TextBox 16" id="16"/>
-          <p:cNvSpPr txBox="true"/>
+          <p:cNvPr id="16" name="TextBox 16"/>
+          <p:cNvSpPr txBox="1"/>
           <p:nvPr/>
         </p:nvSpPr>
         <p:spPr>
-          <a:xfrm rot="0">
+          <a:xfrm>
             <a:off x="10486570" y="6686320"/>
             <a:ext cx="6042226" cy="623951"/>
           </a:xfrm>
@@ -7590,12 +7757,12 @@
           </a:prstGeom>
         </p:spPr>
         <p:txBody>
-          <a:bodyPr anchor="t" rtlCol="false" tIns="0" lIns="0" bIns="0" rIns="0">
+          <a:bodyPr lIns="0" tIns="0" rIns="0" bIns="0" rtlCol="0" anchor="t">
             <a:spAutoFit/>
           </a:bodyPr>
           <a:lstStyle/>
           <a:p>
-            <a:pPr algn="just" marL="0" indent="0" lvl="0">
+            <a:pPr marL="0" lvl="0" indent="0" algn="just">
               <a:lnSpc>
                 <a:spcPts val="2430"/>
               </a:lnSpc>
@@ -7604,7 +7771,7 @@
               </a:spcBef>
             </a:pPr>
             <a:r>
-              <a:rPr lang="en-US" b="true" sz="1869" spc="56">
+              <a:rPr lang="en-US" sz="1869" b="1" spc="56">
                 <a:solidFill>
                   <a:srgbClr val="000000"/>
                 </a:solidFill>
@@ -7620,12 +7787,12 @@
       </p:sp>
       <p:sp>
         <p:nvSpPr>
-          <p:cNvPr name="TextBox 17" id="17"/>
-          <p:cNvSpPr txBox="true"/>
+          <p:cNvPr id="17" name="TextBox 17"/>
+          <p:cNvSpPr txBox="1"/>
           <p:nvPr/>
         </p:nvSpPr>
         <p:spPr>
-          <a:xfrm rot="0">
+          <a:xfrm>
             <a:off x="10486570" y="7675810"/>
             <a:ext cx="6042226" cy="319151"/>
           </a:xfrm>
@@ -7634,12 +7801,12 @@
           </a:prstGeom>
         </p:spPr>
         <p:txBody>
-          <a:bodyPr anchor="t" rtlCol="false" tIns="0" lIns="0" bIns="0" rIns="0">
+          <a:bodyPr lIns="0" tIns="0" rIns="0" bIns="0" rtlCol="0" anchor="t">
             <a:spAutoFit/>
           </a:bodyPr>
           <a:lstStyle/>
           <a:p>
-            <a:pPr algn="just" marL="0" indent="0" lvl="0">
+            <a:pPr marL="0" lvl="0" indent="0" algn="just">
               <a:lnSpc>
                 <a:spcPts val="2430"/>
               </a:lnSpc>
@@ -7648,7 +7815,7 @@
               </a:spcBef>
             </a:pPr>
             <a:r>
-              <a:rPr lang="en-US" b="true" sz="1869" spc="56">
+              <a:rPr lang="en-US" sz="1869" b="1" spc="56">
                 <a:solidFill>
                   <a:srgbClr val="000000"/>
                 </a:solidFill>
@@ -7664,12 +7831,12 @@
       </p:sp>
       <p:sp>
         <p:nvSpPr>
-          <p:cNvPr name="TextBox 18" id="18"/>
-          <p:cNvSpPr txBox="true"/>
+          <p:cNvPr id="18" name="TextBox 18"/>
+          <p:cNvSpPr txBox="1"/>
           <p:nvPr/>
         </p:nvSpPr>
         <p:spPr>
-          <a:xfrm rot="0">
+          <a:xfrm>
             <a:off x="1028700" y="4588189"/>
             <a:ext cx="5521723" cy="391795"/>
           </a:xfrm>
@@ -7678,7 +7845,7 @@
           </a:prstGeom>
         </p:spPr>
         <p:txBody>
-          <a:bodyPr anchor="t" rtlCol="false" tIns="0" lIns="0" bIns="0" rIns="0">
+          <a:bodyPr lIns="0" tIns="0" rIns="0" bIns="0" rtlCol="0" anchor="t">
             <a:spAutoFit/>
           </a:bodyPr>
           <a:lstStyle/>
@@ -7692,7 +7859,7 @@
               </a:spcBef>
             </a:pPr>
             <a:r>
-              <a:rPr lang="en-US" b="true" sz="2199" spc="65">
+              <a:rPr lang="en-US" sz="2199" b="1" spc="65">
                 <a:solidFill>
                   <a:srgbClr val="000000"/>
                 </a:solidFill>
@@ -7708,12 +7875,12 @@
       </p:sp>
       <p:sp>
         <p:nvSpPr>
-          <p:cNvPr name="TextBox 19" id="19"/>
-          <p:cNvSpPr txBox="true"/>
+          <p:cNvPr id="19" name="TextBox 19"/>
+          <p:cNvSpPr txBox="1"/>
           <p:nvPr/>
         </p:nvSpPr>
         <p:spPr>
-          <a:xfrm rot="0">
+          <a:xfrm>
             <a:off x="9444236" y="4588189"/>
             <a:ext cx="7084560" cy="391795"/>
           </a:xfrm>
@@ -7722,7 +7889,7 @@
           </a:prstGeom>
         </p:spPr>
         <p:txBody>
-          <a:bodyPr anchor="t" rtlCol="false" tIns="0" lIns="0" bIns="0" rIns="0">
+          <a:bodyPr lIns="0" tIns="0" rIns="0" bIns="0" rtlCol="0" anchor="t">
             <a:spAutoFit/>
           </a:bodyPr>
           <a:lstStyle/>
@@ -7736,7 +7903,7 @@
               </a:spcBef>
             </a:pPr>
             <a:r>
-              <a:rPr lang="en-US" b="true" sz="2199" spc="65">
+              <a:rPr lang="en-US" sz="2199" b="1" spc="65">
                 <a:solidFill>
                   <a:srgbClr val="000000"/>
                 </a:solidFill>
@@ -7752,12 +7919,12 @@
       </p:sp>
       <p:sp>
         <p:nvSpPr>
-          <p:cNvPr name="Freeform 20" id="20"/>
+          <p:cNvPr id="20" name="Freeform 20"/>
           <p:cNvSpPr/>
           <p:nvPr/>
         </p:nvSpPr>
         <p:spPr>
-          <a:xfrm flipH="false" flipV="false" rot="0">
+          <a:xfrm>
             <a:off x="1028700" y="5223189"/>
             <a:ext cx="383903" cy="383903"/>
           </a:xfrm>
@@ -7766,9 +7933,9 @@
             <a:gdLst/>
             <a:ahLst/>
             <a:cxnLst/>
-            <a:rect r="r" b="b" t="t" l="l"/>
+            <a:rect l="l" t="t" r="r" b="b"/>
             <a:pathLst>
-              <a:path h="383903" w="383903">
+              <a:path w="383903" h="383903">
                 <a:moveTo>
                   <a:pt x="0" y="0"/>
                 </a:moveTo>
@@ -7797,7 +7964,7 @@
               </a:extLst>
             </a:blip>
             <a:stretch>
-              <a:fillRect l="0" t="0" r="0" b="0"/>
+              <a:fillRect/>
             </a:stretch>
           </a:blipFill>
         </p:spPr>
@@ -7811,7 +7978,7 @@
 </file>
 
 <file path=ppt/slides/slide5.xml><?xml version="1.0" encoding="utf-8"?>
-<p:sld xmlns:p="http://schemas.openxmlformats.org/presentationml/2006/main" xmlns:a="http://schemas.openxmlformats.org/drawingml/2006/main" xmlns:r="http://schemas.openxmlformats.org/officeDocument/2006/relationships">
+<p:sld xmlns:a="http://schemas.openxmlformats.org/drawingml/2006/main" xmlns:r="http://schemas.openxmlformats.org/officeDocument/2006/relationships" xmlns:p="http://schemas.openxmlformats.org/presentationml/2006/main">
   <p:cSld>
     <p:spTree>
       <p:nvGrpSpPr>
@@ -7829,12 +7996,12 @@
       </p:grpSpPr>
       <p:sp>
         <p:nvSpPr>
-          <p:cNvPr name="Freeform 2" id="2"/>
+          <p:cNvPr id="2" name="Freeform 2"/>
           <p:cNvSpPr/>
           <p:nvPr/>
         </p:nvSpPr>
         <p:spPr>
-          <a:xfrm flipH="false" flipV="false" rot="0">
+          <a:xfrm>
             <a:off x="0" y="0"/>
             <a:ext cx="18288000" cy="10287000"/>
           </a:xfrm>
@@ -7843,9 +8010,9 @@
             <a:gdLst/>
             <a:ahLst/>
             <a:cxnLst/>
-            <a:rect r="r" b="b" t="t" l="l"/>
+            <a:rect l="l" t="t" r="r" b="b"/>
             <a:pathLst>
-              <a:path h="10287000" w="18288000">
+              <a:path w="18288000" h="10287000">
                 <a:moveTo>
                   <a:pt x="0" y="0"/>
                 </a:moveTo>
@@ -7868,14 +8035,14 @@
           <a:blipFill>
             <a:blip r:embed="rId2"/>
             <a:stretch>
-              <a:fillRect l="-11643" t="0" r="-11643" b="0"/>
+              <a:fillRect l="-11643" r="-11643"/>
             </a:stretch>
           </a:blipFill>
         </p:spPr>
       </p:sp>
       <p:grpSp>
         <p:nvGrpSpPr>
-          <p:cNvPr name="Group 3" id="3"/>
+          <p:cNvPr id="3" name="Group 3"/>
           <p:cNvGrpSpPr/>
           <p:nvPr/>
         </p:nvGrpSpPr>
@@ -7889,12 +8056,12 @@
         </p:grpSpPr>
         <p:sp>
           <p:nvSpPr>
-            <p:cNvPr name="Freeform 4" id="4"/>
+            <p:cNvPr id="4" name="Freeform 4"/>
             <p:cNvSpPr/>
             <p:nvPr/>
           </p:nvSpPr>
           <p:spPr>
-            <a:xfrm flipH="false" flipV="false" rot="0">
+            <a:xfrm>
               <a:off x="0" y="0"/>
               <a:ext cx="513191" cy="651052"/>
             </a:xfrm>
@@ -7903,9 +8070,9 @@
               <a:gdLst/>
               <a:ahLst/>
               <a:cxnLst/>
-              <a:rect r="r" b="b" t="t" l="l"/>
+              <a:rect l="l" t="t" r="r" b="b"/>
               <a:pathLst>
-                <a:path h="651052" w="513191">
+                <a:path w="513191" h="651052">
                   <a:moveTo>
                     <a:pt x="246340" y="0"/>
                   </a:moveTo>
@@ -7965,7 +8132,7 @@
                 </a:path>
               </a:pathLst>
             </a:custGeom>
-            <a:gradFill rotWithShape="true">
+            <a:gradFill rotWithShape="1">
               <a:gsLst>
                 <a:gs pos="0">
                   <a:srgbClr val="30C2B7">
@@ -7994,8 +8161,8 @@
         </p:sp>
         <p:sp>
           <p:nvSpPr>
-            <p:cNvPr name="TextBox 5" id="5"/>
-            <p:cNvSpPr txBox="true"/>
+            <p:cNvPr id="5" name="TextBox 5"/>
+            <p:cNvSpPr txBox="1"/>
             <p:nvPr/>
           </p:nvSpPr>
           <p:spPr>
@@ -8008,7 +8175,7 @@
             </a:prstGeom>
           </p:spPr>
           <p:txBody>
-            <a:bodyPr anchor="ctr" rtlCol="false" tIns="50800" lIns="50800" bIns="50800" rIns="50800"/>
+            <a:bodyPr lIns="50800" tIns="50800" rIns="50800" bIns="50800" rtlCol="0" anchor="ctr"/>
             <a:lstStyle/>
             <a:p>
               <a:pPr algn="ctr">
@@ -8016,18 +8183,19 @@
                   <a:spcPts val="2520"/>
                 </a:lnSpc>
               </a:pPr>
+              <a:endParaRPr/>
             </a:p>
           </p:txBody>
         </p:sp>
       </p:grpSp>
       <p:grpSp>
         <p:nvGrpSpPr>
-          <p:cNvPr name="Group 6" id="6"/>
+          <p:cNvPr id="6" name="Group 6"/>
           <p:cNvGrpSpPr/>
           <p:nvPr/>
         </p:nvGrpSpPr>
         <p:grpSpPr>
-          <a:xfrm rot="0">
+          <a:xfrm>
             <a:off x="11277755" y="2360582"/>
             <a:ext cx="5981545" cy="1827557"/>
             <a:chOff x="0" y="0"/>
@@ -8036,12 +8204,12 @@
         </p:grpSpPr>
         <p:sp>
           <p:nvSpPr>
-            <p:cNvPr name="TextBox 7" id="7"/>
-            <p:cNvSpPr txBox="true"/>
+            <p:cNvPr id="7" name="TextBox 7"/>
+            <p:cNvSpPr txBox="1"/>
             <p:nvPr/>
           </p:nvSpPr>
           <p:spPr>
-            <a:xfrm rot="0">
+            <a:xfrm>
               <a:off x="0" y="1667335"/>
               <a:ext cx="7975394" cy="769408"/>
             </a:xfrm>
@@ -8050,18 +8218,18 @@
             </a:prstGeom>
           </p:spPr>
           <p:txBody>
-            <a:bodyPr anchor="t" rtlCol="false" tIns="0" lIns="0" bIns="0" rIns="0">
+            <a:bodyPr lIns="0" tIns="0" rIns="0" bIns="0" rtlCol="0" anchor="t">
               <a:spAutoFit/>
             </a:bodyPr>
             <a:lstStyle/>
             <a:p>
-              <a:pPr algn="r" marL="0" indent="0" lvl="0">
+              <a:pPr marL="0" lvl="0" indent="0" algn="r">
                 <a:lnSpc>
                   <a:spcPts val="4550"/>
                 </a:lnSpc>
               </a:pPr>
               <a:r>
-                <a:rPr lang="en-US" b="true" sz="3500" spc="105">
+                <a:rPr lang="en-US" sz="3500" b="1" spc="105">
                   <a:solidFill>
                     <a:srgbClr val="000000"/>
                   </a:solidFill>
@@ -8077,12 +8245,12 @@
         </p:sp>
         <p:sp>
           <p:nvSpPr>
-            <p:cNvPr name="TextBox 8" id="8"/>
-            <p:cNvSpPr txBox="true"/>
+            <p:cNvPr id="8" name="TextBox 8"/>
+            <p:cNvSpPr txBox="1"/>
             <p:nvPr/>
           </p:nvSpPr>
           <p:spPr>
-            <a:xfrm rot="0">
+            <a:xfrm>
               <a:off x="0" y="-142875"/>
               <a:ext cx="7975394" cy="1689735"/>
             </a:xfrm>
@@ -8091,18 +8259,18 @@
             </a:prstGeom>
           </p:spPr>
           <p:txBody>
-            <a:bodyPr anchor="t" rtlCol="false" tIns="0" lIns="0" bIns="0" rIns="0">
+            <a:bodyPr lIns="0" tIns="0" rIns="0" bIns="0" rtlCol="0" anchor="t">
               <a:spAutoFit/>
             </a:bodyPr>
             <a:lstStyle/>
             <a:p>
-              <a:pPr algn="r" marL="0" indent="0" lvl="0">
+              <a:pPr marL="0" lvl="0" indent="0" algn="r">
                 <a:lnSpc>
                   <a:spcPts val="9945"/>
                 </a:lnSpc>
               </a:pPr>
               <a:r>
-                <a:rPr lang="en-US" b="true" sz="7650">
+                <a:rPr lang="en-US" sz="7650" b="1">
                   <a:solidFill>
                     <a:srgbClr val="707070"/>
                   </a:solidFill>
@@ -8119,12 +8287,12 @@
       </p:grpSp>
       <p:sp>
         <p:nvSpPr>
-          <p:cNvPr name="TextBox 9" id="9"/>
-          <p:cNvSpPr txBox="true"/>
+          <p:cNvPr id="9" name="TextBox 9"/>
+          <p:cNvSpPr txBox="1"/>
           <p:nvPr/>
         </p:nvSpPr>
         <p:spPr>
-          <a:xfrm rot="0">
+          <a:xfrm>
             <a:off x="2301359" y="4418917"/>
             <a:ext cx="3421097" cy="301233"/>
           </a:xfrm>
@@ -8133,7 +8301,7 @@
           </a:prstGeom>
         </p:spPr>
         <p:txBody>
-          <a:bodyPr anchor="t" rtlCol="false" tIns="0" lIns="0" bIns="0" rIns="0">
+          <a:bodyPr lIns="0" tIns="0" rIns="0" bIns="0" rtlCol="0" anchor="t">
             <a:spAutoFit/>
           </a:bodyPr>
           <a:lstStyle/>
@@ -8144,7 +8312,7 @@
               </a:lnSpc>
             </a:pPr>
             <a:r>
-              <a:rPr lang="en-US" sz="2310" b="true">
+              <a:rPr lang="en-US" sz="2310" b="1">
                 <a:solidFill>
                   <a:srgbClr val="373737"/>
                 </a:solidFill>
@@ -8160,12 +8328,12 @@
       </p:sp>
       <p:sp>
         <p:nvSpPr>
-          <p:cNvPr name="TextBox 10" id="10"/>
-          <p:cNvSpPr txBox="true"/>
+          <p:cNvPr id="10" name="TextBox 10"/>
+          <p:cNvSpPr txBox="1"/>
           <p:nvPr/>
         </p:nvSpPr>
         <p:spPr>
-          <a:xfrm rot="0">
+          <a:xfrm>
             <a:off x="9144000" y="4418917"/>
             <a:ext cx="4084778" cy="301233"/>
           </a:xfrm>
@@ -8174,7 +8342,7 @@
           </a:prstGeom>
         </p:spPr>
         <p:txBody>
-          <a:bodyPr anchor="t" rtlCol="false" tIns="0" lIns="0" bIns="0" rIns="0">
+          <a:bodyPr lIns="0" tIns="0" rIns="0" bIns="0" rtlCol="0" anchor="t">
             <a:spAutoFit/>
           </a:bodyPr>
           <a:lstStyle/>
@@ -8185,7 +8353,7 @@
               </a:lnSpc>
             </a:pPr>
             <a:r>
-              <a:rPr lang="en-US" sz="2310" b="true">
+              <a:rPr lang="en-US" sz="2310" b="1">
                 <a:solidFill>
                   <a:srgbClr val="373737"/>
                 </a:solidFill>
@@ -8201,12 +8369,12 @@
       </p:sp>
       <p:sp>
         <p:nvSpPr>
-          <p:cNvPr name="TextBox 11" id="11"/>
-          <p:cNvSpPr txBox="true"/>
+          <p:cNvPr id="11" name="TextBox 11"/>
+          <p:cNvSpPr txBox="1"/>
           <p:nvPr/>
         </p:nvSpPr>
         <p:spPr>
-          <a:xfrm rot="0">
+          <a:xfrm>
             <a:off x="2143340" y="4838520"/>
             <a:ext cx="4375537" cy="640207"/>
           </a:xfrm>
@@ -8215,12 +8383,12 @@
           </a:prstGeom>
         </p:spPr>
         <p:txBody>
-          <a:bodyPr anchor="t" rtlCol="false" tIns="0" lIns="0" bIns="0" rIns="0">
+          <a:bodyPr lIns="0" tIns="0" rIns="0" bIns="0" rtlCol="0" anchor="t">
             <a:spAutoFit/>
           </a:bodyPr>
           <a:lstStyle/>
           <a:p>
-            <a:pPr algn="l" marL="0" indent="0" lvl="0">
+            <a:pPr marL="0" lvl="0" indent="0" algn="l">
               <a:lnSpc>
                 <a:spcPts val="2489"/>
               </a:lnSpc>
@@ -8242,12 +8410,12 @@
       </p:sp>
       <p:sp>
         <p:nvSpPr>
-          <p:cNvPr name="TextBox 12" id="12"/>
-          <p:cNvSpPr txBox="true"/>
+          <p:cNvPr id="12" name="TextBox 12"/>
+          <p:cNvSpPr txBox="1"/>
           <p:nvPr/>
         </p:nvSpPr>
         <p:spPr>
-          <a:xfrm rot="0">
+          <a:xfrm>
             <a:off x="2143340" y="5593027"/>
             <a:ext cx="4375537" cy="640207"/>
           </a:xfrm>
@@ -8256,12 +8424,12 @@
           </a:prstGeom>
         </p:spPr>
         <p:txBody>
-          <a:bodyPr anchor="t" rtlCol="false" tIns="0" lIns="0" bIns="0" rIns="0">
+          <a:bodyPr lIns="0" tIns="0" rIns="0" bIns="0" rtlCol="0" anchor="t">
             <a:spAutoFit/>
           </a:bodyPr>
           <a:lstStyle/>
           <a:p>
-            <a:pPr algn="l" marL="0" indent="0" lvl="0">
+            <a:pPr marL="0" lvl="0" indent="0" algn="l">
               <a:lnSpc>
                 <a:spcPts val="2489"/>
               </a:lnSpc>
@@ -8283,12 +8451,12 @@
       </p:sp>
       <p:sp>
         <p:nvSpPr>
-          <p:cNvPr name="TextBox 13" id="13"/>
-          <p:cNvSpPr txBox="true"/>
+          <p:cNvPr id="13" name="TextBox 13"/>
+          <p:cNvSpPr txBox="1"/>
           <p:nvPr/>
         </p:nvSpPr>
         <p:spPr>
-          <a:xfrm rot="0">
+          <a:xfrm>
             <a:off x="2143340" y="6347534"/>
             <a:ext cx="4375537" cy="640207"/>
           </a:xfrm>
@@ -8297,12 +8465,12 @@
           </a:prstGeom>
         </p:spPr>
         <p:txBody>
-          <a:bodyPr anchor="t" rtlCol="false" tIns="0" lIns="0" bIns="0" rIns="0">
+          <a:bodyPr lIns="0" tIns="0" rIns="0" bIns="0" rtlCol="0" anchor="t">
             <a:spAutoFit/>
           </a:bodyPr>
           <a:lstStyle/>
           <a:p>
-            <a:pPr algn="l" marL="0" indent="0" lvl="0">
+            <a:pPr marL="0" lvl="0" indent="0" algn="l">
               <a:lnSpc>
                 <a:spcPts val="2489"/>
               </a:lnSpc>
@@ -8324,12 +8492,12 @@
       </p:sp>
       <p:sp>
         <p:nvSpPr>
-          <p:cNvPr name="TextBox 14" id="14"/>
-          <p:cNvSpPr txBox="true"/>
+          <p:cNvPr id="14" name="TextBox 14"/>
+          <p:cNvSpPr txBox="1"/>
           <p:nvPr/>
         </p:nvSpPr>
         <p:spPr>
-          <a:xfrm rot="0">
+          <a:xfrm>
             <a:off x="2143340" y="7102041"/>
             <a:ext cx="4375537" cy="640207"/>
           </a:xfrm>
@@ -8338,12 +8506,12 @@
           </a:prstGeom>
         </p:spPr>
         <p:txBody>
-          <a:bodyPr anchor="t" rtlCol="false" tIns="0" lIns="0" bIns="0" rIns="0">
+          <a:bodyPr lIns="0" tIns="0" rIns="0" bIns="0" rtlCol="0" anchor="t">
             <a:spAutoFit/>
           </a:bodyPr>
           <a:lstStyle/>
           <a:p>
-            <a:pPr algn="l" marL="0" indent="0" lvl="0">
+            <a:pPr marL="0" lvl="0" indent="0" algn="l">
               <a:lnSpc>
                 <a:spcPts val="2489"/>
               </a:lnSpc>
@@ -8365,12 +8533,12 @@
       </p:sp>
       <p:sp>
         <p:nvSpPr>
-          <p:cNvPr name="TextBox 15" id="15"/>
-          <p:cNvSpPr txBox="true"/>
+          <p:cNvPr id="15" name="TextBox 15"/>
+          <p:cNvSpPr txBox="1"/>
           <p:nvPr/>
         </p:nvSpPr>
         <p:spPr>
-          <a:xfrm rot="0">
+          <a:xfrm>
             <a:off x="9188244" y="4838520"/>
             <a:ext cx="3996291" cy="640207"/>
           </a:xfrm>
@@ -8379,12 +8547,12 @@
           </a:prstGeom>
         </p:spPr>
         <p:txBody>
-          <a:bodyPr anchor="t" rtlCol="false" tIns="0" lIns="0" bIns="0" rIns="0">
+          <a:bodyPr lIns="0" tIns="0" rIns="0" bIns="0" rtlCol="0" anchor="t">
             <a:spAutoFit/>
           </a:bodyPr>
           <a:lstStyle/>
           <a:p>
-            <a:pPr algn="just" marL="0" indent="0" lvl="0">
+            <a:pPr marL="0" lvl="0" indent="0" algn="just">
               <a:lnSpc>
                 <a:spcPts val="2489"/>
               </a:lnSpc>
@@ -8406,12 +8574,12 @@
       </p:sp>
       <p:sp>
         <p:nvSpPr>
-          <p:cNvPr name="TextBox 16" id="16"/>
-          <p:cNvSpPr txBox="true"/>
+          <p:cNvPr id="16" name="TextBox 16"/>
+          <p:cNvSpPr txBox="1"/>
           <p:nvPr/>
         </p:nvSpPr>
         <p:spPr>
-          <a:xfrm rot="0">
+          <a:xfrm>
             <a:off x="9188244" y="5593027"/>
             <a:ext cx="3996291" cy="640207"/>
           </a:xfrm>
@@ -8420,12 +8588,12 @@
           </a:prstGeom>
         </p:spPr>
         <p:txBody>
-          <a:bodyPr anchor="t" rtlCol="false" tIns="0" lIns="0" bIns="0" rIns="0">
+          <a:bodyPr lIns="0" tIns="0" rIns="0" bIns="0" rtlCol="0" anchor="t">
             <a:spAutoFit/>
           </a:bodyPr>
           <a:lstStyle/>
           <a:p>
-            <a:pPr algn="just" marL="0" indent="0" lvl="0">
+            <a:pPr marL="0" lvl="0" indent="0" algn="just">
               <a:lnSpc>
                 <a:spcPts val="2489"/>
               </a:lnSpc>
@@ -8447,12 +8615,12 @@
       </p:sp>
       <p:sp>
         <p:nvSpPr>
-          <p:cNvPr name="TextBox 17" id="17"/>
-          <p:cNvSpPr txBox="true"/>
+          <p:cNvPr id="17" name="TextBox 17"/>
+          <p:cNvSpPr txBox="1"/>
           <p:nvPr/>
         </p:nvSpPr>
         <p:spPr>
-          <a:xfrm rot="0">
+          <a:xfrm>
             <a:off x="9188244" y="6347534"/>
             <a:ext cx="3996291" cy="640207"/>
           </a:xfrm>
@@ -8461,12 +8629,12 @@
           </a:prstGeom>
         </p:spPr>
         <p:txBody>
-          <a:bodyPr anchor="t" rtlCol="false" tIns="0" lIns="0" bIns="0" rIns="0">
+          <a:bodyPr lIns="0" tIns="0" rIns="0" bIns="0" rtlCol="0" anchor="t">
             <a:spAutoFit/>
           </a:bodyPr>
           <a:lstStyle/>
           <a:p>
-            <a:pPr algn="just" marL="0" indent="0" lvl="0">
+            <a:pPr marL="0" lvl="0" indent="0" algn="just">
               <a:lnSpc>
                 <a:spcPts val="2489"/>
               </a:lnSpc>
@@ -8488,12 +8656,12 @@
       </p:sp>
       <p:sp>
         <p:nvSpPr>
-          <p:cNvPr name="TextBox 18" id="18"/>
-          <p:cNvSpPr txBox="true"/>
+          <p:cNvPr id="18" name="TextBox 18"/>
+          <p:cNvSpPr txBox="1"/>
           <p:nvPr/>
         </p:nvSpPr>
         <p:spPr>
-          <a:xfrm rot="0">
+          <a:xfrm>
             <a:off x="9188244" y="7102041"/>
             <a:ext cx="3996291" cy="640207"/>
           </a:xfrm>
@@ -8502,12 +8670,12 @@
           </a:prstGeom>
         </p:spPr>
         <p:txBody>
-          <a:bodyPr anchor="t" rtlCol="false" tIns="0" lIns="0" bIns="0" rIns="0">
+          <a:bodyPr lIns="0" tIns="0" rIns="0" bIns="0" rtlCol="0" anchor="t">
             <a:spAutoFit/>
           </a:bodyPr>
           <a:lstStyle/>
           <a:p>
-            <a:pPr algn="just" marL="0" indent="0" lvl="0">
+            <a:pPr marL="0" lvl="0" indent="0" algn="just">
               <a:lnSpc>
                 <a:spcPts val="2489"/>
               </a:lnSpc>
@@ -8536,7 +8704,7 @@
 </file>
 
 <file path=ppt/slides/slide6.xml><?xml version="1.0" encoding="utf-8"?>
-<p:sld xmlns:p="http://schemas.openxmlformats.org/presentationml/2006/main" xmlns:a="http://schemas.openxmlformats.org/drawingml/2006/main" xmlns:r="http://schemas.openxmlformats.org/officeDocument/2006/relationships">
+<p:sld xmlns:a="http://schemas.openxmlformats.org/drawingml/2006/main" xmlns:r="http://schemas.openxmlformats.org/officeDocument/2006/relationships" xmlns:p="http://schemas.openxmlformats.org/presentationml/2006/main">
   <p:cSld>
     <p:spTree>
       <p:nvGrpSpPr>
@@ -8554,12 +8722,12 @@
       </p:grpSpPr>
       <p:sp>
         <p:nvSpPr>
-          <p:cNvPr name="Freeform 2" id="2"/>
+          <p:cNvPr id="2" name="Freeform 2"/>
           <p:cNvSpPr/>
           <p:nvPr/>
         </p:nvSpPr>
         <p:spPr>
-          <a:xfrm flipH="false" flipV="false" rot="0">
+          <a:xfrm>
             <a:off x="0" y="0"/>
             <a:ext cx="18288000" cy="10287000"/>
           </a:xfrm>
@@ -8568,9 +8736,9 @@
             <a:gdLst/>
             <a:ahLst/>
             <a:cxnLst/>
-            <a:rect r="r" b="b" t="t" l="l"/>
+            <a:rect l="l" t="t" r="r" b="b"/>
             <a:pathLst>
-              <a:path h="10287000" w="18288000">
+              <a:path w="18288000" h="10287000">
                 <a:moveTo>
                   <a:pt x="0" y="0"/>
                 </a:moveTo>
@@ -8593,14 +8761,14 @@
           <a:blipFill>
             <a:blip r:embed="rId2"/>
             <a:stretch>
-              <a:fillRect l="-11643" t="0" r="-11643" b="0"/>
+              <a:fillRect l="-11643" r="-11643"/>
             </a:stretch>
           </a:blipFill>
         </p:spPr>
       </p:sp>
       <p:grpSp>
         <p:nvGrpSpPr>
-          <p:cNvPr name="Group 3" id="3"/>
+          <p:cNvPr id="3" name="Group 3"/>
           <p:cNvGrpSpPr/>
           <p:nvPr/>
         </p:nvGrpSpPr>
@@ -8614,12 +8782,12 @@
         </p:grpSpPr>
         <p:sp>
           <p:nvSpPr>
-            <p:cNvPr name="Freeform 4" id="4"/>
+            <p:cNvPr id="4" name="Freeform 4"/>
             <p:cNvSpPr/>
             <p:nvPr/>
           </p:nvSpPr>
           <p:spPr>
-            <a:xfrm flipH="false" flipV="false" rot="0">
+            <a:xfrm>
               <a:off x="0" y="0"/>
               <a:ext cx="812800" cy="812800"/>
             </a:xfrm>
@@ -8628,9 +8796,9 @@
               <a:gdLst/>
               <a:ahLst/>
               <a:cxnLst/>
-              <a:rect r="r" b="b" t="t" l="l"/>
+              <a:rect l="l" t="t" r="r" b="b"/>
               <a:pathLst>
-                <a:path h="812800" w="812800">
+                <a:path w="812800" h="812800">
                   <a:moveTo>
                     <a:pt x="406400" y="0"/>
                   </a:moveTo>
@@ -8696,8 +8864,8 @@
         </p:sp>
         <p:sp>
           <p:nvSpPr>
-            <p:cNvPr name="TextBox 5" id="5"/>
-            <p:cNvSpPr txBox="true"/>
+            <p:cNvPr id="5" name="TextBox 5"/>
+            <p:cNvSpPr txBox="1"/>
             <p:nvPr/>
           </p:nvSpPr>
           <p:spPr>
@@ -8710,7 +8878,7 @@
             </a:prstGeom>
           </p:spPr>
           <p:txBody>
-            <a:bodyPr anchor="ctr" rtlCol="false" tIns="50800" lIns="50800" bIns="50800" rIns="50800"/>
+            <a:bodyPr lIns="50800" tIns="50800" rIns="50800" bIns="50800" rtlCol="0" anchor="ctr"/>
             <a:lstStyle/>
             <a:p>
               <a:pPr algn="ctr">
@@ -8718,13 +8886,14 @@
                   <a:spcPts val="2520"/>
                 </a:lnSpc>
               </a:pPr>
+              <a:endParaRPr/>
             </a:p>
           </p:txBody>
         </p:sp>
       </p:grpSp>
       <p:grpSp>
         <p:nvGrpSpPr>
-          <p:cNvPr name="Group 6" id="6"/>
+          <p:cNvPr id="6" name="Group 6"/>
           <p:cNvGrpSpPr/>
           <p:nvPr/>
         </p:nvGrpSpPr>
@@ -8738,12 +8907,12 @@
         </p:grpSpPr>
         <p:sp>
           <p:nvSpPr>
-            <p:cNvPr name="Freeform 7" id="7"/>
+            <p:cNvPr id="7" name="Freeform 7"/>
             <p:cNvSpPr/>
             <p:nvPr/>
           </p:nvSpPr>
           <p:spPr>
-            <a:xfrm flipH="false" flipV="false" rot="0">
+            <a:xfrm>
               <a:off x="0" y="0"/>
               <a:ext cx="513191" cy="651052"/>
             </a:xfrm>
@@ -8752,9 +8921,9 @@
               <a:gdLst/>
               <a:ahLst/>
               <a:cxnLst/>
-              <a:rect r="r" b="b" t="t" l="l"/>
+              <a:rect l="l" t="t" r="r" b="b"/>
               <a:pathLst>
-                <a:path h="651052" w="513191">
+                <a:path w="513191" h="651052">
                   <a:moveTo>
                     <a:pt x="246340" y="0"/>
                   </a:moveTo>
@@ -8814,7 +8983,7 @@
                 </a:path>
               </a:pathLst>
             </a:custGeom>
-            <a:gradFill rotWithShape="true">
+            <a:gradFill rotWithShape="1">
               <a:gsLst>
                 <a:gs pos="0">
                   <a:srgbClr val="30C2B7">
@@ -8843,8 +9012,8 @@
         </p:sp>
         <p:sp>
           <p:nvSpPr>
-            <p:cNvPr name="TextBox 8" id="8"/>
-            <p:cNvSpPr txBox="true"/>
+            <p:cNvPr id="8" name="TextBox 8"/>
+            <p:cNvSpPr txBox="1"/>
             <p:nvPr/>
           </p:nvSpPr>
           <p:spPr>
@@ -8857,7 +9026,7 @@
             </a:prstGeom>
           </p:spPr>
           <p:txBody>
-            <a:bodyPr anchor="ctr" rtlCol="false" tIns="50800" lIns="50800" bIns="50800" rIns="50800"/>
+            <a:bodyPr lIns="50800" tIns="50800" rIns="50800" bIns="50800" rtlCol="0" anchor="ctr"/>
             <a:lstStyle/>
             <a:p>
               <a:pPr algn="ctr">
@@ -8865,138 +9034,139 @@
                   <a:spcPts val="2520"/>
                 </a:lnSpc>
               </a:pPr>
+              <a:endParaRPr/>
             </a:p>
           </p:txBody>
         </p:sp>
       </p:grpSp>
-      <p:sp>
-        <p:nvSpPr>
-          <p:cNvPr name="Freeform 9" id="9"/>
-          <p:cNvSpPr/>
+      <p:grpSp>
+        <p:nvGrpSpPr>
+          <p:cNvPr id="10" name="Group 10"/>
+          <p:cNvGrpSpPr/>
           <p:nvPr/>
-        </p:nvSpPr>
+        </p:nvGrpSpPr>
+        <p:grpSpPr>
+          <a:xfrm>
+            <a:off x="322559" y="356564"/>
+            <a:ext cx="8084062" cy="1744405"/>
+            <a:chOff x="0" y="-152400"/>
+            <a:chExt cx="10778749" cy="2325872"/>
+          </a:xfrm>
+        </p:grpSpPr>
+        <p:sp>
+          <p:nvSpPr>
+            <p:cNvPr id="11" name="TextBox 11"/>
+            <p:cNvSpPr txBox="1"/>
+            <p:nvPr/>
+          </p:nvSpPr>
+          <p:spPr>
+            <a:xfrm>
+              <a:off x="0" y="1427843"/>
+              <a:ext cx="10778749" cy="745629"/>
+            </a:xfrm>
+            <a:prstGeom prst="rect">
+              <a:avLst/>
+            </a:prstGeom>
+          </p:spPr>
+          <p:txBody>
+            <a:bodyPr lIns="0" tIns="0" rIns="0" bIns="0" rtlCol="0" anchor="t">
+              <a:spAutoFit/>
+            </a:bodyPr>
+            <a:lstStyle/>
+            <a:p>
+              <a:pPr marL="0" lvl="0" indent="0" algn="l">
+                <a:lnSpc>
+                  <a:spcPts val="4396"/>
+                </a:lnSpc>
+              </a:pPr>
+              <a:r>
+                <a:rPr lang="en-US" sz="3381" b="1" spc="101">
+                  <a:solidFill>
+                    <a:srgbClr val="000000"/>
+                  </a:solidFill>
+                  <a:latin typeface="Poppins Bold"/>
+                  <a:ea typeface="Poppins Bold"/>
+                  <a:cs typeface="Poppins Bold"/>
+                  <a:sym typeface="Poppins Bold"/>
+                </a:rPr>
+                <a:t>del Software</a:t>
+              </a:r>
+            </a:p>
+          </p:txBody>
+        </p:sp>
+        <p:sp>
+          <p:nvSpPr>
+            <p:cNvPr id="12" name="TextBox 12"/>
+            <p:cNvSpPr txBox="1"/>
+            <p:nvPr/>
+          </p:nvSpPr>
+          <p:spPr>
+            <a:xfrm>
+              <a:off x="0" y="-152400"/>
+              <a:ext cx="10778749" cy="1582998"/>
+            </a:xfrm>
+            <a:prstGeom prst="rect">
+              <a:avLst/>
+            </a:prstGeom>
+          </p:spPr>
+          <p:txBody>
+            <a:bodyPr lIns="0" tIns="0" rIns="0" bIns="0" rtlCol="0" anchor="t">
+              <a:spAutoFit/>
+            </a:bodyPr>
+            <a:lstStyle/>
+            <a:p>
+              <a:pPr>
+                <a:lnSpc>
+                  <a:spcPts val="9608"/>
+                </a:lnSpc>
+              </a:pPr>
+              <a:r>
+                <a:rPr lang="en-US" sz="7350" b="1" err="1">
+                  <a:solidFill>
+                    <a:srgbClr val="707070"/>
+                  </a:solidFill>
+                  <a:latin typeface="Poppins Bold"/>
+                  <a:ea typeface="Poppins Bold"/>
+                  <a:cs typeface="Poppins Bold"/>
+                  <a:sym typeface="Poppins Bold"/>
+                </a:rPr>
+                <a:t>Arquitectura</a:t>
+              </a:r>
+              <a:endParaRPr lang="es-ES" err="1"/>
+            </a:p>
+          </p:txBody>
+        </p:sp>
+      </p:grpSp>
+      <p:pic>
+        <p:nvPicPr>
+          <p:cNvPr id="13" name="Imagen 12" descr="Diagrama&#10;&#10;El contenido generado por IA puede ser incorrecto.">
+            <a:extLst>
+              <a:ext uri="{FF2B5EF4-FFF2-40B4-BE49-F238E27FC236}">
+                <a16:creationId xmlns:a16="http://schemas.microsoft.com/office/drawing/2014/main" id="{8AAB6E5B-72F6-00DB-E25A-9AA48FDD8EB9}"/>
+              </a:ext>
+            </a:extLst>
+          </p:cNvPr>
+          <p:cNvPicPr>
+            <a:picLocks noChangeAspect="1"/>
+          </p:cNvPicPr>
+          <p:nvPr/>
+        </p:nvPicPr>
+        <p:blipFill>
+          <a:blip r:embed="rId3"/>
+          <a:stretch>
+            <a:fillRect/>
+          </a:stretch>
+        </p:blipFill>
         <p:spPr>
-          <a:xfrm flipH="false" flipV="false" rot="0">
-            <a:off x="3000298" y="1149812"/>
-            <a:ext cx="13343391" cy="9350744"/>
-          </a:xfrm>
-          <a:custGeom>
-            <a:avLst/>
-            <a:gdLst/>
-            <a:ahLst/>
-            <a:cxnLst/>
-            <a:rect r="r" b="b" t="t" l="l"/>
-            <a:pathLst>
-              <a:path h="9350744" w="13343391">
-                <a:moveTo>
-                  <a:pt x="0" y="0"/>
-                </a:moveTo>
-                <a:lnTo>
-                  <a:pt x="13343391" y="0"/>
-                </a:lnTo>
-                <a:lnTo>
-                  <a:pt x="13343391" y="9350745"/>
-                </a:lnTo>
-                <a:lnTo>
-                  <a:pt x="0" y="9350745"/>
-                </a:lnTo>
-                <a:lnTo>
-                  <a:pt x="0" y="0"/>
-                </a:lnTo>
-                <a:close/>
-              </a:path>
-            </a:pathLst>
-          </a:custGeom>
-          <a:blipFill>
-            <a:blip r:embed="rId3"/>
-            <a:stretch>
-              <a:fillRect l="0" t="0" r="0" b="0"/>
-            </a:stretch>
-          </a:blipFill>
-        </p:spPr>
-      </p:sp>
-      <p:sp>
-        <p:nvSpPr>
-          <p:cNvPr name="TextBox 10" id="10"/>
-          <p:cNvSpPr txBox="true"/>
-          <p:nvPr/>
-        </p:nvSpPr>
-        <p:spPr>
-          <a:xfrm rot="0">
-            <a:off x="322559" y="1525077"/>
-            <a:ext cx="8084062" cy="575891"/>
+          <a:xfrm>
+            <a:off x="3399064" y="1575707"/>
+            <a:ext cx="13190763" cy="8714014"/>
           </a:xfrm>
           <a:prstGeom prst="rect">
             <a:avLst/>
           </a:prstGeom>
         </p:spPr>
-        <p:txBody>
-          <a:bodyPr anchor="t" rtlCol="false" tIns="0" lIns="0" bIns="0" rIns="0">
-            <a:spAutoFit/>
-          </a:bodyPr>
-          <a:lstStyle/>
-          <a:p>
-            <a:pPr algn="l" marL="0" indent="0" lvl="0">
-              <a:lnSpc>
-                <a:spcPts val="4396"/>
-              </a:lnSpc>
-            </a:pPr>
-            <a:r>
-              <a:rPr lang="en-US" b="true" sz="3381" spc="101">
-                <a:solidFill>
-                  <a:srgbClr val="000000"/>
-                </a:solidFill>
-                <a:latin typeface="Poppins Bold"/>
-                <a:ea typeface="Poppins Bold"/>
-                <a:cs typeface="Poppins Bold"/>
-                <a:sym typeface="Poppins Bold"/>
-              </a:rPr>
-              <a:t>del Software</a:t>
-            </a:r>
-          </a:p>
-        </p:txBody>
-      </p:sp>
-      <p:sp>
-        <p:nvSpPr>
-          <p:cNvPr name="TextBox 11" id="11"/>
-          <p:cNvSpPr txBox="true"/>
-          <p:nvPr/>
-        </p:nvSpPr>
-        <p:spPr>
-          <a:xfrm rot="0">
-            <a:off x="322559" y="318464"/>
-            <a:ext cx="8084062" cy="1273288"/>
-          </a:xfrm>
-          <a:prstGeom prst="rect">
-            <a:avLst/>
-          </a:prstGeom>
-        </p:spPr>
-        <p:txBody>
-          <a:bodyPr anchor="t" rtlCol="false" tIns="0" lIns="0" bIns="0" rIns="0">
-            <a:spAutoFit/>
-          </a:bodyPr>
-          <a:lstStyle/>
-          <a:p>
-            <a:pPr algn="l" marL="0" indent="0" lvl="0">
-              <a:lnSpc>
-                <a:spcPts val="9608"/>
-              </a:lnSpc>
-            </a:pPr>
-            <a:r>
-              <a:rPr lang="en-US" b="true" sz="7391">
-                <a:solidFill>
-                  <a:srgbClr val="707070"/>
-                </a:solidFill>
-                <a:latin typeface="Poppins Bold"/>
-                <a:ea typeface="Poppins Bold"/>
-                <a:cs typeface="Poppins Bold"/>
-                <a:sym typeface="Poppins Bold"/>
-              </a:rPr>
-              <a:t>Arquitectura</a:t>
-            </a:r>
-          </a:p>
-        </p:txBody>
-      </p:sp>
+      </p:pic>
     </p:spTree>
   </p:cSld>
   <p:clrMapOvr>
@@ -9006,7 +9176,7 @@
 </file>
 
 <file path=ppt/slides/slide7.xml><?xml version="1.0" encoding="utf-8"?>
-<p:sld xmlns:p="http://schemas.openxmlformats.org/presentationml/2006/main" xmlns:a="http://schemas.openxmlformats.org/drawingml/2006/main" xmlns:r="http://schemas.openxmlformats.org/officeDocument/2006/relationships">
+<p:sld xmlns:a="http://schemas.openxmlformats.org/drawingml/2006/main" xmlns:r="http://schemas.openxmlformats.org/officeDocument/2006/relationships" xmlns:p="http://schemas.openxmlformats.org/presentationml/2006/main">
   <p:cSld>
     <p:spTree>
       <p:nvGrpSpPr>
@@ -9024,12 +9194,12 @@
       </p:grpSpPr>
       <p:sp>
         <p:nvSpPr>
-          <p:cNvPr name="Freeform 2" id="2"/>
+          <p:cNvPr id="2" name="Freeform 2"/>
           <p:cNvSpPr/>
           <p:nvPr/>
         </p:nvSpPr>
         <p:spPr>
-          <a:xfrm flipH="false" flipV="false" rot="0">
+          <a:xfrm>
             <a:off x="0" y="0"/>
             <a:ext cx="18288000" cy="10287000"/>
           </a:xfrm>
@@ -9038,9 +9208,9 @@
             <a:gdLst/>
             <a:ahLst/>
             <a:cxnLst/>
-            <a:rect r="r" b="b" t="t" l="l"/>
+            <a:rect l="l" t="t" r="r" b="b"/>
             <a:pathLst>
-              <a:path h="10287000" w="18288000">
+              <a:path w="18288000" h="10287000">
                 <a:moveTo>
                   <a:pt x="0" y="0"/>
                 </a:moveTo>
@@ -9063,14 +9233,14 @@
           <a:blipFill>
             <a:blip r:embed="rId2"/>
             <a:stretch>
-              <a:fillRect l="-11643" t="0" r="-11643" b="0"/>
+              <a:fillRect l="-11643" r="-11643"/>
             </a:stretch>
           </a:blipFill>
         </p:spPr>
       </p:sp>
       <p:grpSp>
         <p:nvGrpSpPr>
-          <p:cNvPr name="Group 3" id="3"/>
+          <p:cNvPr id="3" name="Group 3"/>
           <p:cNvGrpSpPr/>
           <p:nvPr/>
         </p:nvGrpSpPr>
@@ -9084,12 +9254,12 @@
         </p:grpSpPr>
         <p:sp>
           <p:nvSpPr>
-            <p:cNvPr name="Freeform 4" id="4"/>
+            <p:cNvPr id="4" name="Freeform 4"/>
             <p:cNvSpPr/>
             <p:nvPr/>
           </p:nvSpPr>
           <p:spPr>
-            <a:xfrm flipH="false" flipV="false" rot="0">
+            <a:xfrm>
               <a:off x="0" y="0"/>
               <a:ext cx="513191" cy="651052"/>
             </a:xfrm>
@@ -9098,9 +9268,9 @@
               <a:gdLst/>
               <a:ahLst/>
               <a:cxnLst/>
-              <a:rect r="r" b="b" t="t" l="l"/>
+              <a:rect l="l" t="t" r="r" b="b"/>
               <a:pathLst>
-                <a:path h="651052" w="513191">
+                <a:path w="513191" h="651052">
                   <a:moveTo>
                     <a:pt x="246340" y="0"/>
                   </a:moveTo>
@@ -9160,7 +9330,7 @@
                 </a:path>
               </a:pathLst>
             </a:custGeom>
-            <a:gradFill rotWithShape="true">
+            <a:gradFill rotWithShape="1">
               <a:gsLst>
                 <a:gs pos="0">
                   <a:srgbClr val="30C2B7">
@@ -9189,8 +9359,8 @@
         </p:sp>
         <p:sp>
           <p:nvSpPr>
-            <p:cNvPr name="TextBox 5" id="5"/>
-            <p:cNvSpPr txBox="true"/>
+            <p:cNvPr id="5" name="TextBox 5"/>
+            <p:cNvSpPr txBox="1"/>
             <p:nvPr/>
           </p:nvSpPr>
           <p:spPr>
@@ -9203,7 +9373,7 @@
             </a:prstGeom>
           </p:spPr>
           <p:txBody>
-            <a:bodyPr anchor="ctr" rtlCol="false" tIns="50800" lIns="50800" bIns="50800" rIns="50800"/>
+            <a:bodyPr lIns="50800" tIns="50800" rIns="50800" bIns="50800" rtlCol="0" anchor="ctr"/>
             <a:lstStyle/>
             <a:p>
               <a:pPr algn="ctr">
@@ -9211,18 +9381,19 @@
                   <a:spcPts val="2520"/>
                 </a:lnSpc>
               </a:pPr>
+              <a:endParaRPr/>
             </a:p>
           </p:txBody>
         </p:sp>
       </p:grpSp>
       <p:sp>
         <p:nvSpPr>
-          <p:cNvPr name="Freeform 6" id="6"/>
+          <p:cNvPr id="6" name="Freeform 6"/>
           <p:cNvSpPr/>
           <p:nvPr/>
         </p:nvSpPr>
         <p:spPr>
-          <a:xfrm flipH="false" flipV="false" rot="0">
+          <a:xfrm>
             <a:off x="8106117" y="2510446"/>
             <a:ext cx="2169451" cy="2169451"/>
           </a:xfrm>
@@ -9231,9 +9402,9 @@
             <a:gdLst/>
             <a:ahLst/>
             <a:cxnLst/>
-            <a:rect r="r" b="b" t="t" l="l"/>
+            <a:rect l="l" t="t" r="r" b="b"/>
             <a:pathLst>
-              <a:path h="2169451" w="2169451">
+              <a:path w="2169451" h="2169451">
                 <a:moveTo>
                   <a:pt x="0" y="0"/>
                 </a:moveTo>
@@ -9256,19 +9427,19 @@
           <a:blipFill>
             <a:blip r:embed="rId3"/>
             <a:stretch>
-              <a:fillRect l="0" t="0" r="0" b="0"/>
+              <a:fillRect/>
             </a:stretch>
           </a:blipFill>
         </p:spPr>
       </p:sp>
       <p:sp>
         <p:nvSpPr>
-          <p:cNvPr name="Freeform 7" id="7"/>
+          <p:cNvPr id="7" name="Freeform 7"/>
           <p:cNvSpPr/>
           <p:nvPr/>
         </p:nvSpPr>
         <p:spPr>
-          <a:xfrm flipH="false" flipV="false" rot="0">
+          <a:xfrm>
             <a:off x="4115480" y="4549472"/>
             <a:ext cx="3629082" cy="2041358"/>
           </a:xfrm>
@@ -9277,9 +9448,9 @@
             <a:gdLst/>
             <a:ahLst/>
             <a:cxnLst/>
-            <a:rect r="r" b="b" t="t" l="l"/>
+            <a:rect l="l" t="t" r="r" b="b"/>
             <a:pathLst>
-              <a:path h="2041358" w="3629082">
+              <a:path w="3629082" h="2041358">
                 <a:moveTo>
                   <a:pt x="0" y="0"/>
                 </a:moveTo>
@@ -9302,19 +9473,19 @@
           <a:blipFill>
             <a:blip r:embed="rId4"/>
             <a:stretch>
-              <a:fillRect l="0" t="0" r="0" b="0"/>
+              <a:fillRect/>
             </a:stretch>
           </a:blipFill>
         </p:spPr>
       </p:sp>
       <p:sp>
         <p:nvSpPr>
-          <p:cNvPr name="Freeform 8" id="8"/>
+          <p:cNvPr id="8" name="Freeform 8"/>
           <p:cNvSpPr/>
           <p:nvPr/>
         </p:nvSpPr>
         <p:spPr>
-          <a:xfrm flipH="false" flipV="false" rot="0">
+          <a:xfrm>
             <a:off x="2023461" y="2430497"/>
             <a:ext cx="2249400" cy="2249400"/>
           </a:xfrm>
@@ -9323,9 +9494,9 @@
             <a:gdLst/>
             <a:ahLst/>
             <a:cxnLst/>
-            <a:rect r="r" b="b" t="t" l="l"/>
+            <a:rect l="l" t="t" r="r" b="b"/>
             <a:pathLst>
-              <a:path h="2249400" w="2249400">
+              <a:path w="2249400" h="2249400">
                 <a:moveTo>
                   <a:pt x="0" y="0"/>
                 </a:moveTo>
@@ -9348,19 +9519,19 @@
           <a:blipFill>
             <a:blip r:embed="rId5"/>
             <a:stretch>
-              <a:fillRect l="0" t="0" r="0" b="0"/>
+              <a:fillRect/>
             </a:stretch>
           </a:blipFill>
         </p:spPr>
       </p:sp>
       <p:sp>
         <p:nvSpPr>
-          <p:cNvPr name="Freeform 9" id="9"/>
+          <p:cNvPr id="9" name="Freeform 9"/>
           <p:cNvSpPr/>
           <p:nvPr/>
         </p:nvSpPr>
         <p:spPr>
-          <a:xfrm flipH="false" flipV="false" rot="0">
+          <a:xfrm>
             <a:off x="4636838" y="2093530"/>
             <a:ext cx="2586367" cy="2586367"/>
           </a:xfrm>
@@ -9369,9 +9540,9 @@
             <a:gdLst/>
             <a:ahLst/>
             <a:cxnLst/>
-            <a:rect r="r" b="b" t="t" l="l"/>
+            <a:rect l="l" t="t" r="r" b="b"/>
             <a:pathLst>
-              <a:path h="2586367" w="2586367">
+              <a:path w="2586367" h="2586367">
                 <a:moveTo>
                   <a:pt x="0" y="0"/>
                 </a:moveTo>
@@ -9394,19 +9565,19 @@
           <a:blipFill>
             <a:blip r:embed="rId6"/>
             <a:stretch>
-              <a:fillRect l="0" t="0" r="0" b="0"/>
+              <a:fillRect/>
             </a:stretch>
           </a:blipFill>
         </p:spPr>
       </p:sp>
       <p:sp>
         <p:nvSpPr>
-          <p:cNvPr name="Freeform 10" id="10"/>
+          <p:cNvPr id="10" name="Freeform 10"/>
           <p:cNvSpPr/>
           <p:nvPr/>
         </p:nvSpPr>
         <p:spPr>
-          <a:xfrm flipH="false" flipV="false" rot="0">
+          <a:xfrm>
             <a:off x="9345953" y="4938075"/>
             <a:ext cx="1859230" cy="1859230"/>
           </a:xfrm>
@@ -9415,9 +9586,9 @@
             <a:gdLst/>
             <a:ahLst/>
             <a:cxnLst/>
-            <a:rect r="r" b="b" t="t" l="l"/>
+            <a:rect l="l" t="t" r="r" b="b"/>
             <a:pathLst>
-              <a:path h="1859230" w="1859230">
+              <a:path w="1859230" h="1859230">
                 <a:moveTo>
                   <a:pt x="0" y="0"/>
                 </a:moveTo>
@@ -9440,19 +9611,19 @@
           <a:blipFill>
             <a:blip r:embed="rId7"/>
             <a:stretch>
-              <a:fillRect l="0" t="0" r="0" b="0"/>
+              <a:fillRect/>
             </a:stretch>
           </a:blipFill>
         </p:spPr>
       </p:sp>
       <p:sp>
         <p:nvSpPr>
-          <p:cNvPr name="Freeform 11" id="11"/>
+          <p:cNvPr id="11" name="Freeform 11"/>
           <p:cNvSpPr/>
           <p:nvPr/>
         </p:nvSpPr>
         <p:spPr>
-          <a:xfrm flipH="false" flipV="false" rot="0">
+          <a:xfrm>
             <a:off x="7036749" y="6275842"/>
             <a:ext cx="2107251" cy="2107251"/>
           </a:xfrm>
@@ -9461,9 +9632,9 @@
             <a:gdLst/>
             <a:ahLst/>
             <a:cxnLst/>
-            <a:rect r="r" b="b" t="t" l="l"/>
+            <a:rect l="l" t="t" r="r" b="b"/>
             <a:pathLst>
-              <a:path h="2107251" w="2107251">
+              <a:path w="2107251" h="2107251">
                 <a:moveTo>
                   <a:pt x="0" y="0"/>
                 </a:moveTo>
@@ -9486,19 +9657,19 @@
           <a:blipFill>
             <a:blip r:embed="rId8"/>
             <a:stretch>
-              <a:fillRect l="0" t="0" r="0" b="0"/>
+              <a:fillRect/>
             </a:stretch>
           </a:blipFill>
         </p:spPr>
       </p:sp>
       <p:sp>
         <p:nvSpPr>
-          <p:cNvPr name="Freeform 12" id="12"/>
+          <p:cNvPr id="12" name="Freeform 12"/>
           <p:cNvSpPr/>
           <p:nvPr/>
         </p:nvSpPr>
         <p:spPr>
-          <a:xfrm flipH="false" flipV="false" rot="0">
+          <a:xfrm>
             <a:off x="2023461" y="6892165"/>
             <a:ext cx="3260837" cy="1267650"/>
           </a:xfrm>
@@ -9507,9 +9678,9 @@
             <a:gdLst/>
             <a:ahLst/>
             <a:cxnLst/>
-            <a:rect r="r" b="b" t="t" l="l"/>
+            <a:rect l="l" t="t" r="r" b="b"/>
             <a:pathLst>
-              <a:path h="1267650" w="3260837">
+              <a:path w="3260837" h="1267650">
                 <a:moveTo>
                   <a:pt x="0" y="0"/>
                 </a:moveTo>
@@ -9532,19 +9703,19 @@
           <a:blipFill>
             <a:blip r:embed="rId9"/>
             <a:stretch>
-              <a:fillRect l="0" t="0" r="0" b="0"/>
+              <a:fillRect/>
             </a:stretch>
           </a:blipFill>
         </p:spPr>
       </p:sp>
       <p:grpSp>
         <p:nvGrpSpPr>
-          <p:cNvPr name="Group 13" id="13"/>
+          <p:cNvPr id="13" name="Group 13"/>
           <p:cNvGrpSpPr/>
           <p:nvPr/>
         </p:nvGrpSpPr>
         <p:grpSpPr>
-          <a:xfrm rot="0">
+          <a:xfrm>
             <a:off x="10740490" y="1959476"/>
             <a:ext cx="6518810" cy="1827557"/>
             <a:chOff x="0" y="0"/>
@@ -9553,12 +9724,12 @@
         </p:grpSpPr>
         <p:sp>
           <p:nvSpPr>
-            <p:cNvPr name="TextBox 14" id="14"/>
-            <p:cNvSpPr txBox="true"/>
+            <p:cNvPr id="14" name="TextBox 14"/>
+            <p:cNvSpPr txBox="1"/>
             <p:nvPr/>
           </p:nvSpPr>
           <p:spPr>
-            <a:xfrm rot="0">
+            <a:xfrm>
               <a:off x="0" y="1667335"/>
               <a:ext cx="8691747" cy="769408"/>
             </a:xfrm>
@@ -9567,18 +9738,18 @@
             </a:prstGeom>
           </p:spPr>
           <p:txBody>
-            <a:bodyPr anchor="t" rtlCol="false" tIns="0" lIns="0" bIns="0" rIns="0">
+            <a:bodyPr lIns="0" tIns="0" rIns="0" bIns="0" rtlCol="0" anchor="t">
               <a:spAutoFit/>
             </a:bodyPr>
             <a:lstStyle/>
             <a:p>
-              <a:pPr algn="r" marL="0" indent="0" lvl="0">
+              <a:pPr marL="0" lvl="0" indent="0" algn="r">
                 <a:lnSpc>
                   <a:spcPts val="4550"/>
                 </a:lnSpc>
               </a:pPr>
               <a:r>
-                <a:rPr lang="en-US" b="true" sz="3500" spc="105">
+                <a:rPr lang="en-US" sz="3500" b="1" spc="105">
                   <a:solidFill>
                     <a:srgbClr val="000000"/>
                   </a:solidFill>
@@ -9594,12 +9765,12 @@
         </p:sp>
         <p:sp>
           <p:nvSpPr>
-            <p:cNvPr name="TextBox 15" id="15"/>
-            <p:cNvSpPr txBox="true"/>
+            <p:cNvPr id="15" name="TextBox 15"/>
+            <p:cNvSpPr txBox="1"/>
             <p:nvPr/>
           </p:nvSpPr>
           <p:spPr>
-            <a:xfrm rot="0">
+            <a:xfrm>
               <a:off x="0" y="-142875"/>
               <a:ext cx="8691747" cy="1689735"/>
             </a:xfrm>
@@ -9608,18 +9779,18 @@
             </a:prstGeom>
           </p:spPr>
           <p:txBody>
-            <a:bodyPr anchor="t" rtlCol="false" tIns="0" lIns="0" bIns="0" rIns="0">
+            <a:bodyPr lIns="0" tIns="0" rIns="0" bIns="0" rtlCol="0" anchor="t">
               <a:spAutoFit/>
             </a:bodyPr>
             <a:lstStyle/>
             <a:p>
-              <a:pPr algn="r" marL="0" indent="0" lvl="0">
+              <a:pPr marL="0" lvl="0" indent="0" algn="r">
                 <a:lnSpc>
                   <a:spcPts val="9945"/>
                 </a:lnSpc>
               </a:pPr>
               <a:r>
-                <a:rPr lang="en-US" b="true" sz="7650">
+                <a:rPr lang="en-US" sz="7650" b="1">
                   <a:solidFill>
                     <a:srgbClr val="707070"/>
                   </a:solidFill>
@@ -9643,7 +9814,7 @@
 </file>
 
 <file path=ppt/slides/slide8.xml><?xml version="1.0" encoding="utf-8"?>
-<p:sld xmlns:p="http://schemas.openxmlformats.org/presentationml/2006/main" xmlns:a="http://schemas.openxmlformats.org/drawingml/2006/main" xmlns:r="http://schemas.openxmlformats.org/officeDocument/2006/relationships">
+<p:sld xmlns:a="http://schemas.openxmlformats.org/drawingml/2006/main" xmlns:r="http://schemas.openxmlformats.org/officeDocument/2006/relationships" xmlns:p="http://schemas.openxmlformats.org/presentationml/2006/main">
   <p:cSld>
     <p:spTree>
       <p:nvGrpSpPr>
@@ -9661,12 +9832,12 @@
       </p:grpSpPr>
       <p:sp>
         <p:nvSpPr>
-          <p:cNvPr name="Freeform 2" id="2"/>
+          <p:cNvPr id="2" name="Freeform 2"/>
           <p:cNvSpPr/>
           <p:nvPr/>
         </p:nvSpPr>
         <p:spPr>
-          <a:xfrm flipH="false" flipV="false" rot="0">
+          <a:xfrm>
             <a:off x="0" y="0"/>
             <a:ext cx="18288000" cy="10287000"/>
           </a:xfrm>
@@ -9675,9 +9846,9 @@
             <a:gdLst/>
             <a:ahLst/>
             <a:cxnLst/>
-            <a:rect r="r" b="b" t="t" l="l"/>
+            <a:rect l="l" t="t" r="r" b="b"/>
             <a:pathLst>
-              <a:path h="10287000" w="18288000">
+              <a:path w="18288000" h="10287000">
                 <a:moveTo>
                   <a:pt x="0" y="0"/>
                 </a:moveTo>
@@ -9700,14 +9871,14 @@
           <a:blipFill>
             <a:blip r:embed="rId2"/>
             <a:stretch>
-              <a:fillRect l="-11643" t="0" r="-11643" b="0"/>
+              <a:fillRect l="-11643" r="-11643"/>
             </a:stretch>
           </a:blipFill>
         </p:spPr>
       </p:sp>
       <p:grpSp>
         <p:nvGrpSpPr>
-          <p:cNvPr name="Group 3" id="3"/>
+          <p:cNvPr id="3" name="Group 3"/>
           <p:cNvGrpSpPr/>
           <p:nvPr/>
         </p:nvGrpSpPr>
@@ -9721,12 +9892,12 @@
         </p:grpSpPr>
         <p:sp>
           <p:nvSpPr>
-            <p:cNvPr name="Freeform 4" id="4"/>
+            <p:cNvPr id="4" name="Freeform 4"/>
             <p:cNvSpPr/>
             <p:nvPr/>
           </p:nvSpPr>
           <p:spPr>
-            <a:xfrm flipH="false" flipV="false" rot="0">
+            <a:xfrm>
               <a:off x="0" y="0"/>
               <a:ext cx="812800" cy="812800"/>
             </a:xfrm>
@@ -9735,9 +9906,9 @@
               <a:gdLst/>
               <a:ahLst/>
               <a:cxnLst/>
-              <a:rect r="r" b="b" t="t" l="l"/>
+              <a:rect l="l" t="t" r="r" b="b"/>
               <a:pathLst>
-                <a:path h="812800" w="812800">
+                <a:path w="812800" h="812800">
                   <a:moveTo>
                     <a:pt x="406400" y="0"/>
                   </a:moveTo>
@@ -9803,8 +9974,8 @@
         </p:sp>
         <p:sp>
           <p:nvSpPr>
-            <p:cNvPr name="TextBox 5" id="5"/>
-            <p:cNvSpPr txBox="true"/>
+            <p:cNvPr id="5" name="TextBox 5"/>
+            <p:cNvSpPr txBox="1"/>
             <p:nvPr/>
           </p:nvSpPr>
           <p:spPr>
@@ -9817,7 +9988,7 @@
             </a:prstGeom>
           </p:spPr>
           <p:txBody>
-            <a:bodyPr anchor="ctr" rtlCol="false" tIns="50800" lIns="50800" bIns="50800" rIns="50800"/>
+            <a:bodyPr lIns="50800" tIns="50800" rIns="50800" bIns="50800" rtlCol="0" anchor="ctr"/>
             <a:lstStyle/>
             <a:p>
               <a:pPr algn="ctr">
@@ -9825,13 +9996,14 @@
                   <a:spcPts val="2520"/>
                 </a:lnSpc>
               </a:pPr>
+              <a:endParaRPr/>
             </a:p>
           </p:txBody>
         </p:sp>
       </p:grpSp>
       <p:grpSp>
         <p:nvGrpSpPr>
-          <p:cNvPr name="Group 6" id="6"/>
+          <p:cNvPr id="6" name="Group 6"/>
           <p:cNvGrpSpPr/>
           <p:nvPr/>
         </p:nvGrpSpPr>
@@ -9845,12 +10017,12 @@
         </p:grpSpPr>
         <p:sp>
           <p:nvSpPr>
-            <p:cNvPr name="Freeform 7" id="7"/>
+            <p:cNvPr id="7" name="Freeform 7"/>
             <p:cNvSpPr/>
             <p:nvPr/>
           </p:nvSpPr>
           <p:spPr>
-            <a:xfrm flipH="false" flipV="false" rot="0">
+            <a:xfrm>
               <a:off x="0" y="0"/>
               <a:ext cx="513191" cy="651052"/>
             </a:xfrm>
@@ -9859,9 +10031,9 @@
               <a:gdLst/>
               <a:ahLst/>
               <a:cxnLst/>
-              <a:rect r="r" b="b" t="t" l="l"/>
+              <a:rect l="l" t="t" r="r" b="b"/>
               <a:pathLst>
-                <a:path h="651052" w="513191">
+                <a:path w="513191" h="651052">
                   <a:moveTo>
                     <a:pt x="246340" y="0"/>
                   </a:moveTo>
@@ -9921,7 +10093,7 @@
                 </a:path>
               </a:pathLst>
             </a:custGeom>
-            <a:gradFill rotWithShape="true">
+            <a:gradFill rotWithShape="1">
               <a:gsLst>
                 <a:gs pos="0">
                   <a:srgbClr val="30C2B7">
@@ -9950,8 +10122,8 @@
         </p:sp>
         <p:sp>
           <p:nvSpPr>
-            <p:cNvPr name="TextBox 8" id="8"/>
-            <p:cNvSpPr txBox="true"/>
+            <p:cNvPr id="8" name="TextBox 8"/>
+            <p:cNvSpPr txBox="1"/>
             <p:nvPr/>
           </p:nvSpPr>
           <p:spPr>
@@ -9964,7 +10136,7 @@
             </a:prstGeom>
           </p:spPr>
           <p:txBody>
-            <a:bodyPr anchor="ctr" rtlCol="false" tIns="50800" lIns="50800" bIns="50800" rIns="50800"/>
+            <a:bodyPr lIns="50800" tIns="50800" rIns="50800" bIns="50800" rtlCol="0" anchor="ctr"/>
             <a:lstStyle/>
             <a:p>
               <a:pPr algn="ctr">
@@ -9972,18 +10144,19 @@
                   <a:spcPts val="2520"/>
                 </a:lnSpc>
               </a:pPr>
+              <a:endParaRPr/>
             </a:p>
           </p:txBody>
         </p:sp>
       </p:grpSp>
       <p:sp>
         <p:nvSpPr>
-          <p:cNvPr name="Freeform 9" id="9"/>
+          <p:cNvPr id="9" name="Freeform 9"/>
           <p:cNvSpPr/>
           <p:nvPr/>
         </p:nvSpPr>
         <p:spPr>
-          <a:xfrm flipH="false" flipV="false" rot="0">
+          <a:xfrm>
             <a:off x="2693936" y="4027291"/>
             <a:ext cx="735006" cy="995698"/>
           </a:xfrm>
@@ -9992,9 +10165,9 @@
             <a:gdLst/>
             <a:ahLst/>
             <a:cxnLst/>
-            <a:rect r="r" b="b" t="t" l="l"/>
+            <a:rect l="l" t="t" r="r" b="b"/>
             <a:pathLst>
-              <a:path h="995698" w="735006">
+              <a:path w="735006" h="995698">
                 <a:moveTo>
                   <a:pt x="0" y="0"/>
                 </a:moveTo>
@@ -10023,7 +10196,7 @@
               </a:extLst>
             </a:blip>
             <a:stretch>
-              <a:fillRect l="0" t="0" r="0" b="0"/>
+              <a:fillRect/>
             </a:stretch>
           </a:blipFill>
           <a:ln cap="sq">
@@ -10035,12 +10208,12 @@
       </p:sp>
       <p:sp>
         <p:nvSpPr>
-          <p:cNvPr name="Freeform 10" id="10"/>
+          <p:cNvPr id="10" name="Freeform 10"/>
           <p:cNvSpPr/>
           <p:nvPr/>
         </p:nvSpPr>
         <p:spPr>
-          <a:xfrm flipH="false" flipV="false" rot="0">
+          <a:xfrm>
             <a:off x="5934149" y="6450366"/>
             <a:ext cx="734295" cy="785725"/>
           </a:xfrm>
@@ -10049,9 +10222,9 @@
             <a:gdLst/>
             <a:ahLst/>
             <a:cxnLst/>
-            <a:rect r="r" b="b" t="t" l="l"/>
+            <a:rect l="l" t="t" r="r" b="b"/>
             <a:pathLst>
-              <a:path h="785725" w="734295">
+              <a:path w="734295" h="785725">
                 <a:moveTo>
                   <a:pt x="0" y="0"/>
                 </a:moveTo>
@@ -10080,7 +10253,7 @@
               </a:extLst>
             </a:blip>
             <a:stretch>
-              <a:fillRect l="0" t="0" r="0" b="0"/>
+              <a:fillRect/>
             </a:stretch>
           </a:blipFill>
           <a:ln cap="sq">
@@ -10092,12 +10265,12 @@
       </p:sp>
       <p:sp>
         <p:nvSpPr>
-          <p:cNvPr name="Freeform 11" id="11"/>
+          <p:cNvPr id="11" name="Freeform 11"/>
           <p:cNvSpPr/>
           <p:nvPr/>
         </p:nvSpPr>
         <p:spPr>
-          <a:xfrm flipH="false" flipV="false" rot="0">
+          <a:xfrm>
             <a:off x="2693936" y="6450366"/>
             <a:ext cx="716656" cy="828069"/>
           </a:xfrm>
@@ -10106,9 +10279,9 @@
             <a:gdLst/>
             <a:ahLst/>
             <a:cxnLst/>
-            <a:rect r="r" b="b" t="t" l="l"/>
+            <a:rect l="l" t="t" r="r" b="b"/>
             <a:pathLst>
-              <a:path h="828069" w="716656">
+              <a:path w="716656" h="828069">
                 <a:moveTo>
                   <a:pt x="0" y="0"/>
                 </a:moveTo>
@@ -10137,7 +10310,7 @@
               </a:extLst>
             </a:blip>
             <a:stretch>
-              <a:fillRect l="0" t="0" r="0" b="0"/>
+              <a:fillRect/>
             </a:stretch>
           </a:blipFill>
           <a:ln cap="sq">
@@ -10149,12 +10322,12 @@
       </p:sp>
       <p:sp>
         <p:nvSpPr>
-          <p:cNvPr name="Freeform 12" id="12"/>
+          <p:cNvPr id="12" name="Freeform 12"/>
           <p:cNvSpPr/>
           <p:nvPr/>
         </p:nvSpPr>
         <p:spPr>
-          <a:xfrm flipH="false" flipV="false" rot="0">
+          <a:xfrm>
             <a:off x="5915622" y="4140911"/>
             <a:ext cx="771350" cy="768458"/>
           </a:xfrm>
@@ -10163,9 +10336,9 @@
             <a:gdLst/>
             <a:ahLst/>
             <a:cxnLst/>
-            <a:rect r="r" b="b" t="t" l="l"/>
+            <a:rect l="l" t="t" r="r" b="b"/>
             <a:pathLst>
-              <a:path h="768458" w="771350">
+              <a:path w="771350" h="768458">
                 <a:moveTo>
                   <a:pt x="0" y="0"/>
                 </a:moveTo>
@@ -10194,7 +10367,7 @@
               </a:extLst>
             </a:blip>
             <a:stretch>
-              <a:fillRect l="0" t="0" r="0" b="0"/>
+              <a:fillRect/>
             </a:stretch>
           </a:blipFill>
           <a:ln cap="sq">
@@ -10206,14 +10379,14 @@
       </p:sp>
       <p:grpSp>
         <p:nvGrpSpPr>
-          <p:cNvPr name="Group 13" id="13"/>
+          <p:cNvPr id="13" name="Group 13"/>
           <p:cNvGrpSpPr>
-            <a:grpSpLocks noChangeAspect="true"/>
+            <a:grpSpLocks noChangeAspect="1"/>
           </p:cNvGrpSpPr>
           <p:nvPr/>
         </p:nvGrpSpPr>
         <p:grpSpPr>
-          <a:xfrm rot="0">
+          <a:xfrm>
             <a:off x="11784128" y="2728068"/>
             <a:ext cx="5077445" cy="10046597"/>
             <a:chOff x="0" y="0"/>
@@ -10222,12 +10395,12 @@
         </p:grpSpPr>
         <p:sp>
           <p:nvSpPr>
-            <p:cNvPr name="Freeform 14" id="14"/>
+            <p:cNvPr id="14" name="Freeform 14"/>
             <p:cNvSpPr/>
             <p:nvPr/>
           </p:nvSpPr>
           <p:spPr>
-            <a:xfrm flipH="false" flipV="false" rot="0">
+            <a:xfrm>
               <a:off x="53340" y="25400"/>
               <a:ext cx="2513330" cy="5132070"/>
             </a:xfrm>
@@ -10236,9 +10409,9 @@
               <a:gdLst/>
               <a:ahLst/>
               <a:cxnLst/>
-              <a:rect r="r" b="b" t="t" l="l"/>
+              <a:rect l="l" t="t" r="r" b="b"/>
               <a:pathLst>
-                <a:path h="5132070" w="2513330">
+                <a:path w="2513330" h="5132070">
                   <a:moveTo>
                     <a:pt x="2159000" y="0"/>
                   </a:moveTo>
@@ -10397,23 +10570,23 @@
         </p:sp>
         <p:sp>
           <p:nvSpPr>
-            <p:cNvPr name="Freeform 15" id="15"/>
+            <p:cNvPr id="15" name="Freeform 15"/>
             <p:cNvSpPr/>
             <p:nvPr/>
           </p:nvSpPr>
           <p:spPr>
-            <a:xfrm flipH="false" flipV="false" rot="0">
+            <a:xfrm>
               <a:off x="185420" y="156210"/>
-              <a:ext cx="2251710" cy="4876800"/>
+              <a:ext cx="2250453" cy="4876800"/>
             </a:xfrm>
             <a:custGeom>
               <a:avLst/>
               <a:gdLst/>
               <a:ahLst/>
               <a:cxnLst/>
-              <a:rect r="r" b="b" t="t" l="l"/>
+              <a:rect l="l" t="t" r="r" b="b"/>
               <a:pathLst>
-                <a:path h="4876800" w="2251710">
+                <a:path w="2250453" h="4876800">
                   <a:moveTo>
                     <a:pt x="2040890" y="0"/>
                   </a:moveTo>
@@ -10478,19 +10651,19 @@
             <a:blipFill>
               <a:blip r:embed="rId11"/>
               <a:stretch>
-                <a:fillRect l="-8" t="0" r="-8" b="0"/>
+                <a:fillRect l="-4413" t="-2822" r="-5638" b="-5517"/>
               </a:stretch>
             </a:blipFill>
           </p:spPr>
         </p:sp>
         <p:sp>
           <p:nvSpPr>
-            <p:cNvPr name="Freeform 16" id="16"/>
+            <p:cNvPr id="16" name="Freeform 16"/>
             <p:cNvSpPr/>
             <p:nvPr/>
           </p:nvSpPr>
           <p:spPr>
-            <a:xfrm flipH="false" flipV="false" rot="0">
+            <a:xfrm>
               <a:off x="1121410" y="198120"/>
               <a:ext cx="347980" cy="43180"/>
             </a:xfrm>
@@ -10499,9 +10672,9 @@
               <a:gdLst/>
               <a:ahLst/>
               <a:cxnLst/>
-              <a:rect r="r" b="b" t="t" l="l"/>
+              <a:rect l="l" t="t" r="r" b="b"/>
               <a:pathLst>
-                <a:path h="43180" w="347980">
+                <a:path w="347980" h="43180">
                   <a:moveTo>
                     <a:pt x="326390" y="0"/>
                   </a:moveTo>
@@ -10542,55 +10715,55 @@
         </p:sp>
         <p:sp>
           <p:nvSpPr>
-            <p:cNvPr name="Freeform 17" id="17"/>
+            <p:cNvPr id="17" name="Freeform 17"/>
             <p:cNvSpPr/>
             <p:nvPr/>
           </p:nvSpPr>
           <p:spPr>
-            <a:xfrm flipH="false" flipV="false" rot="0">
-              <a:off x="1578312" y="187909"/>
-              <a:ext cx="66636" cy="63602"/>
+            <a:xfrm>
+              <a:off x="1579738" y="187960"/>
+              <a:ext cx="63785" cy="63501"/>
             </a:xfrm>
             <a:custGeom>
               <a:avLst/>
               <a:gdLst/>
               <a:ahLst/>
               <a:cxnLst/>
-              <a:rect r="r" b="b" t="t" l="l"/>
+              <a:rect l="l" t="t" r="r" b="b"/>
               <a:pathLst>
-                <a:path h="63602" w="66636">
+                <a:path w="63785" h="63501">
                   <a:moveTo>
-                    <a:pt x="33318" y="51"/>
+                    <a:pt x="31892" y="0"/>
                   </a:moveTo>
                   <a:cubicBezTo>
-                    <a:pt x="21941" y="0"/>
-                    <a:pt x="11406" y="6040"/>
-                    <a:pt x="5703" y="15885"/>
-                  </a:cubicBezTo>
-                  <a:cubicBezTo>
-                    <a:pt x="0" y="25729"/>
-                    <a:pt x="0" y="37873"/>
-                    <a:pt x="5703" y="47717"/>
-                  </a:cubicBezTo>
-                  <a:cubicBezTo>
-                    <a:pt x="11406" y="57562"/>
-                    <a:pt x="21941" y="63602"/>
-                    <a:pt x="33318" y="63551"/>
-                  </a:cubicBezTo>
-                  <a:cubicBezTo>
-                    <a:pt x="44695" y="63602"/>
-                    <a:pt x="55230" y="57562"/>
-                    <a:pt x="60933" y="47717"/>
-                  </a:cubicBezTo>
-                  <a:cubicBezTo>
-                    <a:pt x="66636" y="37873"/>
-                    <a:pt x="66636" y="25729"/>
-                    <a:pt x="60933" y="15885"/>
-                  </a:cubicBezTo>
-                  <a:cubicBezTo>
-                    <a:pt x="55230" y="6040"/>
-                    <a:pt x="44695" y="0"/>
-                    <a:pt x="33318" y="51"/>
+                    <a:pt x="20515" y="-51"/>
+                    <a:pt x="9980" y="5989"/>
+                    <a:pt x="4277" y="15834"/>
+                  </a:cubicBezTo>
+                  <a:cubicBezTo>
+                    <a:pt x="-1426" y="25678"/>
+                    <a:pt x="-1426" y="37822"/>
+                    <a:pt x="4277" y="47666"/>
+                  </a:cubicBezTo>
+                  <a:cubicBezTo>
+                    <a:pt x="9980" y="57511"/>
+                    <a:pt x="20515" y="63551"/>
+                    <a:pt x="31892" y="63500"/>
+                  </a:cubicBezTo>
+                  <a:cubicBezTo>
+                    <a:pt x="43269" y="63551"/>
+                    <a:pt x="53804" y="57511"/>
+                    <a:pt x="59507" y="47666"/>
+                  </a:cubicBezTo>
+                  <a:cubicBezTo>
+                    <a:pt x="65210" y="37822"/>
+                    <a:pt x="65210" y="25678"/>
+                    <a:pt x="59507" y="15834"/>
+                  </a:cubicBezTo>
+                  <a:cubicBezTo>
+                    <a:pt x="53804" y="5989"/>
+                    <a:pt x="43269" y="-51"/>
+                    <a:pt x="31892" y="0"/>
                   </a:cubicBezTo>
                   <a:close/>
                 </a:path>
@@ -10603,12 +10776,12 @@
         </p:sp>
         <p:sp>
           <p:nvSpPr>
-            <p:cNvPr name="Freeform 18" id="18"/>
+            <p:cNvPr id="18" name="Freeform 18"/>
             <p:cNvSpPr/>
             <p:nvPr/>
           </p:nvSpPr>
           <p:spPr>
-            <a:xfrm flipH="false" flipV="false" rot="0">
+            <a:xfrm>
               <a:off x="0" y="685800"/>
               <a:ext cx="27940" cy="213360"/>
             </a:xfrm>
@@ -10617,9 +10790,9 @@
               <a:gdLst/>
               <a:ahLst/>
               <a:cxnLst/>
-              <a:rect r="r" b="b" t="t" l="l"/>
+              <a:rect l="l" t="t" r="r" b="b"/>
               <a:pathLst>
-                <a:path h="213360" w="27940">
+                <a:path w="27940" h="213360">
                   <a:moveTo>
                     <a:pt x="0" y="26670"/>
                   </a:moveTo>
@@ -10650,12 +10823,12 @@
         </p:sp>
         <p:sp>
           <p:nvSpPr>
-            <p:cNvPr name="Freeform 19" id="19"/>
+            <p:cNvPr id="19" name="Freeform 19"/>
             <p:cNvSpPr/>
             <p:nvPr/>
           </p:nvSpPr>
           <p:spPr>
-            <a:xfrm flipH="false" flipV="false" rot="0">
+            <a:xfrm>
               <a:off x="0" y="1057910"/>
               <a:ext cx="27940" cy="384810"/>
             </a:xfrm>
@@ -10664,9 +10837,9 @@
               <a:gdLst/>
               <a:ahLst/>
               <a:cxnLst/>
-              <a:rect r="r" b="b" t="t" l="l"/>
+              <a:rect l="l" t="t" r="r" b="b"/>
               <a:pathLst>
-                <a:path h="384810" w="27940">
+                <a:path w="27940" h="384810">
                   <a:moveTo>
                     <a:pt x="0" y="26670"/>
                   </a:moveTo>
@@ -10697,12 +10870,12 @@
         </p:sp>
         <p:sp>
           <p:nvSpPr>
-            <p:cNvPr name="Freeform 20" id="20"/>
+            <p:cNvPr id="20" name="Freeform 20"/>
             <p:cNvSpPr/>
             <p:nvPr/>
           </p:nvSpPr>
           <p:spPr>
-            <a:xfrm flipH="false" flipV="false" rot="0">
+            <a:xfrm>
               <a:off x="0" y="1526540"/>
               <a:ext cx="27940" cy="386080"/>
             </a:xfrm>
@@ -10711,9 +10884,9 @@
               <a:gdLst/>
               <a:ahLst/>
               <a:cxnLst/>
-              <a:rect r="r" b="b" t="t" l="l"/>
+              <a:rect l="l" t="t" r="r" b="b"/>
               <a:pathLst>
-                <a:path h="386080" w="27940">
+                <a:path w="27940" h="386080">
                   <a:moveTo>
                     <a:pt x="0" y="27940"/>
                   </a:moveTo>
@@ -10744,12 +10917,12 @@
         </p:sp>
         <p:sp>
           <p:nvSpPr>
-            <p:cNvPr name="Freeform 21" id="21"/>
+            <p:cNvPr id="21" name="Freeform 21"/>
             <p:cNvSpPr/>
             <p:nvPr/>
           </p:nvSpPr>
           <p:spPr>
-            <a:xfrm flipH="false" flipV="false" rot="0">
+            <a:xfrm>
               <a:off x="2592070" y="1184910"/>
               <a:ext cx="27940" cy="618490"/>
             </a:xfrm>
@@ -10758,9 +10931,9 @@
               <a:gdLst/>
               <a:ahLst/>
               <a:cxnLst/>
-              <a:rect r="r" b="b" t="t" l="l"/>
+              <a:rect l="l" t="t" r="r" b="b"/>
               <a:pathLst>
-                <a:path h="618490" w="27940">
+                <a:path w="27940" h="618490">
                   <a:moveTo>
                     <a:pt x="0" y="0"/>
                   </a:moveTo>
@@ -10791,12 +10964,12 @@
         </p:sp>
         <p:sp>
           <p:nvSpPr>
-            <p:cNvPr name="Freeform 22" id="22"/>
+            <p:cNvPr id="22" name="Freeform 22"/>
             <p:cNvSpPr/>
             <p:nvPr/>
           </p:nvSpPr>
           <p:spPr>
-            <a:xfrm flipH="false" flipV="false" rot="0">
+            <a:xfrm>
               <a:off x="27940" y="0"/>
               <a:ext cx="2564130" cy="5182870"/>
             </a:xfrm>
@@ -10805,9 +10978,9 @@
               <a:gdLst/>
               <a:ahLst/>
               <a:cxnLst/>
-              <a:rect r="r" b="b" t="t" l="l"/>
+              <a:rect l="l" t="t" r="r" b="b"/>
               <a:pathLst>
-                <a:path h="5182870" w="2564130">
+                <a:path w="2564130" h="5182870">
                   <a:moveTo>
                     <a:pt x="2564130" y="1184910"/>
                   </a:moveTo>
@@ -10967,14 +11140,14 @@
       </p:grpSp>
       <p:grpSp>
         <p:nvGrpSpPr>
-          <p:cNvPr name="Group 23" id="23"/>
+          <p:cNvPr id="23" name="Group 23"/>
           <p:cNvGrpSpPr>
-            <a:grpSpLocks noChangeAspect="true"/>
+            <a:grpSpLocks noChangeAspect="1"/>
           </p:cNvGrpSpPr>
           <p:nvPr/>
         </p:nvGrpSpPr>
         <p:grpSpPr>
-          <a:xfrm rot="0">
+          <a:xfrm>
             <a:off x="9255637" y="5624826"/>
             <a:ext cx="4245624" cy="8400697"/>
             <a:chOff x="0" y="0"/>
@@ -10983,12 +11156,12 @@
         </p:grpSpPr>
         <p:sp>
           <p:nvSpPr>
-            <p:cNvPr name="Freeform 24" id="24"/>
+            <p:cNvPr id="24" name="Freeform 24"/>
             <p:cNvSpPr/>
             <p:nvPr/>
           </p:nvSpPr>
           <p:spPr>
-            <a:xfrm flipH="false" flipV="false" rot="0">
+            <a:xfrm>
               <a:off x="53340" y="25400"/>
               <a:ext cx="2513330" cy="5132070"/>
             </a:xfrm>
@@ -10997,9 +11170,9 @@
               <a:gdLst/>
               <a:ahLst/>
               <a:cxnLst/>
-              <a:rect r="r" b="b" t="t" l="l"/>
+              <a:rect l="l" t="t" r="r" b="b"/>
               <a:pathLst>
-                <a:path h="5132070" w="2513330">
+                <a:path w="2513330" h="5132070">
                   <a:moveTo>
                     <a:pt x="2159000" y="0"/>
                   </a:moveTo>
@@ -11158,23 +11331,23 @@
         </p:sp>
         <p:sp>
           <p:nvSpPr>
-            <p:cNvPr name="Freeform 25" id="25"/>
+            <p:cNvPr id="25" name="Freeform 25"/>
             <p:cNvSpPr/>
             <p:nvPr/>
           </p:nvSpPr>
           <p:spPr>
-            <a:xfrm flipH="false" flipV="false" rot="0">
+            <a:xfrm>
               <a:off x="185420" y="156210"/>
-              <a:ext cx="2251710" cy="4876800"/>
+              <a:ext cx="2250453" cy="4876800"/>
             </a:xfrm>
             <a:custGeom>
               <a:avLst/>
               <a:gdLst/>
               <a:ahLst/>
               <a:cxnLst/>
-              <a:rect r="r" b="b" t="t" l="l"/>
+              <a:rect l="l" t="t" r="r" b="b"/>
               <a:pathLst>
-                <a:path h="4876800" w="2251710">
+                <a:path w="2250453" h="4876800">
                   <a:moveTo>
                     <a:pt x="2040890" y="0"/>
                   </a:moveTo>
@@ -11239,19 +11412,19 @@
             <a:blipFill>
               <a:blip r:embed="rId12"/>
               <a:stretch>
-                <a:fillRect l="-8" t="0" r="-8" b="0"/>
+                <a:fillRect l="-4082" t="-3231" r="-4283" b="-4599"/>
               </a:stretch>
             </a:blipFill>
           </p:spPr>
         </p:sp>
         <p:sp>
           <p:nvSpPr>
-            <p:cNvPr name="Freeform 26" id="26"/>
+            <p:cNvPr id="26" name="Freeform 26"/>
             <p:cNvSpPr/>
             <p:nvPr/>
           </p:nvSpPr>
           <p:spPr>
-            <a:xfrm flipH="false" flipV="false" rot="0">
+            <a:xfrm>
               <a:off x="1121410" y="198120"/>
               <a:ext cx="347980" cy="43180"/>
             </a:xfrm>
@@ -11260,9 +11433,9 @@
               <a:gdLst/>
               <a:ahLst/>
               <a:cxnLst/>
-              <a:rect r="r" b="b" t="t" l="l"/>
+              <a:rect l="l" t="t" r="r" b="b"/>
               <a:pathLst>
-                <a:path h="43180" w="347980">
+                <a:path w="347980" h="43180">
                   <a:moveTo>
                     <a:pt x="326390" y="0"/>
                   </a:moveTo>
@@ -11303,55 +11476,55 @@
         </p:sp>
         <p:sp>
           <p:nvSpPr>
-            <p:cNvPr name="Freeform 27" id="27"/>
+            <p:cNvPr id="27" name="Freeform 27"/>
             <p:cNvSpPr/>
             <p:nvPr/>
           </p:nvSpPr>
           <p:spPr>
-            <a:xfrm flipH="false" flipV="false" rot="0">
-              <a:off x="1578312" y="187909"/>
-              <a:ext cx="66636" cy="63602"/>
+            <a:xfrm>
+              <a:off x="1579738" y="187960"/>
+              <a:ext cx="63785" cy="63501"/>
             </a:xfrm>
             <a:custGeom>
               <a:avLst/>
               <a:gdLst/>
               <a:ahLst/>
               <a:cxnLst/>
-              <a:rect r="r" b="b" t="t" l="l"/>
+              <a:rect l="l" t="t" r="r" b="b"/>
               <a:pathLst>
-                <a:path h="63602" w="66636">
+                <a:path w="63785" h="63501">
                   <a:moveTo>
-                    <a:pt x="33318" y="51"/>
+                    <a:pt x="31892" y="0"/>
                   </a:moveTo>
                   <a:cubicBezTo>
-                    <a:pt x="21941" y="0"/>
-                    <a:pt x="11406" y="6040"/>
-                    <a:pt x="5703" y="15885"/>
-                  </a:cubicBezTo>
-                  <a:cubicBezTo>
-                    <a:pt x="0" y="25729"/>
-                    <a:pt x="0" y="37873"/>
-                    <a:pt x="5703" y="47717"/>
-                  </a:cubicBezTo>
-                  <a:cubicBezTo>
-                    <a:pt x="11406" y="57562"/>
-                    <a:pt x="21941" y="63602"/>
-                    <a:pt x="33318" y="63551"/>
-                  </a:cubicBezTo>
-                  <a:cubicBezTo>
-                    <a:pt x="44695" y="63602"/>
-                    <a:pt x="55230" y="57562"/>
-                    <a:pt x="60933" y="47717"/>
-                  </a:cubicBezTo>
-                  <a:cubicBezTo>
-                    <a:pt x="66636" y="37873"/>
-                    <a:pt x="66636" y="25729"/>
-                    <a:pt x="60933" y="15885"/>
-                  </a:cubicBezTo>
-                  <a:cubicBezTo>
-                    <a:pt x="55230" y="6040"/>
-                    <a:pt x="44695" y="0"/>
-                    <a:pt x="33318" y="51"/>
+                    <a:pt x="20515" y="-51"/>
+                    <a:pt x="9980" y="5989"/>
+                    <a:pt x="4277" y="15834"/>
+                  </a:cubicBezTo>
+                  <a:cubicBezTo>
+                    <a:pt x="-1426" y="25678"/>
+                    <a:pt x="-1426" y="37822"/>
+                    <a:pt x="4277" y="47666"/>
+                  </a:cubicBezTo>
+                  <a:cubicBezTo>
+                    <a:pt x="9980" y="57511"/>
+                    <a:pt x="20515" y="63551"/>
+                    <a:pt x="31892" y="63500"/>
+                  </a:cubicBezTo>
+                  <a:cubicBezTo>
+                    <a:pt x="43269" y="63551"/>
+                    <a:pt x="53804" y="57511"/>
+                    <a:pt x="59507" y="47666"/>
+                  </a:cubicBezTo>
+                  <a:cubicBezTo>
+                    <a:pt x="65210" y="37822"/>
+                    <a:pt x="65210" y="25678"/>
+                    <a:pt x="59507" y="15834"/>
+                  </a:cubicBezTo>
+                  <a:cubicBezTo>
+                    <a:pt x="53804" y="5989"/>
+                    <a:pt x="43269" y="-51"/>
+                    <a:pt x="31892" y="0"/>
                   </a:cubicBezTo>
                   <a:close/>
                 </a:path>
@@ -11364,12 +11537,12 @@
         </p:sp>
         <p:sp>
           <p:nvSpPr>
-            <p:cNvPr name="Freeform 28" id="28"/>
+            <p:cNvPr id="28" name="Freeform 28"/>
             <p:cNvSpPr/>
             <p:nvPr/>
           </p:nvSpPr>
           <p:spPr>
-            <a:xfrm flipH="false" flipV="false" rot="0">
+            <a:xfrm>
               <a:off x="0" y="685800"/>
               <a:ext cx="27940" cy="213360"/>
             </a:xfrm>
@@ -11378,9 +11551,9 @@
               <a:gdLst/>
               <a:ahLst/>
               <a:cxnLst/>
-              <a:rect r="r" b="b" t="t" l="l"/>
+              <a:rect l="l" t="t" r="r" b="b"/>
               <a:pathLst>
-                <a:path h="213360" w="27940">
+                <a:path w="27940" h="213360">
                   <a:moveTo>
                     <a:pt x="0" y="26670"/>
                   </a:moveTo>
@@ -11411,12 +11584,12 @@
         </p:sp>
         <p:sp>
           <p:nvSpPr>
-            <p:cNvPr name="Freeform 29" id="29"/>
+            <p:cNvPr id="29" name="Freeform 29"/>
             <p:cNvSpPr/>
             <p:nvPr/>
           </p:nvSpPr>
           <p:spPr>
-            <a:xfrm flipH="false" flipV="false" rot="0">
+            <a:xfrm>
               <a:off x="0" y="1057910"/>
               <a:ext cx="27940" cy="384810"/>
             </a:xfrm>
@@ -11425,9 +11598,9 @@
               <a:gdLst/>
               <a:ahLst/>
               <a:cxnLst/>
-              <a:rect r="r" b="b" t="t" l="l"/>
+              <a:rect l="l" t="t" r="r" b="b"/>
               <a:pathLst>
-                <a:path h="384810" w="27940">
+                <a:path w="27940" h="384810">
                   <a:moveTo>
                     <a:pt x="0" y="26670"/>
                   </a:moveTo>
@@ -11458,12 +11631,12 @@
         </p:sp>
         <p:sp>
           <p:nvSpPr>
-            <p:cNvPr name="Freeform 30" id="30"/>
+            <p:cNvPr id="30" name="Freeform 30"/>
             <p:cNvSpPr/>
             <p:nvPr/>
           </p:nvSpPr>
           <p:spPr>
-            <a:xfrm flipH="false" flipV="false" rot="0">
+            <a:xfrm>
               <a:off x="0" y="1526540"/>
               <a:ext cx="27940" cy="386080"/>
             </a:xfrm>
@@ -11472,9 +11645,9 @@
               <a:gdLst/>
               <a:ahLst/>
               <a:cxnLst/>
-              <a:rect r="r" b="b" t="t" l="l"/>
+              <a:rect l="l" t="t" r="r" b="b"/>
               <a:pathLst>
-                <a:path h="386080" w="27940">
+                <a:path w="27940" h="386080">
                   <a:moveTo>
                     <a:pt x="0" y="27940"/>
                   </a:moveTo>
@@ -11505,12 +11678,12 @@
         </p:sp>
         <p:sp>
           <p:nvSpPr>
-            <p:cNvPr name="Freeform 31" id="31"/>
+            <p:cNvPr id="31" name="Freeform 31"/>
             <p:cNvSpPr/>
             <p:nvPr/>
           </p:nvSpPr>
           <p:spPr>
-            <a:xfrm flipH="false" flipV="false" rot="0">
+            <a:xfrm>
               <a:off x="2592070" y="1184910"/>
               <a:ext cx="27940" cy="618490"/>
             </a:xfrm>
@@ -11519,9 +11692,9 @@
               <a:gdLst/>
               <a:ahLst/>
               <a:cxnLst/>
-              <a:rect r="r" b="b" t="t" l="l"/>
+              <a:rect l="l" t="t" r="r" b="b"/>
               <a:pathLst>
-                <a:path h="618490" w="27940">
+                <a:path w="27940" h="618490">
                   <a:moveTo>
                     <a:pt x="0" y="0"/>
                   </a:moveTo>
@@ -11552,12 +11725,12 @@
         </p:sp>
         <p:sp>
           <p:nvSpPr>
-            <p:cNvPr name="Freeform 32" id="32"/>
+            <p:cNvPr id="32" name="Freeform 32"/>
             <p:cNvSpPr/>
             <p:nvPr/>
           </p:nvSpPr>
           <p:spPr>
-            <a:xfrm flipH="false" flipV="false" rot="0">
+            <a:xfrm>
               <a:off x="27940" y="0"/>
               <a:ext cx="2564130" cy="5182870"/>
             </a:xfrm>
@@ -11566,9 +11739,9 @@
               <a:gdLst/>
               <a:ahLst/>
               <a:cxnLst/>
-              <a:rect r="r" b="b" t="t" l="l"/>
+              <a:rect l="l" t="t" r="r" b="b"/>
               <a:pathLst>
-                <a:path h="5182870" w="2564130">
+                <a:path w="2564130" h="5182870">
                   <a:moveTo>
                     <a:pt x="2564130" y="1184910"/>
                   </a:moveTo>
@@ -11728,12 +11901,12 @@
       </p:grpSp>
       <p:sp>
         <p:nvSpPr>
-          <p:cNvPr name="TextBox 33" id="33"/>
-          <p:cNvSpPr txBox="true"/>
+          <p:cNvPr id="33" name="TextBox 33"/>
+          <p:cNvSpPr txBox="1"/>
           <p:nvPr/>
         </p:nvSpPr>
         <p:spPr>
-          <a:xfrm rot="0">
+          <a:xfrm>
             <a:off x="1700457" y="5168058"/>
             <a:ext cx="2721964" cy="375808"/>
           </a:xfrm>
@@ -11742,7 +11915,7 @@
           </a:prstGeom>
         </p:spPr>
         <p:txBody>
-          <a:bodyPr anchor="t" rtlCol="false" tIns="0" lIns="0" bIns="0" rIns="0">
+          <a:bodyPr lIns="0" tIns="0" rIns="0" bIns="0" rtlCol="0" anchor="t">
             <a:spAutoFit/>
           </a:bodyPr>
           <a:lstStyle/>
@@ -11753,7 +11926,7 @@
               </a:lnSpc>
             </a:pPr>
             <a:r>
-              <a:rPr lang="en-US" b="true" sz="2342">
+              <a:rPr lang="en-US" sz="2342" b="1">
                 <a:solidFill>
                   <a:srgbClr val="000000"/>
                 </a:solidFill>
@@ -11762,31 +11935,19 @@
                 <a:cs typeface="HK Grotesk Medium"/>
                 <a:sym typeface="HK Grotesk Medium"/>
               </a:rPr>
-              <a:t>Comparar</a:t>
-            </a:r>
-            <a:r>
-              <a:rPr lang="en-US" b="true" sz="2342">
-                <a:solidFill>
-                  <a:srgbClr val="000000"/>
-                </a:solidFill>
-                <a:latin typeface="HK Grotesk Medium"/>
-                <a:ea typeface="HK Grotesk Medium"/>
-                <a:cs typeface="HK Grotesk Medium"/>
-                <a:sym typeface="HK Grotesk Medium"/>
-              </a:rPr>
-              <a:t> precios</a:t>
+              <a:t>Comparar precios</a:t>
             </a:r>
           </a:p>
         </p:txBody>
       </p:sp>
       <p:sp>
         <p:nvSpPr>
-          <p:cNvPr name="TextBox 34" id="34"/>
-          <p:cNvSpPr txBox="true"/>
+          <p:cNvPr id="34" name="TextBox 34"/>
+          <p:cNvSpPr txBox="1"/>
           <p:nvPr/>
         </p:nvSpPr>
         <p:spPr>
-          <a:xfrm rot="0">
+          <a:xfrm>
             <a:off x="4940315" y="5168058"/>
             <a:ext cx="2721964" cy="375808"/>
           </a:xfrm>
@@ -11795,7 +11956,7 @@
           </a:prstGeom>
         </p:spPr>
         <p:txBody>
-          <a:bodyPr anchor="t" rtlCol="false" tIns="0" lIns="0" bIns="0" rIns="0">
+          <a:bodyPr lIns="0" tIns="0" rIns="0" bIns="0" rtlCol="0" anchor="t">
             <a:spAutoFit/>
           </a:bodyPr>
           <a:lstStyle/>
@@ -11806,7 +11967,7 @@
               </a:lnSpc>
             </a:pPr>
             <a:r>
-              <a:rPr lang="en-US" b="true" sz="2342">
+              <a:rPr lang="en-US" sz="2342" b="1">
                 <a:solidFill>
                   <a:srgbClr val="000000"/>
                 </a:solidFill>
@@ -11822,12 +11983,12 @@
       </p:sp>
       <p:sp>
         <p:nvSpPr>
-          <p:cNvPr name="TextBox 35" id="35"/>
-          <p:cNvSpPr txBox="true"/>
+          <p:cNvPr id="35" name="TextBox 35"/>
+          <p:cNvSpPr txBox="1"/>
           <p:nvPr/>
         </p:nvSpPr>
         <p:spPr>
-          <a:xfrm rot="0">
+          <a:xfrm>
             <a:off x="1700457" y="7457087"/>
             <a:ext cx="2721964" cy="762321"/>
           </a:xfrm>
@@ -11836,7 +11997,7 @@
           </a:prstGeom>
         </p:spPr>
         <p:txBody>
-          <a:bodyPr anchor="t" rtlCol="false" tIns="0" lIns="0" bIns="0" rIns="0">
+          <a:bodyPr lIns="0" tIns="0" rIns="0" bIns="0" rtlCol="0" anchor="t">
             <a:spAutoFit/>
           </a:bodyPr>
           <a:lstStyle/>
@@ -11847,7 +12008,7 @@
               </a:lnSpc>
             </a:pPr>
             <a:r>
-              <a:rPr lang="en-US" b="true" sz="2342">
+              <a:rPr lang="en-US" sz="2342" b="1">
                 <a:solidFill>
                   <a:srgbClr val="000000"/>
                 </a:solidFill>
@@ -11856,31 +12017,19 @@
                 <a:cs typeface="HK Grotesk Medium"/>
                 <a:sym typeface="HK Grotesk Medium"/>
               </a:rPr>
-              <a:t>R</a:t>
-            </a:r>
-            <a:r>
-              <a:rPr lang="en-US" b="true" sz="2342">
-                <a:solidFill>
-                  <a:srgbClr val="000000"/>
-                </a:solidFill>
-                <a:latin typeface="HK Grotesk Medium"/>
-                <a:ea typeface="HK Grotesk Medium"/>
-                <a:cs typeface="HK Grotesk Medium"/>
-                <a:sym typeface="HK Grotesk Medium"/>
-              </a:rPr>
-              <a:t>evisar el historial de variaciones </a:t>
+              <a:t>Revisar el historial de variaciones </a:t>
             </a:r>
           </a:p>
         </p:txBody>
       </p:sp>
       <p:sp>
         <p:nvSpPr>
-          <p:cNvPr name="TextBox 36" id="36"/>
-          <p:cNvSpPr txBox="true"/>
+          <p:cNvPr id="36" name="TextBox 36"/>
+          <p:cNvSpPr txBox="1"/>
           <p:nvPr/>
         </p:nvSpPr>
         <p:spPr>
-          <a:xfrm rot="0">
+          <a:xfrm>
             <a:off x="4940315" y="7457087"/>
             <a:ext cx="2721964" cy="375808"/>
           </a:xfrm>
@@ -11889,7 +12038,7 @@
           </a:prstGeom>
         </p:spPr>
         <p:txBody>
-          <a:bodyPr anchor="t" rtlCol="false" tIns="0" lIns="0" bIns="0" rIns="0">
+          <a:bodyPr lIns="0" tIns="0" rIns="0" bIns="0" rtlCol="0" anchor="t">
             <a:spAutoFit/>
           </a:bodyPr>
           <a:lstStyle/>
@@ -11900,7 +12049,7 @@
               </a:lnSpc>
             </a:pPr>
             <a:r>
-              <a:rPr lang="en-US" b="true" sz="2342">
+              <a:rPr lang="en-US" sz="2342" b="1">
                 <a:solidFill>
                   <a:srgbClr val="000000"/>
                 </a:solidFill>
@@ -11909,105 +12058,108 @@
                 <a:cs typeface="HK Grotesk Medium"/>
                 <a:sym typeface="HK Grotesk Medium"/>
               </a:rPr>
-              <a:t>Gua</a:t>
-            </a:r>
-            <a:r>
-              <a:rPr lang="en-US" b="true" sz="2342">
-                <a:solidFill>
-                  <a:srgbClr val="000000"/>
-                </a:solidFill>
-                <a:latin typeface="HK Grotesk Medium"/>
-                <a:ea typeface="HK Grotesk Medium"/>
-                <a:cs typeface="HK Grotesk Medium"/>
-                <a:sym typeface="HK Grotesk Medium"/>
-              </a:rPr>
-              <a:t>rdar favoritos</a:t>
+              <a:t>Guardar favoritos</a:t>
             </a:r>
           </a:p>
         </p:txBody>
       </p:sp>
-      <p:sp>
-        <p:nvSpPr>
-          <p:cNvPr name="TextBox 37" id="37"/>
-          <p:cNvSpPr txBox="true"/>
+      <p:grpSp>
+        <p:nvGrpSpPr>
+          <p:cNvPr id="37" name="Group 37"/>
+          <p:cNvGrpSpPr/>
           <p:nvPr/>
-        </p:nvSpPr>
-        <p:spPr>
-          <a:xfrm rot="0">
-            <a:off x="1028700" y="2661393"/>
-            <a:ext cx="8084062" cy="575891"/>
+        </p:nvGrpSpPr>
+        <p:grpSpPr>
+          <a:xfrm>
+            <a:off x="1028700" y="1471567"/>
+            <a:ext cx="8084062" cy="1765717"/>
+            <a:chOff x="0" y="0"/>
+            <a:chExt cx="10778749" cy="2354289"/>
           </a:xfrm>
-          <a:prstGeom prst="rect">
-            <a:avLst/>
-          </a:prstGeom>
-        </p:spPr>
-        <p:txBody>
-          <a:bodyPr anchor="t" rtlCol="false" tIns="0" lIns="0" bIns="0" rIns="0">
-            <a:spAutoFit/>
-          </a:bodyPr>
-          <a:lstStyle/>
-          <a:p>
-            <a:pPr algn="l" marL="0" indent="0" lvl="0">
-              <a:lnSpc>
-                <a:spcPts val="4396"/>
-              </a:lnSpc>
-            </a:pPr>
-            <a:r>
-              <a:rPr lang="en-US" b="true" sz="3381" spc="101">
-                <a:solidFill>
-                  <a:srgbClr val="000000"/>
-                </a:solidFill>
-                <a:latin typeface="Poppins Bold"/>
-                <a:ea typeface="Poppins Bold"/>
-                <a:cs typeface="Poppins Bold"/>
-                <a:sym typeface="Poppins Bold"/>
-              </a:rPr>
-              <a:t>del Sistema</a:t>
-            </a:r>
-          </a:p>
-        </p:txBody>
-      </p:sp>
-      <p:sp>
-        <p:nvSpPr>
-          <p:cNvPr name="TextBox 38" id="38"/>
-          <p:cNvSpPr txBox="true"/>
-          <p:nvPr/>
-        </p:nvSpPr>
-        <p:spPr>
-          <a:xfrm rot="0">
-            <a:off x="1028700" y="1319167"/>
-            <a:ext cx="8084062" cy="1273288"/>
-          </a:xfrm>
-          <a:prstGeom prst="rect">
-            <a:avLst/>
-          </a:prstGeom>
-        </p:spPr>
-        <p:txBody>
-          <a:bodyPr anchor="t" rtlCol="false" tIns="0" lIns="0" bIns="0" rIns="0">
-            <a:spAutoFit/>
-          </a:bodyPr>
-          <a:lstStyle/>
-          <a:p>
-            <a:pPr algn="l" marL="0" indent="0" lvl="0">
-              <a:lnSpc>
-                <a:spcPts val="9608"/>
-              </a:lnSpc>
-            </a:pPr>
-            <a:r>
-              <a:rPr lang="en-US" b="true" sz="7391">
-                <a:solidFill>
-                  <a:srgbClr val="707070"/>
-                </a:solidFill>
-                <a:latin typeface="Poppins Bold"/>
-                <a:ea typeface="Poppins Bold"/>
-                <a:cs typeface="Poppins Bold"/>
-                <a:sym typeface="Poppins Bold"/>
-              </a:rPr>
-              <a:t>Funcionamiento</a:t>
-            </a:r>
-          </a:p>
-        </p:txBody>
-      </p:sp>
+        </p:grpSpPr>
+        <p:sp>
+          <p:nvSpPr>
+            <p:cNvPr id="38" name="TextBox 38"/>
+            <p:cNvSpPr txBox="1"/>
+            <p:nvPr/>
+          </p:nvSpPr>
+          <p:spPr>
+            <a:xfrm>
+              <a:off x="0" y="1608660"/>
+              <a:ext cx="10778749" cy="745629"/>
+            </a:xfrm>
+            <a:prstGeom prst="rect">
+              <a:avLst/>
+            </a:prstGeom>
+          </p:spPr>
+          <p:txBody>
+            <a:bodyPr lIns="0" tIns="0" rIns="0" bIns="0" rtlCol="0" anchor="t">
+              <a:spAutoFit/>
+            </a:bodyPr>
+            <a:lstStyle/>
+            <a:p>
+              <a:pPr marL="0" lvl="0" indent="0" algn="l">
+                <a:lnSpc>
+                  <a:spcPts val="4396"/>
+                </a:lnSpc>
+              </a:pPr>
+              <a:r>
+                <a:rPr lang="en-US" sz="3381" b="1" spc="101">
+                  <a:solidFill>
+                    <a:srgbClr val="000000"/>
+                  </a:solidFill>
+                  <a:latin typeface="Poppins Bold"/>
+                  <a:ea typeface="Poppins Bold"/>
+                  <a:cs typeface="Poppins Bold"/>
+                  <a:sym typeface="Poppins Bold"/>
+                </a:rPr>
+                <a:t>del Sistema</a:t>
+              </a:r>
+            </a:p>
+          </p:txBody>
+        </p:sp>
+        <p:sp>
+          <p:nvSpPr>
+            <p:cNvPr id="39" name="TextBox 39"/>
+            <p:cNvSpPr txBox="1"/>
+            <p:nvPr/>
+          </p:nvSpPr>
+          <p:spPr>
+            <a:xfrm>
+              <a:off x="0" y="-152400"/>
+              <a:ext cx="10778749" cy="1646918"/>
+            </a:xfrm>
+            <a:prstGeom prst="rect">
+              <a:avLst/>
+            </a:prstGeom>
+          </p:spPr>
+          <p:txBody>
+            <a:bodyPr lIns="0" tIns="0" rIns="0" bIns="0" rtlCol="0" anchor="t">
+              <a:spAutoFit/>
+            </a:bodyPr>
+            <a:lstStyle/>
+            <a:p>
+              <a:pPr marL="0" lvl="0" indent="0" algn="l">
+                <a:lnSpc>
+                  <a:spcPts val="9608"/>
+                </a:lnSpc>
+              </a:pPr>
+              <a:r>
+                <a:rPr lang="en-US" sz="7391" b="1">
+                  <a:solidFill>
+                    <a:srgbClr val="707070"/>
+                  </a:solidFill>
+                  <a:latin typeface="Poppins Bold"/>
+                  <a:ea typeface="Poppins Bold"/>
+                  <a:cs typeface="Poppins Bold"/>
+                  <a:sym typeface="Poppins Bold"/>
+                </a:rPr>
+                <a:t>Funcionamiento</a:t>
+              </a:r>
+            </a:p>
+          </p:txBody>
+        </p:sp>
+      </p:grpSp>
     </p:spTree>
   </p:cSld>
   <p:clrMapOvr>
@@ -12017,7 +12169,7 @@
 </file>
 
 <file path=ppt/slides/slide9.xml><?xml version="1.0" encoding="utf-8"?>
-<p:sld xmlns:p="http://schemas.openxmlformats.org/presentationml/2006/main" xmlns:a="http://schemas.openxmlformats.org/drawingml/2006/main" xmlns:r="http://schemas.openxmlformats.org/officeDocument/2006/relationships">
+<p:sld xmlns:a="http://schemas.openxmlformats.org/drawingml/2006/main" xmlns:r="http://schemas.openxmlformats.org/officeDocument/2006/relationships" xmlns:p="http://schemas.openxmlformats.org/presentationml/2006/main">
   <p:cSld>
     <p:spTree>
       <p:nvGrpSpPr>
@@ -12035,12 +12187,12 @@
       </p:grpSpPr>
       <p:sp>
         <p:nvSpPr>
-          <p:cNvPr name="Freeform 2" id="2"/>
+          <p:cNvPr id="2" name="Freeform 2"/>
           <p:cNvSpPr/>
           <p:nvPr/>
         </p:nvSpPr>
         <p:spPr>
-          <a:xfrm flipH="false" flipV="false" rot="0">
+          <a:xfrm>
             <a:off x="0" y="0"/>
             <a:ext cx="18288000" cy="10287000"/>
           </a:xfrm>
@@ -12049,9 +12201,9 @@
             <a:gdLst/>
             <a:ahLst/>
             <a:cxnLst/>
-            <a:rect r="r" b="b" t="t" l="l"/>
+            <a:rect l="l" t="t" r="r" b="b"/>
             <a:pathLst>
-              <a:path h="10287000" w="18288000">
+              <a:path w="18288000" h="10287000">
                 <a:moveTo>
                   <a:pt x="0" y="0"/>
                 </a:moveTo>
@@ -12074,14 +12226,14 @@
           <a:blipFill>
             <a:blip r:embed="rId2"/>
             <a:stretch>
-              <a:fillRect l="-11643" t="0" r="-11643" b="0"/>
+              <a:fillRect l="-11643" r="-11643"/>
             </a:stretch>
           </a:blipFill>
         </p:spPr>
       </p:sp>
       <p:grpSp>
         <p:nvGrpSpPr>
-          <p:cNvPr name="Group 3" id="3"/>
+          <p:cNvPr id="3" name="Group 3"/>
           <p:cNvGrpSpPr/>
           <p:nvPr/>
         </p:nvGrpSpPr>
@@ -12095,12 +12247,12 @@
         </p:grpSpPr>
         <p:sp>
           <p:nvSpPr>
-            <p:cNvPr name="Freeform 4" id="4"/>
+            <p:cNvPr id="4" name="Freeform 4"/>
             <p:cNvSpPr/>
             <p:nvPr/>
           </p:nvSpPr>
           <p:spPr>
-            <a:xfrm flipH="false" flipV="false" rot="0">
+            <a:xfrm>
               <a:off x="0" y="0"/>
               <a:ext cx="812800" cy="812800"/>
             </a:xfrm>
@@ -12109,9 +12261,9 @@
               <a:gdLst/>
               <a:ahLst/>
               <a:cxnLst/>
-              <a:rect r="r" b="b" t="t" l="l"/>
+              <a:rect l="l" t="t" r="r" b="b"/>
               <a:pathLst>
-                <a:path h="812800" w="812800">
+                <a:path w="812800" h="812800">
                   <a:moveTo>
                     <a:pt x="406400" y="0"/>
                   </a:moveTo>
@@ -12177,8 +12329,8 @@
         </p:sp>
         <p:sp>
           <p:nvSpPr>
-            <p:cNvPr name="TextBox 5" id="5"/>
-            <p:cNvSpPr txBox="true"/>
+            <p:cNvPr id="5" name="TextBox 5"/>
+            <p:cNvSpPr txBox="1"/>
             <p:nvPr/>
           </p:nvSpPr>
           <p:spPr>
@@ -12191,7 +12343,7 @@
             </a:prstGeom>
           </p:spPr>
           <p:txBody>
-            <a:bodyPr anchor="ctr" rtlCol="false" tIns="50800" lIns="50800" bIns="50800" rIns="50800"/>
+            <a:bodyPr lIns="50800" tIns="50800" rIns="50800" bIns="50800" rtlCol="0" anchor="ctr"/>
             <a:lstStyle/>
             <a:p>
               <a:pPr algn="ctr">
@@ -12199,13 +12351,14 @@
                   <a:spcPts val="2520"/>
                 </a:lnSpc>
               </a:pPr>
+              <a:endParaRPr/>
             </a:p>
           </p:txBody>
         </p:sp>
       </p:grpSp>
       <p:grpSp>
         <p:nvGrpSpPr>
-          <p:cNvPr name="Group 6" id="6"/>
+          <p:cNvPr id="6" name="Group 6"/>
           <p:cNvGrpSpPr/>
           <p:nvPr/>
         </p:nvGrpSpPr>
@@ -12219,12 +12372,12 @@
         </p:grpSpPr>
         <p:sp>
           <p:nvSpPr>
-            <p:cNvPr name="Freeform 7" id="7"/>
+            <p:cNvPr id="7" name="Freeform 7"/>
             <p:cNvSpPr/>
             <p:nvPr/>
           </p:nvSpPr>
           <p:spPr>
-            <a:xfrm flipH="false" flipV="false" rot="0">
+            <a:xfrm>
               <a:off x="0" y="0"/>
               <a:ext cx="513191" cy="651052"/>
             </a:xfrm>
@@ -12233,9 +12386,9 @@
               <a:gdLst/>
               <a:ahLst/>
               <a:cxnLst/>
-              <a:rect r="r" b="b" t="t" l="l"/>
+              <a:rect l="l" t="t" r="r" b="b"/>
               <a:pathLst>
-                <a:path h="651052" w="513191">
+                <a:path w="513191" h="651052">
                   <a:moveTo>
                     <a:pt x="246340" y="0"/>
                   </a:moveTo>
@@ -12295,7 +12448,7 @@
                 </a:path>
               </a:pathLst>
             </a:custGeom>
-            <a:gradFill rotWithShape="true">
+            <a:gradFill rotWithShape="1">
               <a:gsLst>
                 <a:gs pos="0">
                   <a:srgbClr val="30C2B7">
@@ -12324,8 +12477,8 @@
         </p:sp>
         <p:sp>
           <p:nvSpPr>
-            <p:cNvPr name="TextBox 8" id="8"/>
-            <p:cNvSpPr txBox="true"/>
+            <p:cNvPr id="8" name="TextBox 8"/>
+            <p:cNvSpPr txBox="1"/>
             <p:nvPr/>
           </p:nvSpPr>
           <p:spPr>
@@ -12338,7 +12491,7 @@
             </a:prstGeom>
           </p:spPr>
           <p:txBody>
-            <a:bodyPr anchor="ctr" rtlCol="false" tIns="50800" lIns="50800" bIns="50800" rIns="50800"/>
+            <a:bodyPr lIns="50800" tIns="50800" rIns="50800" bIns="50800" rtlCol="0" anchor="ctr"/>
             <a:lstStyle/>
             <a:p>
               <a:pPr algn="ctr">
@@ -12346,20 +12499,21 @@
                   <a:spcPts val="2520"/>
                 </a:lnSpc>
               </a:pPr>
+              <a:endParaRPr/>
             </a:p>
           </p:txBody>
         </p:sp>
       </p:grpSp>
       <p:grpSp>
         <p:nvGrpSpPr>
-          <p:cNvPr name="Group 9" id="9"/>
+          <p:cNvPr id="9" name="Group 9"/>
           <p:cNvGrpSpPr>
-            <a:grpSpLocks noChangeAspect="true"/>
+            <a:grpSpLocks noChangeAspect="1"/>
           </p:cNvGrpSpPr>
           <p:nvPr/>
         </p:nvGrpSpPr>
         <p:grpSpPr>
-          <a:xfrm rot="0">
+          <a:xfrm>
             <a:off x="6875107" y="3812910"/>
             <a:ext cx="4537786" cy="8978789"/>
             <a:chOff x="0" y="0"/>
@@ -12368,12 +12522,12 @@
         </p:grpSpPr>
         <p:sp>
           <p:nvSpPr>
-            <p:cNvPr name="Freeform 10" id="10"/>
+            <p:cNvPr id="10" name="Freeform 10"/>
             <p:cNvSpPr/>
             <p:nvPr/>
           </p:nvSpPr>
           <p:spPr>
-            <a:xfrm flipH="false" flipV="false" rot="0">
+            <a:xfrm>
               <a:off x="53340" y="25400"/>
               <a:ext cx="2513330" cy="5132070"/>
             </a:xfrm>
@@ -12382,9 +12536,9 @@
               <a:gdLst/>
               <a:ahLst/>
               <a:cxnLst/>
-              <a:rect r="r" b="b" t="t" l="l"/>
+              <a:rect l="l" t="t" r="r" b="b"/>
               <a:pathLst>
-                <a:path h="5132070" w="2513330">
+                <a:path w="2513330" h="5132070">
                   <a:moveTo>
                     <a:pt x="2159000" y="0"/>
                   </a:moveTo>
@@ -12543,23 +12697,23 @@
         </p:sp>
         <p:sp>
           <p:nvSpPr>
-            <p:cNvPr name="Freeform 11" id="11"/>
+            <p:cNvPr id="11" name="Freeform 11"/>
             <p:cNvSpPr/>
             <p:nvPr/>
           </p:nvSpPr>
           <p:spPr>
-            <a:xfrm flipH="false" flipV="false" rot="0">
+            <a:xfrm>
               <a:off x="185420" y="156210"/>
-              <a:ext cx="2251710" cy="4876800"/>
+              <a:ext cx="2250453" cy="4876800"/>
             </a:xfrm>
             <a:custGeom>
               <a:avLst/>
               <a:gdLst/>
               <a:ahLst/>
               <a:cxnLst/>
-              <a:rect r="r" b="b" t="t" l="l"/>
+              <a:rect l="l" t="t" r="r" b="b"/>
               <a:pathLst>
-                <a:path h="4876800" w="2251710">
+                <a:path w="2250453" h="4876800">
                   <a:moveTo>
                     <a:pt x="2040890" y="0"/>
                   </a:moveTo>
@@ -12624,19 +12778,19 @@
             <a:blipFill>
               <a:blip r:embed="rId3"/>
               <a:stretch>
-                <a:fillRect l="-64895" t="0" r="-121653" b="0"/>
+                <a:fillRect l="-64895" r="-121653"/>
               </a:stretch>
             </a:blipFill>
           </p:spPr>
         </p:sp>
         <p:sp>
           <p:nvSpPr>
-            <p:cNvPr name="Freeform 12" id="12"/>
+            <p:cNvPr id="12" name="Freeform 12"/>
             <p:cNvSpPr/>
             <p:nvPr/>
           </p:nvSpPr>
           <p:spPr>
-            <a:xfrm flipH="false" flipV="false" rot="0">
+            <a:xfrm>
               <a:off x="1121410" y="198120"/>
               <a:ext cx="347980" cy="43180"/>
             </a:xfrm>
@@ -12645,9 +12799,9 @@
               <a:gdLst/>
               <a:ahLst/>
               <a:cxnLst/>
-              <a:rect r="r" b="b" t="t" l="l"/>
+              <a:rect l="l" t="t" r="r" b="b"/>
               <a:pathLst>
-                <a:path h="43180" w="347980">
+                <a:path w="347980" h="43180">
                   <a:moveTo>
                     <a:pt x="326390" y="0"/>
                   </a:moveTo>
@@ -12688,55 +12842,55 @@
         </p:sp>
         <p:sp>
           <p:nvSpPr>
-            <p:cNvPr name="Freeform 13" id="13"/>
+            <p:cNvPr id="13" name="Freeform 13"/>
             <p:cNvSpPr/>
             <p:nvPr/>
           </p:nvSpPr>
           <p:spPr>
-            <a:xfrm flipH="false" flipV="false" rot="0">
-              <a:off x="1578312" y="187909"/>
-              <a:ext cx="66636" cy="63602"/>
+            <a:xfrm>
+              <a:off x="1579738" y="187960"/>
+              <a:ext cx="63785" cy="63501"/>
             </a:xfrm>
             <a:custGeom>
               <a:avLst/>
               <a:gdLst/>
               <a:ahLst/>
               <a:cxnLst/>
-              <a:rect r="r" b="b" t="t" l="l"/>
+              <a:rect l="l" t="t" r="r" b="b"/>
               <a:pathLst>
-                <a:path h="63602" w="66636">
+                <a:path w="63785" h="63501">
                   <a:moveTo>
-                    <a:pt x="33318" y="51"/>
+                    <a:pt x="31892" y="0"/>
                   </a:moveTo>
                   <a:cubicBezTo>
-                    <a:pt x="21941" y="0"/>
-                    <a:pt x="11406" y="6040"/>
-                    <a:pt x="5703" y="15885"/>
-                  </a:cubicBezTo>
-                  <a:cubicBezTo>
-                    <a:pt x="0" y="25729"/>
-                    <a:pt x="0" y="37873"/>
-                    <a:pt x="5703" y="47717"/>
-                  </a:cubicBezTo>
-                  <a:cubicBezTo>
-                    <a:pt x="11406" y="57562"/>
-                    <a:pt x="21941" y="63602"/>
-                    <a:pt x="33318" y="63551"/>
-                  </a:cubicBezTo>
-                  <a:cubicBezTo>
-                    <a:pt x="44695" y="63602"/>
-                    <a:pt x="55230" y="57562"/>
-                    <a:pt x="60933" y="47717"/>
-                  </a:cubicBezTo>
-                  <a:cubicBezTo>
-                    <a:pt x="66636" y="37873"/>
-                    <a:pt x="66636" y="25729"/>
-                    <a:pt x="60933" y="15885"/>
-                  </a:cubicBezTo>
-                  <a:cubicBezTo>
-                    <a:pt x="55230" y="6040"/>
-                    <a:pt x="44695" y="0"/>
-                    <a:pt x="33318" y="51"/>
+                    <a:pt x="20515" y="-51"/>
+                    <a:pt x="9980" y="5989"/>
+                    <a:pt x="4277" y="15834"/>
+                  </a:cubicBezTo>
+                  <a:cubicBezTo>
+                    <a:pt x="-1426" y="25678"/>
+                    <a:pt x="-1426" y="37822"/>
+                    <a:pt x="4277" y="47666"/>
+                  </a:cubicBezTo>
+                  <a:cubicBezTo>
+                    <a:pt x="9980" y="57511"/>
+                    <a:pt x="20515" y="63551"/>
+                    <a:pt x="31892" y="63500"/>
+                  </a:cubicBezTo>
+                  <a:cubicBezTo>
+                    <a:pt x="43269" y="63551"/>
+                    <a:pt x="53804" y="57511"/>
+                    <a:pt x="59507" y="47666"/>
+                  </a:cubicBezTo>
+                  <a:cubicBezTo>
+                    <a:pt x="65210" y="37822"/>
+                    <a:pt x="65210" y="25678"/>
+                    <a:pt x="59507" y="15834"/>
+                  </a:cubicBezTo>
+                  <a:cubicBezTo>
+                    <a:pt x="53804" y="5989"/>
+                    <a:pt x="43269" y="-51"/>
+                    <a:pt x="31892" y="0"/>
                   </a:cubicBezTo>
                   <a:close/>
                 </a:path>
@@ -12749,12 +12903,12 @@
         </p:sp>
         <p:sp>
           <p:nvSpPr>
-            <p:cNvPr name="Freeform 14" id="14"/>
+            <p:cNvPr id="14" name="Freeform 14"/>
             <p:cNvSpPr/>
             <p:nvPr/>
           </p:nvSpPr>
           <p:spPr>
-            <a:xfrm flipH="false" flipV="false" rot="0">
+            <a:xfrm>
               <a:off x="0" y="685800"/>
               <a:ext cx="27940" cy="213360"/>
             </a:xfrm>
@@ -12763,9 +12917,9 @@
               <a:gdLst/>
               <a:ahLst/>
               <a:cxnLst/>
-              <a:rect r="r" b="b" t="t" l="l"/>
+              <a:rect l="l" t="t" r="r" b="b"/>
               <a:pathLst>
-                <a:path h="213360" w="27940">
+                <a:path w="27940" h="213360">
                   <a:moveTo>
                     <a:pt x="0" y="26670"/>
                   </a:moveTo>
@@ -12796,12 +12950,12 @@
         </p:sp>
         <p:sp>
           <p:nvSpPr>
-            <p:cNvPr name="Freeform 15" id="15"/>
+            <p:cNvPr id="15" name="Freeform 15"/>
             <p:cNvSpPr/>
             <p:nvPr/>
           </p:nvSpPr>
           <p:spPr>
-            <a:xfrm flipH="false" flipV="false" rot="0">
+            <a:xfrm>
               <a:off x="0" y="1057910"/>
               <a:ext cx="27940" cy="384810"/>
             </a:xfrm>
@@ -12810,9 +12964,9 @@
               <a:gdLst/>
               <a:ahLst/>
               <a:cxnLst/>
-              <a:rect r="r" b="b" t="t" l="l"/>
+              <a:rect l="l" t="t" r="r" b="b"/>
               <a:pathLst>
-                <a:path h="384810" w="27940">
+                <a:path w="27940" h="384810">
                   <a:moveTo>
                     <a:pt x="0" y="26670"/>
                   </a:moveTo>
@@ -12843,12 +12997,12 @@
         </p:sp>
         <p:sp>
           <p:nvSpPr>
-            <p:cNvPr name="Freeform 16" id="16"/>
+            <p:cNvPr id="16" name="Freeform 16"/>
             <p:cNvSpPr/>
             <p:nvPr/>
           </p:nvSpPr>
           <p:spPr>
-            <a:xfrm flipH="false" flipV="false" rot="0">
+            <a:xfrm>
               <a:off x="0" y="1526540"/>
               <a:ext cx="27940" cy="386080"/>
             </a:xfrm>
@@ -12857,9 +13011,9 @@
               <a:gdLst/>
               <a:ahLst/>
               <a:cxnLst/>
-              <a:rect r="r" b="b" t="t" l="l"/>
+              <a:rect l="l" t="t" r="r" b="b"/>
               <a:pathLst>
-                <a:path h="386080" w="27940">
+                <a:path w="27940" h="386080">
                   <a:moveTo>
                     <a:pt x="0" y="27940"/>
                   </a:moveTo>
@@ -12890,12 +13044,12 @@
         </p:sp>
         <p:sp>
           <p:nvSpPr>
-            <p:cNvPr name="Freeform 17" id="17"/>
+            <p:cNvPr id="17" name="Freeform 17"/>
             <p:cNvSpPr/>
             <p:nvPr/>
           </p:nvSpPr>
           <p:spPr>
-            <a:xfrm flipH="false" flipV="false" rot="0">
+            <a:xfrm>
               <a:off x="2592070" y="1184910"/>
               <a:ext cx="27940" cy="618490"/>
             </a:xfrm>
@@ -12904,9 +13058,9 @@
               <a:gdLst/>
               <a:ahLst/>
               <a:cxnLst/>
-              <a:rect r="r" b="b" t="t" l="l"/>
+              <a:rect l="l" t="t" r="r" b="b"/>
               <a:pathLst>
-                <a:path h="618490" w="27940">
+                <a:path w="27940" h="618490">
                   <a:moveTo>
                     <a:pt x="0" y="0"/>
                   </a:moveTo>
@@ -12937,12 +13091,12 @@
         </p:sp>
         <p:sp>
           <p:nvSpPr>
-            <p:cNvPr name="Freeform 18" id="18"/>
+            <p:cNvPr id="18" name="Freeform 18"/>
             <p:cNvSpPr/>
             <p:nvPr/>
           </p:nvSpPr>
           <p:spPr>
-            <a:xfrm flipH="false" flipV="false" rot="0">
+            <a:xfrm>
               <a:off x="27940" y="0"/>
               <a:ext cx="2564130" cy="5182870"/>
             </a:xfrm>
@@ -12951,9 +13105,9 @@
               <a:gdLst/>
               <a:ahLst/>
               <a:cxnLst/>
-              <a:rect r="r" b="b" t="t" l="l"/>
+              <a:rect l="l" t="t" r="r" b="b"/>
               <a:pathLst>
-                <a:path h="5182870" w="2564130">
+                <a:path w="2564130" h="5182870">
                   <a:moveTo>
                     <a:pt x="2564130" y="1184910"/>
                   </a:moveTo>
@@ -13113,12 +13267,12 @@
       </p:grpSp>
       <p:sp>
         <p:nvSpPr>
-          <p:cNvPr name="TextBox 19" id="19"/>
-          <p:cNvSpPr txBox="true"/>
+          <p:cNvPr id="19" name="TextBox 19"/>
+          <p:cNvSpPr txBox="1"/>
           <p:nvPr/>
         </p:nvSpPr>
         <p:spPr>
-          <a:xfrm rot="0">
+          <a:xfrm>
             <a:off x="2174944" y="3502406"/>
             <a:ext cx="2836426" cy="567933"/>
           </a:xfrm>
@@ -13127,7 +13281,7 @@
           </a:prstGeom>
         </p:spPr>
         <p:txBody>
-          <a:bodyPr anchor="t" rtlCol="false" tIns="0" lIns="0" bIns="0" rIns="0">
+          <a:bodyPr lIns="0" tIns="0" rIns="0" bIns="0" rtlCol="0" anchor="t">
             <a:spAutoFit/>
           </a:bodyPr>
           <a:lstStyle/>
@@ -13138,7 +13292,7 @@
               </a:lnSpc>
             </a:pPr>
             <a:r>
-              <a:rPr lang="en-US" sz="2310" b="true">
+              <a:rPr lang="en-US" sz="2310" b="1">
                 <a:solidFill>
                   <a:srgbClr val="373737"/>
                 </a:solidFill>
@@ -13154,7 +13308,7 @@
       </p:sp>
       <p:sp>
         <p:nvSpPr>
-          <p:cNvPr name="AutoShape 20" id="20"/>
+          <p:cNvPr id="20" name="AutoShape 20"/>
           <p:cNvSpPr/>
           <p:nvPr/>
         </p:nvSpPr>
@@ -13166,19 +13320,19 @@
           <a:prstGeom prst="line">
             <a:avLst/>
           </a:prstGeom>
-          <a:ln cap="flat" w="38100">
+          <a:ln w="38100" cap="flat">
             <a:solidFill>
               <a:srgbClr val="373737"/>
             </a:solidFill>
             <a:prstDash val="solid"/>
-            <a:headEnd type="none" len="sm" w="sm"/>
-            <a:tailEnd type="none" len="sm" w="sm"/>
+            <a:headEnd type="none" w="sm" len="sm"/>
+            <a:tailEnd type="none" w="sm" len="sm"/>
           </a:ln>
         </p:spPr>
       </p:sp>
       <p:sp>
         <p:nvSpPr>
-          <p:cNvPr name="AutoShape 21" id="21"/>
+          <p:cNvPr id="21" name="AutoShape 21"/>
           <p:cNvSpPr/>
           <p:nvPr/>
         </p:nvSpPr>
@@ -13190,24 +13344,24 @@
           <a:prstGeom prst="line">
             <a:avLst/>
           </a:prstGeom>
-          <a:ln cap="flat" w="38100">
+          <a:ln w="38100" cap="flat">
             <a:solidFill>
               <a:srgbClr val="373737"/>
             </a:solidFill>
             <a:prstDash val="solid"/>
-            <a:headEnd type="none" len="sm" w="sm"/>
-            <a:tailEnd type="none" len="sm" w="sm"/>
+            <a:headEnd type="none" w="sm" len="sm"/>
+            <a:tailEnd type="none" w="sm" len="sm"/>
           </a:ln>
         </p:spPr>
       </p:sp>
       <p:sp>
         <p:nvSpPr>
-          <p:cNvPr name="TextBox 22" id="22"/>
-          <p:cNvSpPr txBox="true"/>
+          <p:cNvPr id="22" name="TextBox 22"/>
+          <p:cNvSpPr txBox="1"/>
           <p:nvPr/>
         </p:nvSpPr>
         <p:spPr>
-          <a:xfrm rot="0">
+          <a:xfrm>
             <a:off x="2174944" y="6487429"/>
             <a:ext cx="3353299" cy="567933"/>
           </a:xfrm>
@@ -13216,7 +13370,7 @@
           </a:prstGeom>
         </p:spPr>
         <p:txBody>
-          <a:bodyPr anchor="t" rtlCol="false" tIns="0" lIns="0" bIns="0" rIns="0">
+          <a:bodyPr lIns="0" tIns="0" rIns="0" bIns="0" rtlCol="0" anchor="t">
             <a:spAutoFit/>
           </a:bodyPr>
           <a:lstStyle/>
@@ -13227,7 +13381,7 @@
               </a:lnSpc>
             </a:pPr>
             <a:r>
-              <a:rPr lang="en-US" sz="2310" b="true">
+              <a:rPr lang="en-US" sz="2310" b="1">
                 <a:solidFill>
                   <a:srgbClr val="373737"/>
                 </a:solidFill>
@@ -13243,7 +13397,7 @@
       </p:sp>
       <p:sp>
         <p:nvSpPr>
-          <p:cNvPr name="AutoShape 23" id="23"/>
+          <p:cNvPr id="23" name="AutoShape 23"/>
           <p:cNvSpPr/>
           <p:nvPr/>
         </p:nvSpPr>
@@ -13255,19 +13409,19 @@
           <a:prstGeom prst="line">
             <a:avLst/>
           </a:prstGeom>
-          <a:ln cap="flat" w="38100">
+          <a:ln w="38100" cap="flat">
             <a:solidFill>
               <a:srgbClr val="373737"/>
             </a:solidFill>
             <a:prstDash val="solid"/>
-            <a:headEnd type="none" len="sm" w="sm"/>
-            <a:tailEnd type="none" len="sm" w="sm"/>
+            <a:headEnd type="none" w="sm" len="sm"/>
+            <a:tailEnd type="none" w="sm" len="sm"/>
           </a:ln>
         </p:spPr>
       </p:sp>
       <p:sp>
         <p:nvSpPr>
-          <p:cNvPr name="AutoShape 24" id="24"/>
+          <p:cNvPr id="24" name="AutoShape 24"/>
           <p:cNvSpPr/>
           <p:nvPr/>
         </p:nvSpPr>
@@ -13279,24 +13433,24 @@
           <a:prstGeom prst="line">
             <a:avLst/>
           </a:prstGeom>
-          <a:ln cap="flat" w="38100">
+          <a:ln w="38100" cap="flat">
             <a:solidFill>
               <a:srgbClr val="373737"/>
             </a:solidFill>
             <a:prstDash val="solid"/>
-            <a:headEnd type="none" len="sm" w="sm"/>
-            <a:tailEnd type="none" len="sm" w="sm"/>
+            <a:headEnd type="none" w="sm" len="sm"/>
+            <a:tailEnd type="none" w="sm" len="sm"/>
           </a:ln>
         </p:spPr>
       </p:sp>
       <p:grpSp>
         <p:nvGrpSpPr>
-          <p:cNvPr name="Group 25" id="25"/>
+          <p:cNvPr id="25" name="Group 25"/>
           <p:cNvGrpSpPr/>
           <p:nvPr/>
         </p:nvGrpSpPr>
         <p:grpSpPr>
-          <a:xfrm rot="0">
+          <a:xfrm>
             <a:off x="5528243" y="1028700"/>
             <a:ext cx="7231514" cy="1227361"/>
             <a:chOff x="0" y="0"/>
@@ -13305,12 +13459,12 @@
         </p:grpSpPr>
         <p:sp>
           <p:nvSpPr>
-            <p:cNvPr name="TextBox 26" id="26"/>
-            <p:cNvSpPr txBox="true"/>
+            <p:cNvPr id="26" name="TextBox 26"/>
+            <p:cNvSpPr txBox="1"/>
             <p:nvPr/>
           </p:nvSpPr>
           <p:spPr>
-            <a:xfrm rot="0">
+            <a:xfrm>
               <a:off x="0" y="142875"/>
               <a:ext cx="3258797" cy="1493607"/>
             </a:xfrm>
@@ -13319,7 +13473,7 @@
             </a:prstGeom>
           </p:spPr>
           <p:txBody>
-            <a:bodyPr anchor="t" rtlCol="false" tIns="0" lIns="0" bIns="0" rIns="0">
+            <a:bodyPr lIns="0" tIns="0" rIns="0" bIns="0" rtlCol="0" anchor="t">
               <a:spAutoFit/>
             </a:bodyPr>
             <a:lstStyle/>
@@ -13330,7 +13484,7 @@
                 </a:lnSpc>
               </a:pPr>
               <a:r>
-                <a:rPr lang="en-US" sz="8112" b="true">
+                <a:rPr lang="en-US" sz="8112" b="1">
                   <a:solidFill>
                     <a:srgbClr val="707070"/>
                   </a:solidFill>
@@ -13346,12 +13500,12 @@
         </p:sp>
         <p:sp>
           <p:nvSpPr>
-            <p:cNvPr name="TextBox 27" id="27"/>
-            <p:cNvSpPr txBox="true"/>
+            <p:cNvPr id="27" name="TextBox 27"/>
+            <p:cNvSpPr txBox="1"/>
             <p:nvPr/>
           </p:nvSpPr>
           <p:spPr>
-            <a:xfrm rot="0">
+            <a:xfrm>
               <a:off x="2522113" y="142875"/>
               <a:ext cx="7119906" cy="1493607"/>
             </a:xfrm>
@@ -13360,7 +13514,7 @@
             </a:prstGeom>
           </p:spPr>
           <p:txBody>
-            <a:bodyPr anchor="t" rtlCol="false" tIns="0" lIns="0" bIns="0" rIns="0">
+            <a:bodyPr lIns="0" tIns="0" rIns="0" bIns="0" rtlCol="0" anchor="t">
               <a:spAutoFit/>
             </a:bodyPr>
             <a:lstStyle/>
@@ -13371,7 +13525,7 @@
                 </a:lnSpc>
               </a:pPr>
               <a:r>
-                <a:rPr lang="en-US" sz="8112" b="true">
+                <a:rPr lang="en-US" sz="8112" b="1">
                   <a:solidFill>
                     <a:srgbClr val="259D84"/>
                   </a:solidFill>
@@ -13388,12 +13542,12 @@
       </p:grpSp>
       <p:sp>
         <p:nvSpPr>
-          <p:cNvPr name="TextBox 28" id="28"/>
-          <p:cNvSpPr txBox="true"/>
+          <p:cNvPr id="28" name="TextBox 28"/>
+          <p:cNvSpPr txBox="1"/>
           <p:nvPr/>
         </p:nvSpPr>
         <p:spPr>
-          <a:xfrm rot="0">
+          <a:xfrm>
             <a:off x="12432068" y="3810185"/>
             <a:ext cx="3026049" cy="567933"/>
           </a:xfrm>
@@ -13402,7 +13556,7 @@
           </a:prstGeom>
         </p:spPr>
         <p:txBody>
-          <a:bodyPr anchor="t" rtlCol="false" tIns="0" lIns="0" bIns="0" rIns="0">
+          <a:bodyPr lIns="0" tIns="0" rIns="0" bIns="0" rtlCol="0" anchor="t">
             <a:spAutoFit/>
           </a:bodyPr>
           <a:lstStyle/>
@@ -13413,7 +13567,7 @@
               </a:lnSpc>
             </a:pPr>
             <a:r>
-              <a:rPr lang="en-US" sz="2310" b="true">
+              <a:rPr lang="en-US" sz="2310" b="1">
                 <a:solidFill>
                   <a:srgbClr val="373737"/>
                 </a:solidFill>
@@ -13429,12 +13583,12 @@
       </p:sp>
       <p:sp>
         <p:nvSpPr>
-          <p:cNvPr name="TextBox 29" id="29"/>
-          <p:cNvSpPr txBox="true"/>
+          <p:cNvPr id="29" name="TextBox 29"/>
+          <p:cNvSpPr txBox="1"/>
           <p:nvPr/>
         </p:nvSpPr>
         <p:spPr>
-          <a:xfrm rot="0">
+          <a:xfrm>
             <a:off x="12432068" y="4586441"/>
             <a:ext cx="3996291" cy="2211832"/>
           </a:xfrm>
@@ -13443,12 +13597,12 @@
           </a:prstGeom>
         </p:spPr>
         <p:txBody>
-          <a:bodyPr anchor="t" rtlCol="false" tIns="0" lIns="0" bIns="0" rIns="0">
+          <a:bodyPr lIns="0" tIns="0" rIns="0" bIns="0" rtlCol="0" anchor="t">
             <a:spAutoFit/>
           </a:bodyPr>
           <a:lstStyle/>
           <a:p>
-            <a:pPr algn="just" marL="410211" indent="-205106" lvl="1">
+            <a:pPr marL="410211" lvl="1" indent="-205106" algn="just">
               <a:lnSpc>
                 <a:spcPts val="2489"/>
               </a:lnSpc>
@@ -13469,7 +13623,7 @@
             </a:r>
           </a:p>
           <a:p>
-            <a:pPr algn="just" marL="410211" indent="-205106" lvl="1">
+            <a:pPr marL="410211" lvl="1" indent="-205106" algn="just">
               <a:lnSpc>
                 <a:spcPts val="2489"/>
               </a:lnSpc>
@@ -13493,7 +13647,7 @@
             </a:r>
           </a:p>
           <a:p>
-            <a:pPr algn="just" marL="0" indent="0" lvl="0">
+            <a:pPr marL="0" lvl="0" indent="0" algn="just">
               <a:lnSpc>
                 <a:spcPts val="2489"/>
               </a:lnSpc>
@@ -13501,17 +13655,26 @@
                 <a:spcPct val="0"/>
               </a:spcBef>
             </a:pPr>
+            <a:endParaRPr lang="en-US" sz="1900">
+              <a:solidFill>
+                <a:srgbClr val="373737"/>
+              </a:solidFill>
+              <a:latin typeface="Poppins"/>
+              <a:ea typeface="Poppins"/>
+              <a:cs typeface="Poppins"/>
+              <a:sym typeface="Poppins"/>
+            </a:endParaRPr>
           </a:p>
         </p:txBody>
       </p:sp>
       <p:sp>
         <p:nvSpPr>
-          <p:cNvPr name="TextBox 30" id="30"/>
-          <p:cNvSpPr txBox="true"/>
+          <p:cNvPr id="30" name="TextBox 30"/>
+          <p:cNvSpPr txBox="1"/>
           <p:nvPr/>
         </p:nvSpPr>
         <p:spPr>
-          <a:xfrm rot="0">
+          <a:xfrm>
             <a:off x="2174944" y="4332859"/>
             <a:ext cx="3996291" cy="1583182"/>
           </a:xfrm>
@@ -13520,12 +13683,12 @@
           </a:prstGeom>
         </p:spPr>
         <p:txBody>
-          <a:bodyPr anchor="t" rtlCol="false" tIns="0" lIns="0" bIns="0" rIns="0">
+          <a:bodyPr lIns="0" tIns="0" rIns="0" bIns="0" rtlCol="0" anchor="t">
             <a:spAutoFit/>
           </a:bodyPr>
           <a:lstStyle/>
           <a:p>
-            <a:pPr algn="just" marL="0" indent="0" lvl="0">
+            <a:pPr marL="0" lvl="0" indent="0" algn="just">
               <a:lnSpc>
                 <a:spcPts val="2489"/>
               </a:lnSpc>
@@ -13547,12 +13710,12 @@
       </p:sp>
       <p:sp>
         <p:nvSpPr>
-          <p:cNvPr name="TextBox 31" id="31"/>
-          <p:cNvSpPr txBox="true"/>
+          <p:cNvPr id="31" name="TextBox 31"/>
+          <p:cNvSpPr txBox="1"/>
           <p:nvPr/>
         </p:nvSpPr>
         <p:spPr>
-          <a:xfrm rot="0">
+          <a:xfrm>
             <a:off x="2174944" y="7419837"/>
             <a:ext cx="3680988" cy="1897507"/>
           </a:xfrm>
@@ -13561,12 +13724,12 @@
           </a:prstGeom>
         </p:spPr>
         <p:txBody>
-          <a:bodyPr anchor="t" rtlCol="false" tIns="0" lIns="0" bIns="0" rIns="0">
+          <a:bodyPr lIns="0" tIns="0" rIns="0" bIns="0" rtlCol="0" anchor="t">
             <a:spAutoFit/>
           </a:bodyPr>
           <a:lstStyle/>
           <a:p>
-            <a:pPr algn="just" marL="0" indent="0" lvl="0">
+            <a:pPr marL="0" lvl="0" indent="0" algn="just">
               <a:lnSpc>
                 <a:spcPts val="2489"/>
               </a:lnSpc>
@@ -13588,12 +13751,12 @@
       </p:sp>
       <p:sp>
         <p:nvSpPr>
-          <p:cNvPr name="TextBox 32" id="32"/>
-          <p:cNvSpPr txBox="true"/>
+          <p:cNvPr id="32" name="TextBox 32"/>
+          <p:cNvSpPr txBox="1"/>
           <p:nvPr/>
         </p:nvSpPr>
         <p:spPr>
-          <a:xfrm rot="0">
+          <a:xfrm>
             <a:off x="12432068" y="6654794"/>
             <a:ext cx="2504586" cy="301233"/>
           </a:xfrm>
@@ -13602,7 +13765,7 @@
           </a:prstGeom>
         </p:spPr>
         <p:txBody>
-          <a:bodyPr anchor="t" rtlCol="false" tIns="0" lIns="0" bIns="0" rIns="0">
+          <a:bodyPr lIns="0" tIns="0" rIns="0" bIns="0" rtlCol="0" anchor="t">
             <a:spAutoFit/>
           </a:bodyPr>
           <a:lstStyle/>
@@ -13613,7 +13776,7 @@
               </a:lnSpc>
             </a:pPr>
             <a:r>
-              <a:rPr lang="en-US" sz="2310" b="true">
+              <a:rPr lang="en-US" sz="2310" b="1">
                 <a:solidFill>
                   <a:srgbClr val="373737"/>
                 </a:solidFill>
@@ -13629,12 +13792,12 @@
       </p:sp>
       <p:sp>
         <p:nvSpPr>
-          <p:cNvPr name="TextBox 33" id="33"/>
-          <p:cNvSpPr txBox="true"/>
+          <p:cNvPr id="33" name="TextBox 33"/>
+          <p:cNvSpPr txBox="1"/>
           <p:nvPr/>
         </p:nvSpPr>
         <p:spPr>
-          <a:xfrm rot="0">
+          <a:xfrm>
             <a:off x="12432068" y="7281047"/>
             <a:ext cx="4983083" cy="1268857"/>
           </a:xfrm>
@@ -13643,12 +13806,12 @@
           </a:prstGeom>
         </p:spPr>
         <p:txBody>
-          <a:bodyPr anchor="t" rtlCol="false" tIns="0" lIns="0" bIns="0" rIns="0">
+          <a:bodyPr lIns="0" tIns="0" rIns="0" bIns="0" rtlCol="0" anchor="t">
             <a:spAutoFit/>
           </a:bodyPr>
           <a:lstStyle/>
           <a:p>
-            <a:pPr algn="just" marL="0" indent="0" lvl="0">
+            <a:pPr marL="0" lvl="0" indent="0" algn="just">
               <a:lnSpc>
                 <a:spcPts val="2489"/>
               </a:lnSpc>
